--- a/codeswim-pitch-deck.pptx
+++ b/codeswim-pitch-deck.pptx
@@ -15,9 +15,10 @@
     <p:sldId id="263" r:id="rId9"/>
     <p:sldId id="264" r:id="rId10"/>
     <p:sldId id="265" r:id="rId11"/>
+    <p:sldId id="266" r:id="rId12"/>
   </p:sldIdLst>
   <p:notesMasterIdLst>
-    <p:notesMasterId r:id="rId12"/>
+    <p:notesMasterId r:id="rId13"/>
   </p:notesMasterIdLst>
   <p:sldSz cx="9144000" cy="5143500"/>
   <p:notesSz cx="5143500" cy="9144000"/>
@@ -623,6 +624,94 @@
             <a:fld id="{F7021451-1387-4CA6-816F-3879F97B5CBC}" type="slidenum">
               <a:rPr lang="en-US"/>
               <a:t>10</a:t>
+            </a:fld>
+            <a:endParaRPr lang="en-US"/>
+          </a:p>
+        </p:txBody>
+      </p:sp>
+    </p:spTree>
+    <p:extLst>
+      <p:ext uri="{BB962C8B-B14F-4D97-AF65-F5344CB8AC3E}">
+        <p14:creationId xmlns:p14="http://schemas.microsoft.com/office/powerpoint/2010/main" val="1024086991"/>
+      </p:ext>
+    </p:extLst>
+  </p:cSld>
+  <p:clrMapOvr>
+    <a:masterClrMapping/>
+  </p:clrMapOvr>
+</p:notes>
+</file>
+
+<file path=ppt/notesSlides/notesSlide11.xml><?xml version="1.0" encoding="utf-8"?>
+<p:notes xmlns:a="http://schemas.openxmlformats.org/drawingml/2006/main" xmlns:r="http://schemas.openxmlformats.org/officeDocument/2006/relationships" xmlns:p="http://schemas.openxmlformats.org/presentationml/2006/main">
+  <p:cSld>
+    <p:spTree>
+      <p:nvGrpSpPr>
+        <p:cNvPr id="1" name=""/>
+        <p:cNvGrpSpPr/>
+        <p:nvPr/>
+      </p:nvGrpSpPr>
+      <p:grpSpPr>
+        <a:xfrm>
+          <a:off x="0" y="0"/>
+          <a:ext cx="0" cy="0"/>
+          <a:chOff x="0" y="0"/>
+          <a:chExt cx="0" cy="0"/>
+        </a:xfrm>
+      </p:grpSpPr>
+      <p:sp>
+        <p:nvSpPr>
+          <p:cNvPr id="2" name="Slide Image Placeholder 1"/>
+          <p:cNvSpPr>
+            <a:spLocks noGrp="1" noRot="1" noChangeAspect="1"/>
+          </p:cNvSpPr>
+          <p:nvPr>
+            <p:ph type="sldImg"/>
+          </p:nvPr>
+        </p:nvSpPr>
+        <p:spPr/>
+      </p:sp>
+      <p:sp>
+        <p:nvSpPr>
+          <p:cNvPr id="3" name="Notes Placeholder 2"/>
+          <p:cNvSpPr>
+            <a:spLocks noGrp="1"/>
+          </p:cNvSpPr>
+          <p:nvPr>
+            <p:ph type="body" idx="1"/>
+          </p:nvPr>
+        </p:nvSpPr>
+        <p:spPr/>
+        <p:txBody>
+          <a:bodyPr/>
+          <a:lstStyle/>
+          <a:p>
+            <a:r>
+              <a:rPr lang="en-US" dirty="0"/>
+              <a:t/>
+            </a:r>
+            <a:endParaRPr lang="en-US" dirty="0"/>
+          </a:p>
+        </p:txBody>
+      </p:sp>
+      <p:sp>
+        <p:nvSpPr>
+          <p:cNvPr id="4" name="Slide Number Placeholder 3"/>
+          <p:cNvSpPr>
+            <a:spLocks noGrp="1"/>
+          </p:cNvSpPr>
+          <p:nvPr>
+            <p:ph type="sldNum" sz="quarter" idx="10"/>
+          </p:nvPr>
+        </p:nvSpPr>
+        <p:spPr/>
+        <p:txBody>
+          <a:bodyPr/>
+          <a:lstStyle/>
+          <a:p>
+            <a:fld id="{F7021451-1387-4CA6-816F-3879F97B5CBC}" type="slidenum">
+              <a:rPr lang="en-US"/>
+              <a:t>11</a:t>
             </a:fld>
             <a:endParaRPr lang="en-US"/>
           </a:p>
@@ -2105,6 +2194,740 @@
     <p:bg>
       <p:bgPr>
         <a:solidFill>
+          <a:srgbClr val="FFFFFF"/>
+        </a:solidFill>
+      </p:bgPr>
+    </p:bg>
+    <p:spTree>
+      <p:nvGrpSpPr>
+        <p:cNvPr id="1" name=""/>
+        <p:cNvGrpSpPr/>
+        <p:nvPr/>
+      </p:nvGrpSpPr>
+      <p:grpSpPr>
+        <a:xfrm>
+          <a:off x="0" y="0"/>
+          <a:ext cx="0" cy="0"/>
+          <a:chOff x="0" y="0"/>
+          <a:chExt cx="0" cy="0"/>
+        </a:xfrm>
+      </p:grpSpPr>
+      <p:sp>
+        <p:nvSpPr>
+          <p:cNvPr id="2" name="Text 0"/>
+          <p:cNvSpPr/>
+          <p:nvPr/>
+        </p:nvSpPr>
+        <p:spPr>
+          <a:xfrm>
+            <a:off x="457200" y="292608"/>
+            <a:ext cx="8229600" cy="566928"/>
+          </a:xfrm>
+          <a:prstGeom prst="rect">
+            <a:avLst/>
+          </a:prstGeom>
+          <a:noFill/>
+          <a:ln/>
+        </p:spPr>
+        <p:txBody>
+          <a:bodyPr wrap="square" lIns="0" tIns="0" rIns="0" bIns="0" rtlCol="0" anchor="ctr"/>
+          <a:lstStyle/>
+          <a:p>
+            <a:pPr algn="l" indent="0" marL="0">
+              <a:buNone/>
+            </a:pPr>
+            <a:r>
+              <a:rPr lang="en-US" sz="2500" b="1" dirty="0">
+                <a:solidFill>
+                  <a:srgbClr val="13283A"/>
+                </a:solidFill>
+                <a:latin typeface="Consolas" pitchFamily="34" charset="0"/>
+                <a:ea typeface="Consolas" pitchFamily="34" charset="-122"/>
+                <a:cs typeface="Consolas" pitchFamily="34" charset="-120"/>
+              </a:rPr>
+              <a:t>Roadmap</a:t>
+            </a:r>
+            <a:endParaRPr lang="en-US" sz="2500" dirty="0"/>
+          </a:p>
+        </p:txBody>
+      </p:sp>
+      <p:sp>
+        <p:nvSpPr>
+          <p:cNvPr id="3" name="Shape 1"/>
+          <p:cNvSpPr/>
+          <p:nvPr/>
+        </p:nvSpPr>
+        <p:spPr>
+          <a:xfrm>
+            <a:off x="457200" y="1234440"/>
+            <a:ext cx="2621280" cy="3246120"/>
+          </a:xfrm>
+          <a:prstGeom prst="roundRect">
+            <a:avLst>
+              <a:gd name="adj" fmla="val 2791"/>
+            </a:avLst>
+          </a:prstGeom>
+          <a:solidFill>
+            <a:srgbClr val="EDF4F9"/>
+          </a:solidFill>
+          <a:ln/>
+        </p:spPr>
+      </p:sp>
+      <p:sp>
+        <p:nvSpPr>
+          <p:cNvPr id="4" name="Shape 2"/>
+          <p:cNvSpPr/>
+          <p:nvPr/>
+        </p:nvSpPr>
+        <p:spPr>
+          <a:xfrm>
+            <a:off x="685800" y="1463040"/>
+            <a:ext cx="868680" cy="310896"/>
+          </a:xfrm>
+          <a:prstGeom prst="roundRect">
+            <a:avLst>
+              <a:gd name="adj" fmla="val 50000"/>
+            </a:avLst>
+          </a:prstGeom>
+          <a:solidFill>
+            <a:srgbClr val="02C39A"/>
+          </a:solidFill>
+          <a:ln/>
+        </p:spPr>
+      </p:sp>
+      <p:sp>
+        <p:nvSpPr>
+          <p:cNvPr id="5" name="Text 3"/>
+          <p:cNvSpPr/>
+          <p:nvPr/>
+        </p:nvSpPr>
+        <p:spPr>
+          <a:xfrm>
+            <a:off x="685800" y="1463040"/>
+            <a:ext cx="868680" cy="310896"/>
+          </a:xfrm>
+          <a:prstGeom prst="rect">
+            <a:avLst/>
+          </a:prstGeom>
+          <a:noFill/>
+          <a:ln/>
+        </p:spPr>
+        <p:txBody>
+          <a:bodyPr wrap="square" lIns="0" tIns="0" rIns="0" bIns="0" rtlCol="0" anchor="ctr"/>
+          <a:lstStyle/>
+          <a:p>
+            <a:pPr algn="ctr" indent="0" marL="0">
+              <a:buNone/>
+            </a:pPr>
+            <a:r>
+              <a:rPr lang="en-US" sz="1050" b="1" dirty="0">
+                <a:solidFill>
+                  <a:srgbClr val="FFFFFF"/>
+                </a:solidFill>
+                <a:latin typeface="Consolas" pitchFamily="34" charset="0"/>
+                <a:ea typeface="Consolas" pitchFamily="34" charset="-122"/>
+                <a:cs typeface="Consolas" pitchFamily="34" charset="-120"/>
+              </a:rPr>
+              <a:t>NOW</a:t>
+            </a:r>
+            <a:endParaRPr lang="en-US" sz="1050" dirty="0"/>
+          </a:p>
+        </p:txBody>
+      </p:sp>
+      <p:sp>
+        <p:nvSpPr>
+          <p:cNvPr id="6" name="Text 4"/>
+          <p:cNvSpPr/>
+          <p:nvPr/>
+        </p:nvSpPr>
+        <p:spPr>
+          <a:xfrm>
+            <a:off x="1664208" y="1463040"/>
+            <a:ext cx="1249680" cy="310896"/>
+          </a:xfrm>
+          <a:prstGeom prst="rect">
+            <a:avLst/>
+          </a:prstGeom>
+          <a:noFill/>
+          <a:ln/>
+        </p:spPr>
+        <p:txBody>
+          <a:bodyPr wrap="square" lIns="0" tIns="0" rIns="0" bIns="0" rtlCol="0" anchor="ctr"/>
+          <a:lstStyle/>
+          <a:p>
+            <a:pPr indent="0" marL="0">
+              <a:buNone/>
+            </a:pPr>
+            <a:r>
+              <a:rPr lang="en-US" sz="1350" b="1" dirty="0">
+                <a:solidFill>
+                  <a:srgbClr val="13283A"/>
+                </a:solidFill>
+                <a:latin typeface="Calibri" pitchFamily="34" charset="0"/>
+                <a:ea typeface="Calibri" pitchFamily="34" charset="-122"/>
+                <a:cs typeface="Calibri" pitchFamily="34" charset="-120"/>
+              </a:rPr>
+              <a:t>Shipped</a:t>
+            </a:r>
+            <a:endParaRPr lang="en-US" sz="1350" dirty="0"/>
+          </a:p>
+        </p:txBody>
+      </p:sp>
+      <p:sp>
+        <p:nvSpPr>
+          <p:cNvPr id="7" name="Text 5"/>
+          <p:cNvSpPr/>
+          <p:nvPr/>
+        </p:nvSpPr>
+        <p:spPr>
+          <a:xfrm>
+            <a:off x="685800" y="1947672"/>
+            <a:ext cx="2164080" cy="2331720"/>
+          </a:xfrm>
+          <a:prstGeom prst="rect">
+            <a:avLst/>
+          </a:prstGeom>
+          <a:noFill/>
+          <a:ln/>
+        </p:spPr>
+        <p:txBody>
+          <a:bodyPr wrap="square" lIns="0" tIns="0" rIns="0" bIns="0" rtlCol="0" anchor="t"/>
+          <a:lstStyle/>
+          <a:p>
+            <a:pPr marL="152400" indent="-152400">
+              <a:spcAft>
+                <a:spcPts val="700"/>
+              </a:spcAft>
+              <a:buSzPct val="100000"/>
+              <a:buChar char="•"/>
+            </a:pPr>
+            <a:r>
+              <a:rPr lang="en-US" sz="1150" dirty="0">
+                <a:solidFill>
+                  <a:srgbClr val="13283A"/>
+                </a:solidFill>
+                <a:latin typeface="Calibri" pitchFamily="34" charset="0"/>
+                <a:ea typeface="Calibri" pitchFamily="34" charset="-122"/>
+                <a:cs typeface="Calibri" pitchFamily="34" charset="-120"/>
+              </a:rPr>
+              <a:t>Read-only navigator with live reload</a:t>
+            </a:r>
+            <a:endParaRPr lang="en-US" sz="1150" dirty="0"/>
+          </a:p>
+          <a:p>
+            <a:pPr marL="152400" indent="-152400">
+              <a:spcAft>
+                <a:spcPts val="700"/>
+              </a:spcAft>
+              <a:buSzPct val="100000"/>
+              <a:buChar char="•"/>
+            </a:pPr>
+            <a:r>
+              <a:rPr lang="en-US" sz="1150" dirty="0">
+                <a:solidFill>
+                  <a:srgbClr val="13283A"/>
+                </a:solidFill>
+                <a:latin typeface="Calibri" pitchFamily="34" charset="0"/>
+                <a:ea typeface="Calibri" pitchFamily="34" charset="-122"/>
+                <a:cs typeface="Calibri" pitchFamily="34" charset="-120"/>
+              </a:rPr>
+              <a:t>Code pane with line-range highlights</a:t>
+            </a:r>
+            <a:endParaRPr lang="en-US" sz="1150" dirty="0"/>
+          </a:p>
+          <a:p>
+            <a:pPr marL="152400" indent="-152400">
+              <a:spcAft>
+                <a:spcPts val="700"/>
+              </a:spcAft>
+              <a:buSzPct val="100000"/>
+              <a:buChar char="•"/>
+            </a:pPr>
+            <a:r>
+              <a:rPr lang="en-US" sz="1150" dirty="0">
+                <a:solidFill>
+                  <a:srgbClr val="13283A"/>
+                </a:solidFill>
+                <a:latin typeface="Calibri" pitchFamily="34" charset="0"/>
+                <a:ea typeface="Calibri" pitchFamily="34" charset="-122"/>
+                <a:cs typeface="Calibri" pitchFamily="34" charset="-120"/>
+              </a:rPr>
+              <a:t>Git controls &amp; npm script runner</a:t>
+            </a:r>
+            <a:endParaRPr lang="en-US" sz="1150" dirty="0"/>
+          </a:p>
+          <a:p>
+            <a:pPr marL="152400" indent="-152400">
+              <a:spcAft>
+                <a:spcPts val="700"/>
+              </a:spcAft>
+              <a:buSzPct val="100000"/>
+              <a:buChar char="•"/>
+            </a:pPr>
+            <a:r>
+              <a:rPr lang="en-US" sz="1150" dirty="0">
+                <a:solidFill>
+                  <a:srgbClr val="13283A"/>
+                </a:solidFill>
+                <a:latin typeface="Calibri" pitchFamily="34" charset="0"/>
+                <a:ea typeface="Calibri" pitchFamily="34" charset="-122"/>
+                <a:cs typeface="Calibri" pitchFamily="34" charset="-120"/>
+              </a:rPr>
+              <a:t>Agent panel for diagram/code alignment</a:t>
+            </a:r>
+            <a:endParaRPr lang="en-US" sz="1150" dirty="0"/>
+          </a:p>
+          <a:p>
+            <a:pPr marL="152400" indent="-152400">
+              <a:spcAft>
+                <a:spcPts val="700"/>
+              </a:spcAft>
+              <a:buSzPct val="100000"/>
+              <a:buChar char="•"/>
+            </a:pPr>
+            <a:r>
+              <a:rPr lang="en-US" sz="1150" dirty="0">
+                <a:solidFill>
+                  <a:srgbClr val="13283A"/>
+                </a:solidFill>
+                <a:latin typeface="Calibri" pitchFamily="34" charset="0"/>
+                <a:ea typeface="Calibri" pitchFamily="34" charset="-122"/>
+                <a:cs typeface="Calibri" pitchFamily="34" charset="-120"/>
+              </a:rPr>
+              <a:t>Live presence + per-repo chat, gated by GitHub repo access</a:t>
+            </a:r>
+            <a:endParaRPr lang="en-US" sz="1150" dirty="0"/>
+          </a:p>
+        </p:txBody>
+      </p:sp>
+      <p:sp>
+        <p:nvSpPr>
+          <p:cNvPr id="8" name="Shape 6"/>
+          <p:cNvSpPr/>
+          <p:nvPr/>
+        </p:nvSpPr>
+        <p:spPr>
+          <a:xfrm>
+            <a:off x="3261360" y="1234440"/>
+            <a:ext cx="2621280" cy="3246120"/>
+          </a:xfrm>
+          <a:prstGeom prst="roundRect">
+            <a:avLst>
+              <a:gd name="adj" fmla="val 2791"/>
+            </a:avLst>
+          </a:prstGeom>
+          <a:solidFill>
+            <a:srgbClr val="EDF4F9"/>
+          </a:solidFill>
+          <a:ln/>
+        </p:spPr>
+      </p:sp>
+      <p:sp>
+        <p:nvSpPr>
+          <p:cNvPr id="9" name="Shape 7"/>
+          <p:cNvSpPr/>
+          <p:nvPr/>
+        </p:nvSpPr>
+        <p:spPr>
+          <a:xfrm>
+            <a:off x="3489960" y="1463040"/>
+            <a:ext cx="868680" cy="310896"/>
+          </a:xfrm>
+          <a:prstGeom prst="roundRect">
+            <a:avLst>
+              <a:gd name="adj" fmla="val 50000"/>
+            </a:avLst>
+          </a:prstGeom>
+          <a:solidFill>
+            <a:srgbClr val="1C7293"/>
+          </a:solidFill>
+          <a:ln/>
+        </p:spPr>
+      </p:sp>
+      <p:sp>
+        <p:nvSpPr>
+          <p:cNvPr id="10" name="Text 8"/>
+          <p:cNvSpPr/>
+          <p:nvPr/>
+        </p:nvSpPr>
+        <p:spPr>
+          <a:xfrm>
+            <a:off x="3489960" y="1463040"/>
+            <a:ext cx="868680" cy="310896"/>
+          </a:xfrm>
+          <a:prstGeom prst="rect">
+            <a:avLst/>
+          </a:prstGeom>
+          <a:noFill/>
+          <a:ln/>
+        </p:spPr>
+        <p:txBody>
+          <a:bodyPr wrap="square" lIns="0" tIns="0" rIns="0" bIns="0" rtlCol="0" anchor="ctr"/>
+          <a:lstStyle/>
+          <a:p>
+            <a:pPr algn="ctr" indent="0" marL="0">
+              <a:buNone/>
+            </a:pPr>
+            <a:r>
+              <a:rPr lang="en-US" sz="1050" b="1" dirty="0">
+                <a:solidFill>
+                  <a:srgbClr val="FFFFFF"/>
+                </a:solidFill>
+                <a:latin typeface="Consolas" pitchFamily="34" charset="0"/>
+                <a:ea typeface="Consolas" pitchFamily="34" charset="-122"/>
+                <a:cs typeface="Consolas" pitchFamily="34" charset="-120"/>
+              </a:rPr>
+              <a:t>NEXT</a:t>
+            </a:r>
+            <a:endParaRPr lang="en-US" sz="1050" dirty="0"/>
+          </a:p>
+        </p:txBody>
+      </p:sp>
+      <p:sp>
+        <p:nvSpPr>
+          <p:cNvPr id="11" name="Text 9"/>
+          <p:cNvSpPr/>
+          <p:nvPr/>
+        </p:nvSpPr>
+        <p:spPr>
+          <a:xfrm>
+            <a:off x="4468368" y="1463040"/>
+            <a:ext cx="1249680" cy="310896"/>
+          </a:xfrm>
+          <a:prstGeom prst="rect">
+            <a:avLst/>
+          </a:prstGeom>
+          <a:noFill/>
+          <a:ln/>
+        </p:spPr>
+        <p:txBody>
+          <a:bodyPr wrap="square" lIns="0" tIns="0" rIns="0" bIns="0" rtlCol="0" anchor="ctr"/>
+          <a:lstStyle/>
+          <a:p>
+            <a:pPr indent="0" marL="0">
+              <a:buNone/>
+            </a:pPr>
+            <a:r>
+              <a:rPr lang="en-US" sz="1350" b="1" dirty="0">
+                <a:solidFill>
+                  <a:srgbClr val="13283A"/>
+                </a:solidFill>
+                <a:latin typeface="Calibri" pitchFamily="34" charset="0"/>
+                <a:ea typeface="Calibri" pitchFamily="34" charset="-122"/>
+                <a:cs typeface="Calibri" pitchFamily="34" charset="-120"/>
+              </a:rPr>
+              <a:t>In flight</a:t>
+            </a:r>
+            <a:endParaRPr lang="en-US" sz="1350" dirty="0"/>
+          </a:p>
+        </p:txBody>
+      </p:sp>
+      <p:sp>
+        <p:nvSpPr>
+          <p:cNvPr id="12" name="Text 10"/>
+          <p:cNvSpPr/>
+          <p:nvPr/>
+        </p:nvSpPr>
+        <p:spPr>
+          <a:xfrm>
+            <a:off x="3489960" y="1947672"/>
+            <a:ext cx="2164080" cy="2331720"/>
+          </a:xfrm>
+          <a:prstGeom prst="rect">
+            <a:avLst/>
+          </a:prstGeom>
+          <a:noFill/>
+          <a:ln/>
+        </p:spPr>
+        <p:txBody>
+          <a:bodyPr wrap="square" lIns="0" tIns="0" rIns="0" bIns="0" rtlCol="0" anchor="t"/>
+          <a:lstStyle/>
+          <a:p>
+            <a:pPr marL="152400" indent="-152400">
+              <a:spcAft>
+                <a:spcPts val="700"/>
+              </a:spcAft>
+              <a:buSzPct val="100000"/>
+              <a:buChar char="•"/>
+            </a:pPr>
+            <a:r>
+              <a:rPr lang="en-US" sz="1150" dirty="0">
+                <a:solidFill>
+                  <a:srgbClr val="13283A"/>
+                </a:solidFill>
+                <a:latin typeface="Calibri" pitchFamily="34" charset="0"/>
+                <a:ea typeface="Calibri" pitchFamily="34" charset="-122"/>
+                <a:cs typeface="Calibri" pitchFamily="34" charset="-120"/>
+              </a:rPr>
+              <a:t>Coverage gates wired into CI</a:t>
+            </a:r>
+            <a:endParaRPr lang="en-US" sz="1150" dirty="0"/>
+          </a:p>
+          <a:p>
+            <a:pPr marL="152400" indent="-152400">
+              <a:spcAft>
+                <a:spcPts val="700"/>
+              </a:spcAft>
+              <a:buSzPct val="100000"/>
+              <a:buChar char="•"/>
+            </a:pPr>
+            <a:r>
+              <a:rPr lang="en-US" sz="1150" dirty="0">
+                <a:solidFill>
+                  <a:srgbClr val="13283A"/>
+                </a:solidFill>
+                <a:latin typeface="Calibri" pitchFamily="34" charset="0"/>
+                <a:ea typeface="Calibri" pitchFamily="34" charset="-122"/>
+                <a:cs typeface="Calibri" pitchFamily="34" charset="-120"/>
+              </a:rPr>
+              <a:t>Search across the diagram tree</a:t>
+            </a:r>
+            <a:endParaRPr lang="en-US" sz="1150" dirty="0"/>
+          </a:p>
+          <a:p>
+            <a:pPr marL="152400" indent="-152400">
+              <a:spcAft>
+                <a:spcPts val="700"/>
+              </a:spcAft>
+              <a:buSzPct val="100000"/>
+              <a:buChar char="•"/>
+            </a:pPr>
+            <a:r>
+              <a:rPr lang="en-US" sz="1150" dirty="0">
+                <a:solidFill>
+                  <a:srgbClr val="13283A"/>
+                </a:solidFill>
+                <a:latin typeface="Calibri" pitchFamily="34" charset="0"/>
+                <a:ea typeface="Calibri" pitchFamily="34" charset="-122"/>
+                <a:cs typeface="Calibri" pitchFamily="34" charset="-120"/>
+              </a:rPr>
+              <a:t>Agent-generated diagrams for existing repos (bootstrap any codebase)</a:t>
+            </a:r>
+            <a:endParaRPr lang="en-US" sz="1150" dirty="0"/>
+          </a:p>
+        </p:txBody>
+      </p:sp>
+      <p:sp>
+        <p:nvSpPr>
+          <p:cNvPr id="13" name="Shape 11"/>
+          <p:cNvSpPr/>
+          <p:nvPr/>
+        </p:nvSpPr>
+        <p:spPr>
+          <a:xfrm>
+            <a:off x="6065520" y="1234440"/>
+            <a:ext cx="2621280" cy="3246120"/>
+          </a:xfrm>
+          <a:prstGeom prst="roundRect">
+            <a:avLst>
+              <a:gd name="adj" fmla="val 2791"/>
+            </a:avLst>
+          </a:prstGeom>
+          <a:solidFill>
+            <a:srgbClr val="EDF4F9"/>
+          </a:solidFill>
+          <a:ln/>
+        </p:spPr>
+      </p:sp>
+      <p:sp>
+        <p:nvSpPr>
+          <p:cNvPr id="14" name="Shape 12"/>
+          <p:cNvSpPr/>
+          <p:nvPr/>
+        </p:nvSpPr>
+        <p:spPr>
+          <a:xfrm>
+            <a:off x="6294120" y="1463040"/>
+            <a:ext cx="868680" cy="310896"/>
+          </a:xfrm>
+          <a:prstGeom prst="roundRect">
+            <a:avLst>
+              <a:gd name="adj" fmla="val 50000"/>
+            </a:avLst>
+          </a:prstGeom>
+          <a:solidFill>
+            <a:srgbClr val="21295C"/>
+          </a:solidFill>
+          <a:ln/>
+        </p:spPr>
+      </p:sp>
+      <p:sp>
+        <p:nvSpPr>
+          <p:cNvPr id="15" name="Text 13"/>
+          <p:cNvSpPr/>
+          <p:nvPr/>
+        </p:nvSpPr>
+        <p:spPr>
+          <a:xfrm>
+            <a:off x="6294120" y="1463040"/>
+            <a:ext cx="868680" cy="310896"/>
+          </a:xfrm>
+          <a:prstGeom prst="rect">
+            <a:avLst/>
+          </a:prstGeom>
+          <a:noFill/>
+          <a:ln/>
+        </p:spPr>
+        <p:txBody>
+          <a:bodyPr wrap="square" lIns="0" tIns="0" rIns="0" bIns="0" rtlCol="0" anchor="ctr"/>
+          <a:lstStyle/>
+          <a:p>
+            <a:pPr algn="ctr" indent="0" marL="0">
+              <a:buNone/>
+            </a:pPr>
+            <a:r>
+              <a:rPr lang="en-US" sz="1050" b="1" dirty="0">
+                <a:solidFill>
+                  <a:srgbClr val="FFFFFF"/>
+                </a:solidFill>
+                <a:latin typeface="Consolas" pitchFamily="34" charset="0"/>
+                <a:ea typeface="Consolas" pitchFamily="34" charset="-122"/>
+                <a:cs typeface="Consolas" pitchFamily="34" charset="-120"/>
+              </a:rPr>
+              <a:t>LATER</a:t>
+            </a:r>
+            <a:endParaRPr lang="en-US" sz="1050" dirty="0"/>
+          </a:p>
+        </p:txBody>
+      </p:sp>
+      <p:sp>
+        <p:nvSpPr>
+          <p:cNvPr id="16" name="Text 14"/>
+          <p:cNvSpPr/>
+          <p:nvPr/>
+        </p:nvSpPr>
+        <p:spPr>
+          <a:xfrm>
+            <a:off x="7272528" y="1463040"/>
+            <a:ext cx="1249680" cy="310896"/>
+          </a:xfrm>
+          <a:prstGeom prst="rect">
+            <a:avLst/>
+          </a:prstGeom>
+          <a:noFill/>
+          <a:ln/>
+        </p:spPr>
+        <p:txBody>
+          <a:bodyPr wrap="square" lIns="0" tIns="0" rIns="0" bIns="0" rtlCol="0" anchor="ctr"/>
+          <a:lstStyle/>
+          <a:p>
+            <a:pPr indent="0" marL="0">
+              <a:buNone/>
+            </a:pPr>
+            <a:r>
+              <a:rPr lang="en-US" sz="1350" b="1" dirty="0">
+                <a:solidFill>
+                  <a:srgbClr val="13283A"/>
+                </a:solidFill>
+                <a:latin typeface="Calibri" pitchFamily="34" charset="0"/>
+                <a:ea typeface="Calibri" pitchFamily="34" charset="-122"/>
+                <a:cs typeface="Calibri" pitchFamily="34" charset="-120"/>
+              </a:rPr>
+              <a:t>The bet</a:t>
+            </a:r>
+            <a:endParaRPr lang="en-US" sz="1350" dirty="0"/>
+          </a:p>
+        </p:txBody>
+      </p:sp>
+      <p:sp>
+        <p:nvSpPr>
+          <p:cNvPr id="17" name="Text 15"/>
+          <p:cNvSpPr/>
+          <p:nvPr/>
+        </p:nvSpPr>
+        <p:spPr>
+          <a:xfrm>
+            <a:off x="6294120" y="1947672"/>
+            <a:ext cx="2164080" cy="2331720"/>
+          </a:xfrm>
+          <a:prstGeom prst="rect">
+            <a:avLst/>
+          </a:prstGeom>
+          <a:noFill/>
+          <a:ln/>
+        </p:spPr>
+        <p:txBody>
+          <a:bodyPr wrap="square" lIns="0" tIns="0" rIns="0" bIns="0" rtlCol="0" anchor="t"/>
+          <a:lstStyle/>
+          <a:p>
+            <a:pPr marL="152400" indent="-152400">
+              <a:spcAft>
+                <a:spcPts val="700"/>
+              </a:spcAft>
+              <a:buSzPct val="100000"/>
+              <a:buChar char="•"/>
+            </a:pPr>
+            <a:r>
+              <a:rPr lang="en-US" sz="1150" dirty="0">
+                <a:solidFill>
+                  <a:srgbClr val="13283A"/>
+                </a:solidFill>
+                <a:latin typeface="Calibri" pitchFamily="34" charset="0"/>
+                <a:ea typeface="Calibri" pitchFamily="34" charset="-122"/>
+                <a:cs typeface="Calibri" pitchFamily="34" charset="-120"/>
+              </a:rPr>
+              <a:t>Executable flows — the diagram becomes the program, the agent wires the nodes</a:t>
+            </a:r>
+            <a:endParaRPr lang="en-US" sz="1150" dirty="0"/>
+          </a:p>
+          <a:p>
+            <a:pPr marL="152400" indent="-152400">
+              <a:spcAft>
+                <a:spcPts val="700"/>
+              </a:spcAft>
+              <a:buSzPct val="100000"/>
+              <a:buChar char="•"/>
+            </a:pPr>
+            <a:r>
+              <a:rPr lang="en-US" sz="1150" dirty="0">
+                <a:solidFill>
+                  <a:srgbClr val="13283A"/>
+                </a:solidFill>
+                <a:latin typeface="Calibri" pitchFamily="34" charset="0"/>
+                <a:ea typeface="Calibri" pitchFamily="34" charset="-122"/>
+                <a:cs typeface="Calibri" pitchFamily="34" charset="-120"/>
+              </a:rPr>
+              <a:t>Multi-repo navigation &amp; cross-team rooms</a:t>
+            </a:r>
+            <a:endParaRPr lang="en-US" sz="1150" dirty="0"/>
+          </a:p>
+          <a:p>
+            <a:pPr marL="152400" indent="-152400">
+              <a:spcAft>
+                <a:spcPts val="700"/>
+              </a:spcAft>
+              <a:buSzPct val="100000"/>
+              <a:buChar char="•"/>
+            </a:pPr>
+            <a:r>
+              <a:rPr lang="en-US" sz="1150" dirty="0">
+                <a:solidFill>
+                  <a:srgbClr val="13283A"/>
+                </a:solidFill>
+                <a:latin typeface="Calibri" pitchFamily="34" charset="0"/>
+                <a:ea typeface="Calibri" pitchFamily="34" charset="-122"/>
+                <a:cs typeface="Calibri" pitchFamily="34" charset="-120"/>
+              </a:rPr>
+              <a:t>Paid tier around the agentic runner</a:t>
+            </a:r>
+            <a:endParaRPr lang="en-US" sz="1150" dirty="0"/>
+          </a:p>
+        </p:txBody>
+      </p:sp>
+    </p:spTree>
+  </p:cSld>
+  <p:clrMapOvr>
+    <a:masterClrMapping/>
+  </p:clrMapOvr>
+</p:sld>
+</file>
+
+<file path=ppt/slides/slide11.xml><?xml version="1.0" encoding="utf-8"?>
+<p:sld xmlns:a="http://schemas.openxmlformats.org/drawingml/2006/main" xmlns:r="http://schemas.openxmlformats.org/officeDocument/2006/relationships" xmlns:p="http://schemas.openxmlformats.org/presentationml/2006/main">
+  <p:cSld name="Slide 11">
+    <p:bg>
+      <p:bgPr>
+        <a:solidFill>
           <a:srgbClr val="21295C"/>
         </a:solidFill>
       </p:bgPr>
@@ -3829,7 +4652,7 @@
                 <a:ea typeface="Consolas" pitchFamily="34" charset="-122"/>
                 <a:cs typeface="Consolas" pitchFamily="34" charset="-120"/>
               </a:rPr>
-              <a:t>codeswim: the diagram-first code navigator</a:t>
+              <a:t>Two panels, one loop</a:t>
             </a:r>
             <a:endParaRPr lang="en-US" sz="2500" dirty="0"/>
           </a:p>
@@ -3837,14 +4660,82 @@
       </p:sp>
       <p:sp>
         <p:nvSpPr>
-          <p:cNvPr id="3" name="Shape 1"/>
-          <p:cNvSpPr/>
-          <p:nvPr/>
-        </p:nvSpPr>
-        <p:spPr>
-          <a:xfrm>
-            <a:off x="457200" y="1170432"/>
-            <a:ext cx="502920" cy="502920"/>
+          <p:cNvPr id="3" name="Text 1"/>
+          <p:cNvSpPr/>
+          <p:nvPr/>
+        </p:nvSpPr>
+        <p:spPr>
+          <a:xfrm>
+            <a:off x="457200" y="896112"/>
+            <a:ext cx="8229600" cy="384048"/>
+          </a:xfrm>
+          <a:prstGeom prst="rect">
+            <a:avLst/>
+          </a:prstGeom>
+          <a:noFill/>
+          <a:ln/>
+        </p:spPr>
+        <p:txBody>
+          <a:bodyPr wrap="square" lIns="0" tIns="0" rIns="0" bIns="0" rtlCol="0" anchor="ctr"/>
+          <a:lstStyle/>
+          <a:p>
+            <a:pPr indent="0" marL="0">
+              <a:buNone/>
+            </a:pPr>
+            <a:r>
+              <a:rPr lang="en-US" sz="1400" dirty="0">
+                <a:solidFill>
+                  <a:srgbClr val="5B7083"/>
+                </a:solidFill>
+                <a:latin typeface="Calibri" pitchFamily="34" charset="0"/>
+                <a:ea typeface="Calibri" pitchFamily="34" charset="-122"/>
+                <a:cs typeface="Calibri" pitchFamily="34" charset="-120"/>
+              </a:rPr>
+              <a:t>codeswim isn't a viewer bolted onto an editor — it's an agentic IDE built around a single feedback loop.</a:t>
+            </a:r>
+            <a:endParaRPr lang="en-US" sz="1400" dirty="0"/>
+          </a:p>
+        </p:txBody>
+      </p:sp>
+      <p:sp>
+        <p:nvSpPr>
+          <p:cNvPr id="4" name="Shape 2"/>
+          <p:cNvSpPr/>
+          <p:nvPr/>
+        </p:nvSpPr>
+        <p:spPr>
+          <a:xfrm>
+            <a:off x="457200" y="1481328"/>
+            <a:ext cx="2621280" cy="2834640"/>
+          </a:xfrm>
+          <a:prstGeom prst="roundRect">
+            <a:avLst>
+              <a:gd name="adj" fmla="val 2791"/>
+            </a:avLst>
+          </a:prstGeom>
+          <a:solidFill>
+            <a:srgbClr val="EDF4F9"/>
+          </a:solidFill>
+          <a:ln/>
+          <a:effectLst>
+            <a:outerShdw sx="100000" sy="100000" kx="0" ky="0" algn="bl" rotWithShape="0" blurRad="88900" dist="25400" dir="8100000">
+              <a:srgbClr val="1A2A3A">
+                <a:alpha val="18000"/>
+              </a:srgbClr>
+            </a:outerShdw>
+          </a:effectLst>
+        </p:spPr>
+      </p:sp>
+      <p:sp>
+        <p:nvSpPr>
+          <p:cNvPr id="5" name="Shape 3"/>
+          <p:cNvSpPr/>
+          <p:nvPr/>
+        </p:nvSpPr>
+        <p:spPr>
+          <a:xfrm>
+            <a:off x="713232" y="1755648"/>
+            <a:ext cx="530352" cy="530352"/>
           </a:xfrm>
           <a:prstGeom prst="ellipse">
             <a:avLst/>
@@ -3857,7 +4748,7 @@
       </p:sp>
       <p:pic>
         <p:nvPicPr>
-          <p:cNvPr id="4" name="Image 0" descr="preencoded.png">    </p:cNvPr>
+          <p:cNvPr id="6" name="Image 0" descr="preencoded.png">    </p:cNvPr>
           <p:cNvPicPr>
             <a:picLocks noChangeAspect="1"/>
           </p:cNvPicPr>
@@ -3871,8 +4762,8 @@
         </p:blipFill>
         <p:spPr>
           <a:xfrm>
-            <a:off x="592988" y="1306220"/>
-            <a:ext cx="231343" cy="231343"/>
+            <a:off x="856427" y="1898843"/>
+            <a:ext cx="243962" cy="243962"/>
           </a:xfrm>
           <a:prstGeom prst="rect">
             <a:avLst/>
@@ -3881,14 +4772,14 @@
       </p:pic>
       <p:sp>
         <p:nvSpPr>
-          <p:cNvPr id="5" name="Text 2"/>
-          <p:cNvSpPr/>
-          <p:nvPr/>
-        </p:nvSpPr>
-        <p:spPr>
-          <a:xfrm>
-            <a:off x="1143000" y="1133856"/>
-            <a:ext cx="4069080" cy="292608"/>
+          <p:cNvPr id="7" name="Text 4"/>
+          <p:cNvSpPr/>
+          <p:nvPr/>
+        </p:nvSpPr>
+        <p:spPr>
+          <a:xfrm>
+            <a:off x="713232" y="2441448"/>
+            <a:ext cx="2109216" cy="347472"/>
           </a:xfrm>
           <a:prstGeom prst="rect">
             <a:avLst/>
@@ -3904,7 +4795,46 @@
               <a:buNone/>
             </a:pPr>
             <a:r>
-              <a:rPr lang="en-US" sz="1450" b="1" dirty="0">
+              <a:rPr lang="en-US" sz="1600" b="1" dirty="0">
+                <a:solidFill>
+                  <a:srgbClr val="13283A"/>
+                </a:solidFill>
+                <a:latin typeface="Consolas" pitchFamily="34" charset="0"/>
+                <a:ea typeface="Consolas" pitchFamily="34" charset="-122"/>
+                <a:cs typeface="Consolas" pitchFamily="34" charset="-120"/>
+              </a:rPr>
+              <a:t>Control</a:t>
+            </a:r>
+            <a:endParaRPr lang="en-US" sz="1600" dirty="0"/>
+          </a:p>
+        </p:txBody>
+      </p:sp>
+      <p:sp>
+        <p:nvSpPr>
+          <p:cNvPr id="8" name="Text 5"/>
+          <p:cNvSpPr/>
+          <p:nvPr/>
+        </p:nvSpPr>
+        <p:spPr>
+          <a:xfrm>
+            <a:off x="713232" y="2852928"/>
+            <a:ext cx="2109216" cy="1188720"/>
+          </a:xfrm>
+          <a:prstGeom prst="rect">
+            <a:avLst/>
+          </a:prstGeom>
+          <a:noFill/>
+          <a:ln/>
+        </p:spPr>
+        <p:txBody>
+          <a:bodyPr wrap="square" lIns="0" tIns="0" rIns="0" bIns="0" rtlCol="0" anchor="t"/>
+          <a:lstStyle/>
+          <a:p>
+            <a:pPr indent="0" marL="0">
+              <a:buNone/>
+            </a:pPr>
+            <a:r>
+              <a:rPr lang="en-US" sz="1250" dirty="0">
                 <a:solidFill>
                   <a:srgbClr val="13283A"/>
                 </a:solidFill>
@@ -3912,61 +4842,51 @@
                 <a:ea typeface="Calibri" pitchFamily="34" charset="-122"/>
                 <a:cs typeface="Calibri" pitchFamily="34" charset="-120"/>
               </a:rPr>
-              <a:t>Point it at a repo</a:t>
-            </a:r>
-            <a:endParaRPr lang="en-US" sz="1450" dirty="0"/>
-          </a:p>
-        </p:txBody>
-      </p:sp>
-      <p:sp>
-        <p:nvSpPr>
-          <p:cNvPr id="6" name="Text 3"/>
-          <p:cNvSpPr/>
-          <p:nvPr/>
-        </p:nvSpPr>
-        <p:spPr>
-          <a:xfrm>
-            <a:off x="1143000" y="1426464"/>
-            <a:ext cx="4069080" cy="566928"/>
-          </a:xfrm>
-          <a:prstGeom prst="rect">
-            <a:avLst/>
-          </a:prstGeom>
-          <a:noFill/>
-          <a:ln/>
-        </p:spPr>
-        <p:txBody>
-          <a:bodyPr wrap="square" lIns="0" tIns="0" rIns="0" bIns="0" rtlCol="0" anchor="t"/>
-          <a:lstStyle/>
-          <a:p>
-            <a:pPr indent="0" marL="0">
-              <a:buNone/>
-            </a:pPr>
-            <a:r>
-              <a:rPr lang="en-US" sz="1150" dirty="0">
-                <a:solidFill>
-                  <a:srgbClr val="5B7083"/>
-                </a:solidFill>
-                <a:latin typeface="Calibri" pitchFamily="34" charset="0"/>
-                <a:ea typeface="Calibri" pitchFamily="34" charset="-122"/>
-                <a:cs typeface="Calibri" pitchFamily="34" charset="-120"/>
-              </a:rPr>
-              <a:t>Opens any folder of markdown + mermaid. No server, no import step, no account.</a:t>
-            </a:r>
-            <a:endParaRPr lang="en-US" sz="1150" dirty="0"/>
-          </a:p>
-        </p:txBody>
-      </p:sp>
-      <p:sp>
-        <p:nvSpPr>
-          <p:cNvPr id="7" name="Shape 4"/>
-          <p:cNvSpPr/>
-          <p:nvPr/>
-        </p:nvSpPr>
-        <p:spPr>
-          <a:xfrm>
-            <a:off x="457200" y="2075688"/>
-            <a:ext cx="502920" cy="502920"/>
+              <a:t>Where you direct the agent — a command strip, not a wall of code. You express intent; the agent does the typing.</a:t>
+            </a:r>
+            <a:endParaRPr lang="en-US" sz="1250" dirty="0"/>
+          </a:p>
+        </p:txBody>
+      </p:sp>
+      <p:sp>
+        <p:nvSpPr>
+          <p:cNvPr id="9" name="Shape 6"/>
+          <p:cNvSpPr/>
+          <p:nvPr/>
+        </p:nvSpPr>
+        <p:spPr>
+          <a:xfrm>
+            <a:off x="3261360" y="1481328"/>
+            <a:ext cx="2621280" cy="2834640"/>
+          </a:xfrm>
+          <a:prstGeom prst="roundRect">
+            <a:avLst>
+              <a:gd name="adj" fmla="val 2791"/>
+            </a:avLst>
+          </a:prstGeom>
+          <a:solidFill>
+            <a:srgbClr val="EDF4F9"/>
+          </a:solidFill>
+          <a:ln/>
+          <a:effectLst>
+            <a:outerShdw sx="100000" sy="100000" kx="0" ky="0" algn="bl" rotWithShape="0" blurRad="88900" dist="25400" dir="8100000">
+              <a:srgbClr val="1A2A3A">
+                <a:alpha val="18000"/>
+              </a:srgbClr>
+            </a:outerShdw>
+          </a:effectLst>
+        </p:spPr>
+      </p:sp>
+      <p:sp>
+        <p:nvSpPr>
+          <p:cNvPr id="10" name="Shape 7"/>
+          <p:cNvSpPr/>
+          <p:nvPr/>
+        </p:nvSpPr>
+        <p:spPr>
+          <a:xfrm>
+            <a:off x="3517392" y="1755648"/>
+            <a:ext cx="530352" cy="530352"/>
           </a:xfrm>
           <a:prstGeom prst="ellipse">
             <a:avLst/>
@@ -3979,7 +4899,7 @@
       </p:sp>
       <p:pic>
         <p:nvPicPr>
-          <p:cNvPr id="8" name="Image 1" descr="preencoded.png">    </p:cNvPr>
+          <p:cNvPr id="11" name="Image 1" descr="preencoded.png">    </p:cNvPr>
           <p:cNvPicPr>
             <a:picLocks noChangeAspect="1"/>
           </p:cNvPicPr>
@@ -3993,8 +4913,8 @@
         </p:blipFill>
         <p:spPr>
           <a:xfrm>
-            <a:off x="592988" y="2211476"/>
-            <a:ext cx="231343" cy="231343"/>
+            <a:off x="3660587" y="1898843"/>
+            <a:ext cx="243962" cy="243962"/>
           </a:xfrm>
           <a:prstGeom prst="rect">
             <a:avLst/>
@@ -4003,14 +4923,14 @@
       </p:pic>
       <p:sp>
         <p:nvSpPr>
-          <p:cNvPr id="9" name="Text 5"/>
-          <p:cNvSpPr/>
-          <p:nvPr/>
-        </p:nvSpPr>
-        <p:spPr>
-          <a:xfrm>
-            <a:off x="1143000" y="2039112"/>
-            <a:ext cx="4069080" cy="292608"/>
+          <p:cNvPr id="12" name="Text 8"/>
+          <p:cNvSpPr/>
+          <p:nvPr/>
+        </p:nvSpPr>
+        <p:spPr>
+          <a:xfrm>
+            <a:off x="3517392" y="2441448"/>
+            <a:ext cx="2109216" cy="347472"/>
           </a:xfrm>
           <a:prstGeom prst="rect">
             <a:avLst/>
@@ -4026,7 +4946,46 @@
               <a:buNone/>
             </a:pPr>
             <a:r>
-              <a:rPr lang="en-US" sz="1450" b="1" dirty="0">
+              <a:rPr lang="en-US" sz="1600" b="1" dirty="0">
+                <a:solidFill>
+                  <a:srgbClr val="13283A"/>
+                </a:solidFill>
+                <a:latin typeface="Consolas" pitchFamily="34" charset="0"/>
+                <a:ea typeface="Consolas" pitchFamily="34" charset="-122"/>
+                <a:cs typeface="Consolas" pitchFamily="34" charset="-120"/>
+              </a:rPr>
+              <a:t>View</a:t>
+            </a:r>
+            <a:endParaRPr lang="en-US" sz="1600" dirty="0"/>
+          </a:p>
+        </p:txBody>
+      </p:sp>
+      <p:sp>
+        <p:nvSpPr>
+          <p:cNvPr id="13" name="Text 9"/>
+          <p:cNvSpPr/>
+          <p:nvPr/>
+        </p:nvSpPr>
+        <p:spPr>
+          <a:xfrm>
+            <a:off x="3517392" y="2852928"/>
+            <a:ext cx="2109216" cy="1188720"/>
+          </a:xfrm>
+          <a:prstGeom prst="rect">
+            <a:avLst/>
+          </a:prstGeom>
+          <a:noFill/>
+          <a:ln/>
+        </p:spPr>
+        <p:txBody>
+          <a:bodyPr wrap="square" lIns="0" tIns="0" rIns="0" bIns="0" rtlCol="0" anchor="t"/>
+          <a:lstStyle/>
+          <a:p>
+            <a:pPr indent="0" marL="0">
+              <a:buNone/>
+            </a:pPr>
+            <a:r>
+              <a:rPr lang="en-US" sz="1250" dirty="0">
                 <a:solidFill>
                   <a:srgbClr val="13283A"/>
                 </a:solidFill>
@@ -4034,74 +4993,64 @@
                 <a:ea typeface="Calibri" pitchFamily="34" charset="-122"/>
                 <a:cs typeface="Calibri" pitchFamily="34" charset="-120"/>
               </a:rPr>
-              <a:t>Click through the architecture</a:t>
-            </a:r>
-            <a:endParaRPr lang="en-US" sz="1450" dirty="0"/>
-          </a:p>
-        </p:txBody>
-      </p:sp>
-      <p:sp>
-        <p:nvSpPr>
-          <p:cNvPr id="10" name="Text 6"/>
-          <p:cNvSpPr/>
-          <p:nvPr/>
-        </p:nvSpPr>
-        <p:spPr>
-          <a:xfrm>
-            <a:off x="1143000" y="2331720"/>
-            <a:ext cx="4069080" cy="566928"/>
-          </a:xfrm>
-          <a:prstGeom prst="rect">
-            <a:avLst/>
-          </a:prstGeom>
-          <a:noFill/>
-          <a:ln/>
-        </p:spPr>
-        <p:txBody>
-          <a:bodyPr wrap="square" lIns="0" tIns="0" rIns="0" bIns="0" rtlCol="0" anchor="t"/>
-          <a:lstStyle/>
-          <a:p>
-            <a:pPr indent="0" marL="0">
-              <a:buNone/>
-            </a:pPr>
-            <a:r>
-              <a:rPr lang="en-US" sz="1150" dirty="0">
-                <a:solidFill>
-                  <a:srgbClr val="5B7083"/>
-                </a:solidFill>
-                <a:latin typeface="Calibri" pitchFamily="34" charset="0"/>
-                <a:ea typeface="Calibri" pitchFamily="34" charset="-122"/>
-                <a:cs typeface="Calibri" pitchFamily="34" charset="-120"/>
-              </a:rPr>
-              <a:t>Drill from the system overview into subsystems, flows, and finally a highlighted source line.</a:t>
-            </a:r>
-            <a:endParaRPr lang="en-US" sz="1150" dirty="0"/>
-          </a:p>
-        </p:txBody>
-      </p:sp>
-      <p:sp>
-        <p:nvSpPr>
-          <p:cNvPr id="11" name="Shape 7"/>
-          <p:cNvSpPr/>
-          <p:nvPr/>
-        </p:nvSpPr>
-        <p:spPr>
-          <a:xfrm>
-            <a:off x="457200" y="2980944"/>
-            <a:ext cx="502920" cy="502920"/>
+              <a:t>Where you read what happened — the architecture as a live diagram. Once the agent writes the code, this is the panel you live in.</a:t>
+            </a:r>
+            <a:endParaRPr lang="en-US" sz="1250" dirty="0"/>
+          </a:p>
+        </p:txBody>
+      </p:sp>
+      <p:sp>
+        <p:nvSpPr>
+          <p:cNvPr id="14" name="Shape 10"/>
+          <p:cNvSpPr/>
+          <p:nvPr/>
+        </p:nvSpPr>
+        <p:spPr>
+          <a:xfrm>
+            <a:off x="6065520" y="1481328"/>
+            <a:ext cx="2621280" cy="2834640"/>
+          </a:xfrm>
+          <a:prstGeom prst="roundRect">
+            <a:avLst>
+              <a:gd name="adj" fmla="val 2791"/>
+            </a:avLst>
+          </a:prstGeom>
+          <a:solidFill>
+            <a:srgbClr val="EDF4F9"/>
+          </a:solidFill>
+          <a:ln/>
+          <a:effectLst>
+            <a:outerShdw sx="100000" sy="100000" kx="0" ky="0" algn="bl" rotWithShape="0" blurRad="88900" dist="25400" dir="8100000">
+              <a:srgbClr val="1A2A3A">
+                <a:alpha val="18000"/>
+              </a:srgbClr>
+            </a:outerShdw>
+          </a:effectLst>
+        </p:spPr>
+      </p:sp>
+      <p:sp>
+        <p:nvSpPr>
+          <p:cNvPr id="15" name="Shape 11"/>
+          <p:cNvSpPr/>
+          <p:nvPr/>
+        </p:nvSpPr>
+        <p:spPr>
+          <a:xfrm>
+            <a:off x="6321552" y="1755648"/>
+            <a:ext cx="530352" cy="530352"/>
           </a:xfrm>
           <a:prstGeom prst="ellipse">
             <a:avLst/>
           </a:prstGeom>
           <a:solidFill>
-            <a:srgbClr val="02C39A"/>
+            <a:srgbClr val="21295C"/>
           </a:solidFill>
           <a:ln/>
         </p:spPr>
       </p:sp>
       <p:pic>
         <p:nvPicPr>
-          <p:cNvPr id="12" name="Image 2" descr="preencoded.png">    </p:cNvPr>
+          <p:cNvPr id="16" name="Image 2" descr="preencoded.png">    </p:cNvPr>
           <p:cNvPicPr>
             <a:picLocks noChangeAspect="1"/>
           </p:cNvPicPr>
@@ -4115,8 +5064,8 @@
         </p:blipFill>
         <p:spPr>
           <a:xfrm>
-            <a:off x="592988" y="3116732"/>
-            <a:ext cx="231343" cy="231343"/>
+            <a:off x="6464747" y="1898843"/>
+            <a:ext cx="243962" cy="243962"/>
           </a:xfrm>
           <a:prstGeom prst="rect">
             <a:avLst/>
@@ -4125,14 +5074,14 @@
       </p:pic>
       <p:sp>
         <p:nvSpPr>
-          <p:cNvPr id="13" name="Text 8"/>
-          <p:cNvSpPr/>
-          <p:nvPr/>
-        </p:nvSpPr>
-        <p:spPr>
-          <a:xfrm>
-            <a:off x="1143000" y="2944368"/>
-            <a:ext cx="4069080" cy="292608"/>
+          <p:cNvPr id="17" name="Text 12"/>
+          <p:cNvSpPr/>
+          <p:nvPr/>
+        </p:nvSpPr>
+        <p:spPr>
+          <a:xfrm>
+            <a:off x="6321552" y="2441448"/>
+            <a:ext cx="2109216" cy="347472"/>
           </a:xfrm>
           <a:prstGeom prst="rect">
             <a:avLst/>
@@ -4148,7 +5097,46 @@
               <a:buNone/>
             </a:pPr>
             <a:r>
-              <a:rPr lang="en-US" sz="1450" b="1" dirty="0">
+              <a:rPr lang="en-US" sz="1600" b="1" dirty="0">
+                <a:solidFill>
+                  <a:srgbClr val="13283A"/>
+                </a:solidFill>
+                <a:latin typeface="Consolas" pitchFamily="34" charset="0"/>
+                <a:ea typeface="Consolas" pitchFamily="34" charset="-122"/>
+                <a:cs typeface="Consolas" pitchFamily="34" charset="-120"/>
+              </a:rPr>
+              <a:t>In the loop, not on the stage</a:t>
+            </a:r>
+            <a:endParaRPr lang="en-US" sz="1600" dirty="0"/>
+          </a:p>
+        </p:txBody>
+      </p:sp>
+      <p:sp>
+        <p:nvSpPr>
+          <p:cNvPr id="18" name="Text 13"/>
+          <p:cNvSpPr/>
+          <p:nvPr/>
+        </p:nvSpPr>
+        <p:spPr>
+          <a:xfrm>
+            <a:off x="6321552" y="2852928"/>
+            <a:ext cx="2109216" cy="1188720"/>
+          </a:xfrm>
+          <a:prstGeom prst="rect">
+            <a:avLst/>
+          </a:prstGeom>
+          <a:noFill/>
+          <a:ln/>
+        </p:spPr>
+        <p:txBody>
+          <a:bodyPr wrap="square" lIns="0" tIns="0" rIns="0" bIns="0" rtlCol="0" anchor="t"/>
+          <a:lstStyle/>
+          <a:p>
+            <a:pPr indent="0" marL="0">
+              <a:buNone/>
+            </a:pPr>
+            <a:r>
+              <a:rPr lang="en-US" sz="1250" dirty="0">
                 <a:solidFill>
                   <a:srgbClr val="13283A"/>
                 </a:solidFill>
@@ -4156,121 +5144,52 @@
                 <a:ea typeface="Calibri" pitchFamily="34" charset="-122"/>
                 <a:cs typeface="Calibri" pitchFamily="34" charset="-120"/>
               </a:rPr>
-              <a:t>Always live</a:t>
-            </a:r>
-            <a:endParaRPr lang="en-US" sz="1450" dirty="0"/>
-          </a:p>
-        </p:txBody>
-      </p:sp>
-      <p:sp>
-        <p:nvSpPr>
-          <p:cNvPr id="14" name="Text 9"/>
-          <p:cNvSpPr/>
-          <p:nvPr/>
-        </p:nvSpPr>
-        <p:spPr>
-          <a:xfrm>
-            <a:off x="1143000" y="3236976"/>
-            <a:ext cx="4069080" cy="566928"/>
-          </a:xfrm>
-          <a:prstGeom prst="rect">
-            <a:avLst/>
-          </a:prstGeom>
-          <a:noFill/>
-          <a:ln/>
-        </p:spPr>
-        <p:txBody>
-          <a:bodyPr wrap="square" lIns="0" tIns="0" rIns="0" bIns="0" rtlCol="0" anchor="t"/>
-          <a:lstStyle/>
-          <a:p>
-            <a:pPr indent="0" marL="0">
-              <a:buNone/>
-            </a:pPr>
-            <a:r>
-              <a:rPr lang="en-US" sz="1150" dirty="0">
-                <a:solidFill>
-                  <a:srgbClr val="5B7083"/>
+              <a:t>The agent works silently and surfaces a settled diagram to judge — checkpoints, not a stream you babysit.</a:t>
+            </a:r>
+            <a:endParaRPr lang="en-US" sz="1250" dirty="0"/>
+          </a:p>
+        </p:txBody>
+      </p:sp>
+      <p:sp>
+        <p:nvSpPr>
+          <p:cNvPr id="19" name="Text 14"/>
+          <p:cNvSpPr/>
+          <p:nvPr/>
+        </p:nvSpPr>
+        <p:spPr>
+          <a:xfrm>
+            <a:off x="457200" y="4526280"/>
+            <a:ext cx="8229600" cy="365760"/>
+          </a:xfrm>
+          <a:prstGeom prst="rect">
+            <a:avLst/>
+          </a:prstGeom>
+          <a:noFill/>
+          <a:ln/>
+        </p:spPr>
+        <p:txBody>
+          <a:bodyPr wrap="square" lIns="0" tIns="0" rIns="0" bIns="0" rtlCol="0" anchor="ctr"/>
+          <a:lstStyle/>
+          <a:p>
+            <a:pPr algn="ctr" indent="0" marL="0">
+              <a:buNone/>
+            </a:pPr>
+            <a:r>
+              <a:rPr lang="en-US" sz="1500" b="1" i="1" dirty="0">
+                <a:solidFill>
+                  <a:srgbClr val="065A82"/>
                 </a:solidFill>
                 <a:latin typeface="Calibri" pitchFamily="34" charset="0"/>
                 <a:ea typeface="Calibri" pitchFamily="34" charset="-122"/>
                 <a:cs typeface="Calibri" pitchFamily="34" charset="-120"/>
               </a:rPr>
-              <a:t>A file watcher re-renders within a second of any edit — diagrams behave like a running view, not a static doc.</a:t>
-            </a:r>
-            <a:endParaRPr lang="en-US" sz="1150" dirty="0"/>
-          </a:p>
-        </p:txBody>
-      </p:sp>
-      <p:sp>
-        <p:nvSpPr>
-          <p:cNvPr id="15" name="Shape 10"/>
-          <p:cNvSpPr/>
-          <p:nvPr/>
-        </p:nvSpPr>
-        <p:spPr>
-          <a:xfrm>
-            <a:off x="457200" y="3886200"/>
-            <a:ext cx="502920" cy="502920"/>
-          </a:xfrm>
-          <a:prstGeom prst="ellipse">
-            <a:avLst/>
-          </a:prstGeom>
-          <a:solidFill>
-            <a:srgbClr val="21295C"/>
-          </a:solidFill>
-          <a:ln/>
-        </p:spPr>
-      </p:sp>
-      <p:pic>
-        <p:nvPicPr>
-          <p:cNvPr id="16" name="Image 3" descr="preencoded.png">    </p:cNvPr>
-          <p:cNvPicPr>
-            <a:picLocks noChangeAspect="1"/>
-          </p:cNvPicPr>
-          <p:nvPr/>
-        </p:nvPicPr>
-        <p:blipFill>
-          <a:blip r:embed="rId4"/>
-          <a:stretch>
-            <a:fillRect/>
-          </a:stretch>
-        </p:blipFill>
-        <p:spPr>
-          <a:xfrm>
-            <a:off x="592988" y="4021988"/>
-            <a:ext cx="231343" cy="231343"/>
-          </a:xfrm>
-          <a:prstGeom prst="rect">
-            <a:avLst/>
-          </a:prstGeom>
-        </p:spPr>
-      </p:pic>
-      <p:sp>
-        <p:nvSpPr>
-          <p:cNvPr id="17" name="Text 11"/>
-          <p:cNvSpPr/>
-          <p:nvPr/>
-        </p:nvSpPr>
-        <p:spPr>
-          <a:xfrm>
-            <a:off x="1143000" y="3849624"/>
-            <a:ext cx="4069080" cy="292608"/>
-          </a:xfrm>
-          <a:prstGeom prst="rect">
-            <a:avLst/>
-          </a:prstGeom>
-          <a:noFill/>
-          <a:ln/>
-        </p:spPr>
-        <p:txBody>
-          <a:bodyPr wrap="square" lIns="0" tIns="0" rIns="0" bIns="0" rtlCol="0" anchor="ctr"/>
-          <a:lstStyle/>
-          <a:p>
-            <a:pPr indent="0" marL="0">
-              <a:buNone/>
-            </a:pPr>
-            <a:r>
-              <a:rPr lang="en-US" sz="1450" b="1" dirty="0">
+              <a:t>Two persistent panels, never three</a:t>
+            </a:r>
+            <a:pPr algn="ctr" indent="0" marL="0">
+              <a:buNone/>
+            </a:pPr>
+            <a:r>
+              <a:rPr lang="en-US" sz="1500" i="1" dirty="0">
                 <a:solidFill>
                   <a:srgbClr val="13283A"/>
                 </a:solidFill>
@@ -4278,534 +5197,9 @@
                 <a:ea typeface="Calibri" pitchFamily="34" charset="-122"/>
                 <a:cs typeface="Calibri" pitchFamily="34" charset="-120"/>
               </a:rPr>
-              <a:t>An agent keeps it honest</a:t>
-            </a:r>
-            <a:endParaRPr lang="en-US" sz="1450" dirty="0"/>
-          </a:p>
-        </p:txBody>
-      </p:sp>
-      <p:sp>
-        <p:nvSpPr>
-          <p:cNvPr id="18" name="Text 12"/>
-          <p:cNvSpPr/>
-          <p:nvPr/>
-        </p:nvSpPr>
-        <p:spPr>
-          <a:xfrm>
-            <a:off x="1143000" y="4142232"/>
-            <a:ext cx="4069080" cy="566928"/>
-          </a:xfrm>
-          <a:prstGeom prst="rect">
-            <a:avLst/>
-          </a:prstGeom>
-          <a:noFill/>
-          <a:ln/>
-        </p:spPr>
-        <p:txBody>
-          <a:bodyPr wrap="square" lIns="0" tIns="0" rIns="0" bIns="0" rtlCol="0" anchor="t"/>
-          <a:lstStyle/>
-          <a:p>
-            <a:pPr indent="0" marL="0">
-              <a:buNone/>
-            </a:pPr>
-            <a:r>
-              <a:rPr lang="en-US" sz="1150" dirty="0">
-                <a:solidFill>
-                  <a:srgbClr val="5B7083"/>
-                </a:solidFill>
-                <a:latin typeface="Calibri" pitchFamily="34" charset="0"/>
-                <a:ea typeface="Calibri" pitchFamily="34" charset="-122"/>
-                <a:cs typeface="Calibri" pitchFamily="34" charset="-120"/>
-              </a:rPr>
-              <a:t>The built-in AI panel updates diagrams when code changes — and vice versa — so the map never lies.</a:t>
-            </a:r>
-            <a:endParaRPr lang="en-US" sz="1150" dirty="0"/>
-          </a:p>
-        </p:txBody>
-      </p:sp>
-      <p:sp>
-        <p:nvSpPr>
-          <p:cNvPr id="19" name="Shape 13"/>
-          <p:cNvSpPr/>
-          <p:nvPr/>
-        </p:nvSpPr>
-        <p:spPr>
-          <a:xfrm>
-            <a:off x="5486400" y="1170432"/>
-            <a:ext cx="3200400" cy="3246120"/>
-          </a:xfrm>
-          <a:prstGeom prst="roundRect">
-            <a:avLst>
-              <a:gd name="adj" fmla="val 2286"/>
-            </a:avLst>
-          </a:prstGeom>
-          <a:solidFill>
-            <a:srgbClr val="FFFFFF"/>
-          </a:solidFill>
-          <a:ln w="12700">
-            <a:solidFill>
-              <a:srgbClr val="C9D7E2"/>
-            </a:solidFill>
-            <a:prstDash val="solid"/>
-          </a:ln>
-          <a:effectLst>
-            <a:outerShdw sx="100000" sy="100000" kx="0" ky="0" algn="bl" rotWithShape="0" blurRad="88900" dist="25400" dir="8100000">
-              <a:srgbClr val="1A2A3A">
-                <a:alpha val="18000"/>
-              </a:srgbClr>
-            </a:outerShdw>
-          </a:effectLst>
-        </p:spPr>
-      </p:sp>
-      <p:sp>
-        <p:nvSpPr>
-          <p:cNvPr id="20" name="Shape 14"/>
-          <p:cNvSpPr/>
-          <p:nvPr/>
-        </p:nvSpPr>
-        <p:spPr>
-          <a:xfrm>
-            <a:off x="5596128" y="1298448"/>
-            <a:ext cx="2980944" cy="292608"/>
-          </a:xfrm>
-          <a:prstGeom prst="rect">
-            <a:avLst/>
-          </a:prstGeom>
-          <a:solidFill>
-            <a:srgbClr val="EDF4F9"/>
-          </a:solidFill>
-          <a:ln/>
-        </p:spPr>
-      </p:sp>
-      <p:sp>
-        <p:nvSpPr>
-          <p:cNvPr id="21" name="Text 15"/>
-          <p:cNvSpPr/>
-          <p:nvPr/>
-        </p:nvSpPr>
-        <p:spPr>
-          <a:xfrm>
-            <a:off x="5687568" y="1298448"/>
-            <a:ext cx="2834640" cy="292608"/>
-          </a:xfrm>
-          <a:prstGeom prst="rect">
-            <a:avLst/>
-          </a:prstGeom>
-          <a:noFill/>
-          <a:ln/>
-        </p:spPr>
-        <p:txBody>
-          <a:bodyPr wrap="square" lIns="0" tIns="0" rIns="0" bIns="0" rtlCol="0" anchor="ctr"/>
-          <a:lstStyle/>
-          <a:p>
-            <a:pPr indent="0" marL="0">
-              <a:buNone/>
-            </a:pPr>
-            <a:r>
-              <a:rPr lang="en-US" sz="850" dirty="0">
-                <a:solidFill>
-                  <a:srgbClr val="1C7293"/>
-                </a:solidFill>
-                <a:latin typeface="Consolas" pitchFamily="34" charset="0"/>
-                <a:ea typeface="Consolas" pitchFamily="34" charset="-122"/>
-                <a:cs typeface="Consolas" pitchFamily="34" charset="-120"/>
-              </a:rPr>
-              <a:t>overview  ▸  billing  ▸  charge-flow</a:t>
-            </a:r>
-            <a:endParaRPr lang="en-US" sz="850" dirty="0"/>
-          </a:p>
-        </p:txBody>
-      </p:sp>
-      <p:sp>
-        <p:nvSpPr>
-          <p:cNvPr id="22" name="Shape 16"/>
-          <p:cNvSpPr/>
-          <p:nvPr/>
-        </p:nvSpPr>
-        <p:spPr>
-          <a:xfrm>
-            <a:off x="6400800" y="1828800"/>
-            <a:ext cx="1371600" cy="384048"/>
-          </a:xfrm>
-          <a:prstGeom prst="roundRect">
-            <a:avLst>
-              <a:gd name="adj" fmla="val 14286"/>
-            </a:avLst>
-          </a:prstGeom>
-          <a:solidFill>
-            <a:srgbClr val="065A82"/>
-          </a:solidFill>
-          <a:ln w="15875">
-            <a:solidFill>
-              <a:srgbClr val="065A82"/>
-            </a:solidFill>
-            <a:prstDash val="solid"/>
-          </a:ln>
-        </p:spPr>
-      </p:sp>
-      <p:sp>
-        <p:nvSpPr>
-          <p:cNvPr id="23" name="Text 17"/>
-          <p:cNvSpPr/>
-          <p:nvPr/>
-        </p:nvSpPr>
-        <p:spPr>
-          <a:xfrm>
-            <a:off x="6400800" y="1828800"/>
-            <a:ext cx="1371600" cy="384048"/>
-          </a:xfrm>
-          <a:prstGeom prst="rect">
-            <a:avLst/>
-          </a:prstGeom>
-          <a:noFill/>
-          <a:ln/>
-        </p:spPr>
-        <p:txBody>
-          <a:bodyPr wrap="square" lIns="0" tIns="0" rIns="0" bIns="0" rtlCol="0" anchor="ctr"/>
-          <a:lstStyle/>
-          <a:p>
-            <a:pPr algn="ctr" indent="0" marL="0">
-              <a:buNone/>
-            </a:pPr>
-            <a:r>
-              <a:rPr lang="en-US" sz="950" dirty="0">
-                <a:solidFill>
-                  <a:srgbClr val="FFFFFF"/>
-                </a:solidFill>
-                <a:latin typeface="Consolas" pitchFamily="34" charset="0"/>
-                <a:ea typeface="Consolas" pitchFamily="34" charset="-122"/>
-                <a:cs typeface="Consolas" pitchFamily="34" charset="-120"/>
-              </a:rPr>
-              <a:t>API Gateway</a:t>
-            </a:r>
-            <a:endParaRPr lang="en-US" sz="950" dirty="0"/>
-          </a:p>
-        </p:txBody>
-      </p:sp>
-      <p:sp>
-        <p:nvSpPr>
-          <p:cNvPr id="24" name="Shape 18"/>
-          <p:cNvSpPr/>
-          <p:nvPr/>
-        </p:nvSpPr>
-        <p:spPr>
-          <a:xfrm>
-            <a:off x="5806440" y="2697480"/>
-            <a:ext cx="1097280" cy="384048"/>
-          </a:xfrm>
-          <a:prstGeom prst="roundRect">
-            <a:avLst>
-              <a:gd name="adj" fmla="val 14286"/>
-            </a:avLst>
-          </a:prstGeom>
-          <a:solidFill>
-            <a:srgbClr val="EDF4F9"/>
-          </a:solidFill>
-          <a:ln w="15875">
-            <a:solidFill>
-              <a:srgbClr val="1C7293"/>
-            </a:solidFill>
-            <a:prstDash val="solid"/>
-          </a:ln>
-        </p:spPr>
-      </p:sp>
-      <p:sp>
-        <p:nvSpPr>
-          <p:cNvPr id="25" name="Text 19"/>
-          <p:cNvSpPr/>
-          <p:nvPr/>
-        </p:nvSpPr>
-        <p:spPr>
-          <a:xfrm>
-            <a:off x="5806440" y="2697480"/>
-            <a:ext cx="1097280" cy="384048"/>
-          </a:xfrm>
-          <a:prstGeom prst="rect">
-            <a:avLst/>
-          </a:prstGeom>
-          <a:noFill/>
-          <a:ln/>
-        </p:spPr>
-        <p:txBody>
-          <a:bodyPr wrap="square" lIns="0" tIns="0" rIns="0" bIns="0" rtlCol="0" anchor="ctr"/>
-          <a:lstStyle/>
-          <a:p>
-            <a:pPr algn="ctr" indent="0" marL="0">
-              <a:buNone/>
-            </a:pPr>
-            <a:r>
-              <a:rPr lang="en-US" sz="950" dirty="0">
-                <a:solidFill>
-                  <a:srgbClr val="13283A"/>
-                </a:solidFill>
-                <a:latin typeface="Consolas" pitchFamily="34" charset="0"/>
-                <a:ea typeface="Consolas" pitchFamily="34" charset="-122"/>
-                <a:cs typeface="Consolas" pitchFamily="34" charset="-120"/>
-              </a:rPr>
-              <a:t>Charge</a:t>
-            </a:r>
-            <a:endParaRPr lang="en-US" sz="950" dirty="0"/>
-          </a:p>
-        </p:txBody>
-      </p:sp>
-      <p:sp>
-        <p:nvSpPr>
-          <p:cNvPr id="26" name="Shape 20"/>
-          <p:cNvSpPr/>
-          <p:nvPr/>
-        </p:nvSpPr>
-        <p:spPr>
-          <a:xfrm>
-            <a:off x="7269480" y="2697480"/>
-            <a:ext cx="1097280" cy="384048"/>
-          </a:xfrm>
-          <a:prstGeom prst="roundRect">
-            <a:avLst>
-              <a:gd name="adj" fmla="val 14286"/>
-            </a:avLst>
-          </a:prstGeom>
-          <a:solidFill>
-            <a:srgbClr val="EDF4F9"/>
-          </a:solidFill>
-          <a:ln w="15875">
-            <a:solidFill>
-              <a:srgbClr val="1C7293"/>
-            </a:solidFill>
-            <a:prstDash val="solid"/>
-          </a:ln>
-        </p:spPr>
-      </p:sp>
-      <p:sp>
-        <p:nvSpPr>
-          <p:cNvPr id="27" name="Text 21"/>
-          <p:cNvSpPr/>
-          <p:nvPr/>
-        </p:nvSpPr>
-        <p:spPr>
-          <a:xfrm>
-            <a:off x="7269480" y="2697480"/>
-            <a:ext cx="1097280" cy="384048"/>
-          </a:xfrm>
-          <a:prstGeom prst="rect">
-            <a:avLst/>
-          </a:prstGeom>
-          <a:noFill/>
-          <a:ln/>
-        </p:spPr>
-        <p:txBody>
-          <a:bodyPr wrap="square" lIns="0" tIns="0" rIns="0" bIns="0" rtlCol="0" anchor="ctr"/>
-          <a:lstStyle/>
-          <a:p>
-            <a:pPr algn="ctr" indent="0" marL="0">
-              <a:buNone/>
-            </a:pPr>
-            <a:r>
-              <a:rPr lang="en-US" sz="950" dirty="0">
-                <a:solidFill>
-                  <a:srgbClr val="13283A"/>
-                </a:solidFill>
-                <a:latin typeface="Consolas" pitchFamily="34" charset="0"/>
-                <a:ea typeface="Consolas" pitchFamily="34" charset="-122"/>
-                <a:cs typeface="Consolas" pitchFamily="34" charset="-120"/>
-              </a:rPr>
-              <a:t>Refund</a:t>
-            </a:r>
-            <a:endParaRPr lang="en-US" sz="950" dirty="0"/>
-          </a:p>
-        </p:txBody>
-      </p:sp>
-      <p:sp>
-        <p:nvSpPr>
-          <p:cNvPr id="28" name="Shape 22"/>
-          <p:cNvSpPr/>
-          <p:nvPr/>
-        </p:nvSpPr>
-        <p:spPr>
-          <a:xfrm flipH="1">
-            <a:off x="6355080" y="2212848"/>
-            <a:ext cx="731520" cy="484632"/>
-          </a:xfrm>
-          <a:prstGeom prst="line">
-            <a:avLst/>
-          </a:prstGeom>
-          <a:noFill/>
-          <a:ln w="15875">
-            <a:solidFill>
-              <a:srgbClr val="1C7293"/>
-            </a:solidFill>
-            <a:prstDash val="solid"/>
-          </a:ln>
-        </p:spPr>
-      </p:sp>
-      <p:sp>
-        <p:nvSpPr>
-          <p:cNvPr id="29" name="Shape 23"/>
-          <p:cNvSpPr/>
-          <p:nvPr/>
-        </p:nvSpPr>
-        <p:spPr>
-          <a:xfrm>
-            <a:off x="7086600" y="2212848"/>
-            <a:ext cx="731520" cy="484632"/>
-          </a:xfrm>
-          <a:prstGeom prst="line">
-            <a:avLst/>
-          </a:prstGeom>
-          <a:noFill/>
-          <a:ln w="15875">
-            <a:solidFill>
-              <a:srgbClr val="1C7293"/>
-            </a:solidFill>
-            <a:prstDash val="solid"/>
-          </a:ln>
-        </p:spPr>
-      </p:sp>
-      <p:sp>
-        <p:nvSpPr>
-          <p:cNvPr id="30" name="Shape 24"/>
-          <p:cNvSpPr/>
-          <p:nvPr/>
-        </p:nvSpPr>
-        <p:spPr>
-          <a:xfrm>
-            <a:off x="6537960" y="3584448"/>
-            <a:ext cx="1097280" cy="457200"/>
-          </a:xfrm>
-          <a:prstGeom prst="ellipse">
-            <a:avLst/>
-          </a:prstGeom>
-          <a:solidFill>
-            <a:srgbClr val="FFFFFF"/>
-          </a:solidFill>
-          <a:ln w="15875">
-            <a:solidFill>
-              <a:srgbClr val="1C7293"/>
-            </a:solidFill>
-            <a:prstDash val="solid"/>
-          </a:ln>
-        </p:spPr>
-      </p:sp>
-      <p:sp>
-        <p:nvSpPr>
-          <p:cNvPr id="31" name="Text 25"/>
-          <p:cNvSpPr/>
-          <p:nvPr/>
-        </p:nvSpPr>
-        <p:spPr>
-          <a:xfrm>
-            <a:off x="6537960" y="3584448"/>
-            <a:ext cx="1097280" cy="457200"/>
-          </a:xfrm>
-          <a:prstGeom prst="rect">
-            <a:avLst/>
-          </a:prstGeom>
-          <a:noFill/>
-          <a:ln/>
-        </p:spPr>
-        <p:txBody>
-          <a:bodyPr wrap="square" lIns="0" tIns="0" rIns="0" bIns="0" rtlCol="0" anchor="ctr"/>
-          <a:lstStyle/>
-          <a:p>
-            <a:pPr algn="ctr" indent="0" marL="0">
-              <a:buNone/>
-            </a:pPr>
-            <a:r>
-              <a:rPr lang="en-US" sz="900" dirty="0">
-                <a:solidFill>
-                  <a:srgbClr val="13283A"/>
-                </a:solidFill>
-                <a:latin typeface="Consolas" pitchFamily="34" charset="0"/>
-                <a:ea typeface="Consolas" pitchFamily="34" charset="-122"/>
-                <a:cs typeface="Consolas" pitchFamily="34" charset="-120"/>
-              </a:rPr>
-              <a:t>Billing DB</a:t>
-            </a:r>
-            <a:endParaRPr lang="en-US" sz="900" dirty="0"/>
-          </a:p>
-        </p:txBody>
-      </p:sp>
-      <p:sp>
-        <p:nvSpPr>
-          <p:cNvPr id="32" name="Shape 26"/>
-          <p:cNvSpPr/>
-          <p:nvPr/>
-        </p:nvSpPr>
-        <p:spPr>
-          <a:xfrm>
-            <a:off x="6355080" y="3081528"/>
-            <a:ext cx="548640" cy="502920"/>
-          </a:xfrm>
-          <a:prstGeom prst="line">
-            <a:avLst/>
-          </a:prstGeom>
-          <a:noFill/>
-          <a:ln w="15875">
-            <a:solidFill>
-              <a:srgbClr val="1C7293"/>
-            </a:solidFill>
-            <a:prstDash val="solid"/>
-          </a:ln>
-        </p:spPr>
-      </p:sp>
-      <p:sp>
-        <p:nvSpPr>
-          <p:cNvPr id="33" name="Shape 27"/>
-          <p:cNvSpPr/>
-          <p:nvPr/>
-        </p:nvSpPr>
-        <p:spPr>
-          <a:xfrm flipH="1">
-            <a:off x="7269480" y="3081528"/>
-            <a:ext cx="548640" cy="502920"/>
-          </a:xfrm>
-          <a:prstGeom prst="line">
-            <a:avLst/>
-          </a:prstGeom>
-          <a:noFill/>
-          <a:ln w="15875">
-            <a:solidFill>
-              <a:srgbClr val="1C7293"/>
-            </a:solidFill>
-            <a:prstDash val="solid"/>
-          </a:ln>
-        </p:spPr>
-      </p:sp>
-      <p:sp>
-        <p:nvSpPr>
-          <p:cNvPr id="34" name="Text 28"/>
-          <p:cNvSpPr/>
-          <p:nvPr/>
-        </p:nvSpPr>
-        <p:spPr>
-          <a:xfrm>
-            <a:off x="5394960" y="4553712"/>
-            <a:ext cx="3383280" cy="320040"/>
-          </a:xfrm>
-          <a:prstGeom prst="rect">
-            <a:avLst/>
-          </a:prstGeom>
-          <a:noFill/>
-          <a:ln/>
-        </p:spPr>
-        <p:txBody>
-          <a:bodyPr wrap="square" lIns="0" tIns="0" rIns="0" bIns="0" rtlCol="0" anchor="ctr"/>
-          <a:lstStyle/>
-          <a:p>
-            <a:pPr algn="ctr" indent="0" marL="0">
-              <a:buNone/>
-            </a:pPr>
-            <a:r>
-              <a:rPr lang="en-US" sz="1000" i="1" dirty="0">
-                <a:solidFill>
-                  <a:srgbClr val="5B7083"/>
-                </a:solidFill>
-                <a:latin typeface="Calibri" pitchFamily="34" charset="0"/>
-                <a:ea typeface="Calibri" pitchFamily="34" charset="-122"/>
-                <a:cs typeface="Calibri" pitchFamily="34" charset="-120"/>
-              </a:rPr>
-              <a:t>every node is a click — to a child diagram or the source itself</a:t>
-            </a:r>
-            <a:endParaRPr lang="en-US" sz="1000" dirty="0"/>
+              <a:t> — the cardinality of a feedback loop, not austerity.</a:t>
+            </a:r>
+            <a:endParaRPr lang="en-US" sz="1500" dirty="0"/>
           </a:p>
         </p:txBody>
       </p:sp>
@@ -4874,7 +5268,7 @@
                 <a:ea typeface="Consolas" pitchFamily="34" charset="-122"/>
                 <a:cs typeface="Consolas" pitchFamily="34" charset="-120"/>
               </a:rPr>
-              <a:t>Plain markdown, versioned with the code</a:t>
+              <a:t>codeswim: the diagram-first code navigator</a:t>
             </a:r>
             <a:endParaRPr lang="en-US" sz="2500" dirty="0"/>
           </a:p>
@@ -4888,18 +5282,633 @@
         </p:nvSpPr>
         <p:spPr>
           <a:xfrm>
-            <a:off x="457200" y="1143000"/>
-            <a:ext cx="4160520" cy="3611880"/>
+            <a:off x="457200" y="1042416"/>
+            <a:ext cx="502920" cy="502920"/>
+          </a:xfrm>
+          <a:prstGeom prst="ellipse">
+            <a:avLst/>
+          </a:prstGeom>
+          <a:solidFill>
+            <a:srgbClr val="065A82"/>
+          </a:solidFill>
+          <a:ln/>
+        </p:spPr>
+      </p:sp>
+      <p:pic>
+        <p:nvPicPr>
+          <p:cNvPr id="4" name="Image 0" descr="preencoded.png">    </p:cNvPr>
+          <p:cNvPicPr>
+            <a:picLocks noChangeAspect="1"/>
+          </p:cNvPicPr>
+          <p:nvPr/>
+        </p:nvPicPr>
+        <p:blipFill>
+          <a:blip r:embed="rId1"/>
+          <a:stretch>
+            <a:fillRect/>
+          </a:stretch>
+        </p:blipFill>
+        <p:spPr>
+          <a:xfrm>
+            <a:off x="592988" y="1178204"/>
+            <a:ext cx="231343" cy="231343"/>
+          </a:xfrm>
+          <a:prstGeom prst="rect">
+            <a:avLst/>
+          </a:prstGeom>
+        </p:spPr>
+      </p:pic>
+      <p:sp>
+        <p:nvSpPr>
+          <p:cNvPr id="5" name="Text 2"/>
+          <p:cNvSpPr/>
+          <p:nvPr/>
+        </p:nvSpPr>
+        <p:spPr>
+          <a:xfrm>
+            <a:off x="1143000" y="1005840"/>
+            <a:ext cx="4069080" cy="292608"/>
+          </a:xfrm>
+          <a:prstGeom prst="rect">
+            <a:avLst/>
+          </a:prstGeom>
+          <a:noFill/>
+          <a:ln/>
+        </p:spPr>
+        <p:txBody>
+          <a:bodyPr wrap="square" lIns="0" tIns="0" rIns="0" bIns="0" rtlCol="0" anchor="ctr"/>
+          <a:lstStyle/>
+          <a:p>
+            <a:pPr indent="0" marL="0">
+              <a:buNone/>
+            </a:pPr>
+            <a:r>
+              <a:rPr lang="en-US" sz="1450" b="1" dirty="0">
+                <a:solidFill>
+                  <a:srgbClr val="13283A"/>
+                </a:solidFill>
+                <a:latin typeface="Calibri" pitchFamily="34" charset="0"/>
+                <a:ea typeface="Calibri" pitchFamily="34" charset="-122"/>
+                <a:cs typeface="Calibri" pitchFamily="34" charset="-120"/>
+              </a:rPr>
+              <a:t>Point it at a repo</a:t>
+            </a:r>
+            <a:endParaRPr lang="en-US" sz="1450" dirty="0"/>
+          </a:p>
+        </p:txBody>
+      </p:sp>
+      <p:sp>
+        <p:nvSpPr>
+          <p:cNvPr id="6" name="Text 3"/>
+          <p:cNvSpPr/>
+          <p:nvPr/>
+        </p:nvSpPr>
+        <p:spPr>
+          <a:xfrm>
+            <a:off x="1143000" y="1298448"/>
+            <a:ext cx="4069080" cy="420624"/>
+          </a:xfrm>
+          <a:prstGeom prst="rect">
+            <a:avLst/>
+          </a:prstGeom>
+          <a:noFill/>
+          <a:ln/>
+        </p:spPr>
+        <p:txBody>
+          <a:bodyPr wrap="square" lIns="0" tIns="0" rIns="0" bIns="0" rtlCol="0" anchor="t"/>
+          <a:lstStyle/>
+          <a:p>
+            <a:pPr indent="0" marL="0">
+              <a:buNone/>
+            </a:pPr>
+            <a:r>
+              <a:rPr lang="en-US" sz="1150" dirty="0">
+                <a:solidFill>
+                  <a:srgbClr val="5B7083"/>
+                </a:solidFill>
+                <a:latin typeface="Calibri" pitchFamily="34" charset="0"/>
+                <a:ea typeface="Calibri" pitchFamily="34" charset="-122"/>
+                <a:cs typeface="Calibri" pitchFamily="34" charset="-120"/>
+              </a:rPr>
+              <a:t>Opens any folder of markdown + mermaid. No server, no import step, no account.</a:t>
+            </a:r>
+            <a:endParaRPr lang="en-US" sz="1150" dirty="0"/>
+          </a:p>
+        </p:txBody>
+      </p:sp>
+      <p:sp>
+        <p:nvSpPr>
+          <p:cNvPr id="7" name="Shape 4"/>
+          <p:cNvSpPr/>
+          <p:nvPr/>
+        </p:nvSpPr>
+        <p:spPr>
+          <a:xfrm>
+            <a:off x="457200" y="1737360"/>
+            <a:ext cx="502920" cy="502920"/>
+          </a:xfrm>
+          <a:prstGeom prst="ellipse">
+            <a:avLst/>
+          </a:prstGeom>
+          <a:solidFill>
+            <a:srgbClr val="1C7293"/>
+          </a:solidFill>
+          <a:ln/>
+        </p:spPr>
+      </p:sp>
+      <p:pic>
+        <p:nvPicPr>
+          <p:cNvPr id="8" name="Image 1" descr="preencoded.png">    </p:cNvPr>
+          <p:cNvPicPr>
+            <a:picLocks noChangeAspect="1"/>
+          </p:cNvPicPr>
+          <p:nvPr/>
+        </p:nvPicPr>
+        <p:blipFill>
+          <a:blip r:embed="rId2"/>
+          <a:stretch>
+            <a:fillRect/>
+          </a:stretch>
+        </p:blipFill>
+        <p:spPr>
+          <a:xfrm>
+            <a:off x="592988" y="1873148"/>
+            <a:ext cx="231343" cy="231343"/>
+          </a:xfrm>
+          <a:prstGeom prst="rect">
+            <a:avLst/>
+          </a:prstGeom>
+        </p:spPr>
+      </p:pic>
+      <p:sp>
+        <p:nvSpPr>
+          <p:cNvPr id="9" name="Text 5"/>
+          <p:cNvSpPr/>
+          <p:nvPr/>
+        </p:nvSpPr>
+        <p:spPr>
+          <a:xfrm>
+            <a:off x="1143000" y="1700784"/>
+            <a:ext cx="4069080" cy="292608"/>
+          </a:xfrm>
+          <a:prstGeom prst="rect">
+            <a:avLst/>
+          </a:prstGeom>
+          <a:noFill/>
+          <a:ln/>
+        </p:spPr>
+        <p:txBody>
+          <a:bodyPr wrap="square" lIns="0" tIns="0" rIns="0" bIns="0" rtlCol="0" anchor="ctr"/>
+          <a:lstStyle/>
+          <a:p>
+            <a:pPr indent="0" marL="0">
+              <a:buNone/>
+            </a:pPr>
+            <a:r>
+              <a:rPr lang="en-US" sz="1450" b="1" dirty="0">
+                <a:solidFill>
+                  <a:srgbClr val="13283A"/>
+                </a:solidFill>
+                <a:latin typeface="Calibri" pitchFamily="34" charset="0"/>
+                <a:ea typeface="Calibri" pitchFamily="34" charset="-122"/>
+                <a:cs typeface="Calibri" pitchFamily="34" charset="-120"/>
+              </a:rPr>
+              <a:t>Click through the architecture</a:t>
+            </a:r>
+            <a:endParaRPr lang="en-US" sz="1450" dirty="0"/>
+          </a:p>
+        </p:txBody>
+      </p:sp>
+      <p:sp>
+        <p:nvSpPr>
+          <p:cNvPr id="10" name="Text 6"/>
+          <p:cNvSpPr/>
+          <p:nvPr/>
+        </p:nvSpPr>
+        <p:spPr>
+          <a:xfrm>
+            <a:off x="1143000" y="1993392"/>
+            <a:ext cx="4069080" cy="420624"/>
+          </a:xfrm>
+          <a:prstGeom prst="rect">
+            <a:avLst/>
+          </a:prstGeom>
+          <a:noFill/>
+          <a:ln/>
+        </p:spPr>
+        <p:txBody>
+          <a:bodyPr wrap="square" lIns="0" tIns="0" rIns="0" bIns="0" rtlCol="0" anchor="t"/>
+          <a:lstStyle/>
+          <a:p>
+            <a:pPr indent="0" marL="0">
+              <a:buNone/>
+            </a:pPr>
+            <a:r>
+              <a:rPr lang="en-US" sz="1150" dirty="0">
+                <a:solidFill>
+                  <a:srgbClr val="5B7083"/>
+                </a:solidFill>
+                <a:latin typeface="Calibri" pitchFamily="34" charset="0"/>
+                <a:ea typeface="Calibri" pitchFamily="34" charset="-122"/>
+                <a:cs typeface="Calibri" pitchFamily="34" charset="-120"/>
+              </a:rPr>
+              <a:t>Drill from the system overview into subsystems, flows, and finally a highlighted source line.</a:t>
+            </a:r>
+            <a:endParaRPr lang="en-US" sz="1150" dirty="0"/>
+          </a:p>
+        </p:txBody>
+      </p:sp>
+      <p:sp>
+        <p:nvSpPr>
+          <p:cNvPr id="11" name="Shape 7"/>
+          <p:cNvSpPr/>
+          <p:nvPr/>
+        </p:nvSpPr>
+        <p:spPr>
+          <a:xfrm>
+            <a:off x="457200" y="2432304"/>
+            <a:ext cx="502920" cy="502920"/>
+          </a:xfrm>
+          <a:prstGeom prst="ellipse">
+            <a:avLst/>
+          </a:prstGeom>
+          <a:solidFill>
+            <a:srgbClr val="02C39A"/>
+          </a:solidFill>
+          <a:ln/>
+        </p:spPr>
+      </p:sp>
+      <p:pic>
+        <p:nvPicPr>
+          <p:cNvPr id="12" name="Image 2" descr="preencoded.png">    </p:cNvPr>
+          <p:cNvPicPr>
+            <a:picLocks noChangeAspect="1"/>
+          </p:cNvPicPr>
+          <p:nvPr/>
+        </p:nvPicPr>
+        <p:blipFill>
+          <a:blip r:embed="rId3"/>
+          <a:stretch>
+            <a:fillRect/>
+          </a:stretch>
+        </p:blipFill>
+        <p:spPr>
+          <a:xfrm>
+            <a:off x="592988" y="2568092"/>
+            <a:ext cx="231343" cy="231343"/>
+          </a:xfrm>
+          <a:prstGeom prst="rect">
+            <a:avLst/>
+          </a:prstGeom>
+        </p:spPr>
+      </p:pic>
+      <p:sp>
+        <p:nvSpPr>
+          <p:cNvPr id="13" name="Text 8"/>
+          <p:cNvSpPr/>
+          <p:nvPr/>
+        </p:nvSpPr>
+        <p:spPr>
+          <a:xfrm>
+            <a:off x="1143000" y="2395728"/>
+            <a:ext cx="4069080" cy="292608"/>
+          </a:xfrm>
+          <a:prstGeom prst="rect">
+            <a:avLst/>
+          </a:prstGeom>
+          <a:noFill/>
+          <a:ln/>
+        </p:spPr>
+        <p:txBody>
+          <a:bodyPr wrap="square" lIns="0" tIns="0" rIns="0" bIns="0" rtlCol="0" anchor="ctr"/>
+          <a:lstStyle/>
+          <a:p>
+            <a:pPr indent="0" marL="0">
+              <a:buNone/>
+            </a:pPr>
+            <a:r>
+              <a:rPr lang="en-US" sz="1450" b="1" dirty="0">
+                <a:solidFill>
+                  <a:srgbClr val="13283A"/>
+                </a:solidFill>
+                <a:latin typeface="Calibri" pitchFamily="34" charset="0"/>
+                <a:ea typeface="Calibri" pitchFamily="34" charset="-122"/>
+                <a:cs typeface="Calibri" pitchFamily="34" charset="-120"/>
+              </a:rPr>
+              <a:t>Always live</a:t>
+            </a:r>
+            <a:endParaRPr lang="en-US" sz="1450" dirty="0"/>
+          </a:p>
+        </p:txBody>
+      </p:sp>
+      <p:sp>
+        <p:nvSpPr>
+          <p:cNvPr id="14" name="Text 9"/>
+          <p:cNvSpPr/>
+          <p:nvPr/>
+        </p:nvSpPr>
+        <p:spPr>
+          <a:xfrm>
+            <a:off x="1143000" y="2688336"/>
+            <a:ext cx="4069080" cy="420624"/>
+          </a:xfrm>
+          <a:prstGeom prst="rect">
+            <a:avLst/>
+          </a:prstGeom>
+          <a:noFill/>
+          <a:ln/>
+        </p:spPr>
+        <p:txBody>
+          <a:bodyPr wrap="square" lIns="0" tIns="0" rIns="0" bIns="0" rtlCol="0" anchor="t"/>
+          <a:lstStyle/>
+          <a:p>
+            <a:pPr indent="0" marL="0">
+              <a:buNone/>
+            </a:pPr>
+            <a:r>
+              <a:rPr lang="en-US" sz="1150" dirty="0">
+                <a:solidFill>
+                  <a:srgbClr val="5B7083"/>
+                </a:solidFill>
+                <a:latin typeface="Calibri" pitchFamily="34" charset="0"/>
+                <a:ea typeface="Calibri" pitchFamily="34" charset="-122"/>
+                <a:cs typeface="Calibri" pitchFamily="34" charset="-120"/>
+              </a:rPr>
+              <a:t>A file watcher re-renders within a second of any edit — diagrams behave like a running view, not a static doc.</a:t>
+            </a:r>
+            <a:endParaRPr lang="en-US" sz="1150" dirty="0"/>
+          </a:p>
+        </p:txBody>
+      </p:sp>
+      <p:sp>
+        <p:nvSpPr>
+          <p:cNvPr id="15" name="Shape 10"/>
+          <p:cNvSpPr/>
+          <p:nvPr/>
+        </p:nvSpPr>
+        <p:spPr>
+          <a:xfrm>
+            <a:off x="457200" y="3127248"/>
+            <a:ext cx="502920" cy="502920"/>
+          </a:xfrm>
+          <a:prstGeom prst="ellipse">
+            <a:avLst/>
+          </a:prstGeom>
+          <a:solidFill>
+            <a:srgbClr val="21295C"/>
+          </a:solidFill>
+          <a:ln/>
+        </p:spPr>
+      </p:sp>
+      <p:pic>
+        <p:nvPicPr>
+          <p:cNvPr id="16" name="Image 3" descr="preencoded.png">    </p:cNvPr>
+          <p:cNvPicPr>
+            <a:picLocks noChangeAspect="1"/>
+          </p:cNvPicPr>
+          <p:nvPr/>
+        </p:nvPicPr>
+        <p:blipFill>
+          <a:blip r:embed="rId4"/>
+          <a:stretch>
+            <a:fillRect/>
+          </a:stretch>
+        </p:blipFill>
+        <p:spPr>
+          <a:xfrm>
+            <a:off x="592988" y="3263036"/>
+            <a:ext cx="231343" cy="231343"/>
+          </a:xfrm>
+          <a:prstGeom prst="rect">
+            <a:avLst/>
+          </a:prstGeom>
+        </p:spPr>
+      </p:pic>
+      <p:sp>
+        <p:nvSpPr>
+          <p:cNvPr id="17" name="Text 11"/>
+          <p:cNvSpPr/>
+          <p:nvPr/>
+        </p:nvSpPr>
+        <p:spPr>
+          <a:xfrm>
+            <a:off x="1143000" y="3090672"/>
+            <a:ext cx="4069080" cy="292608"/>
+          </a:xfrm>
+          <a:prstGeom prst="rect">
+            <a:avLst/>
+          </a:prstGeom>
+          <a:noFill/>
+          <a:ln/>
+        </p:spPr>
+        <p:txBody>
+          <a:bodyPr wrap="square" lIns="0" tIns="0" rIns="0" bIns="0" rtlCol="0" anchor="ctr"/>
+          <a:lstStyle/>
+          <a:p>
+            <a:pPr indent="0" marL="0">
+              <a:buNone/>
+            </a:pPr>
+            <a:r>
+              <a:rPr lang="en-US" sz="1450" b="1" dirty="0">
+                <a:solidFill>
+                  <a:srgbClr val="13283A"/>
+                </a:solidFill>
+                <a:latin typeface="Calibri" pitchFamily="34" charset="0"/>
+                <a:ea typeface="Calibri" pitchFamily="34" charset="-122"/>
+                <a:cs typeface="Calibri" pitchFamily="34" charset="-120"/>
+              </a:rPr>
+              <a:t>An agent keeps it honest</a:t>
+            </a:r>
+            <a:endParaRPr lang="en-US" sz="1450" dirty="0"/>
+          </a:p>
+        </p:txBody>
+      </p:sp>
+      <p:sp>
+        <p:nvSpPr>
+          <p:cNvPr id="18" name="Text 12"/>
+          <p:cNvSpPr/>
+          <p:nvPr/>
+        </p:nvSpPr>
+        <p:spPr>
+          <a:xfrm>
+            <a:off x="1143000" y="3383280"/>
+            <a:ext cx="4069080" cy="420624"/>
+          </a:xfrm>
+          <a:prstGeom prst="rect">
+            <a:avLst/>
+          </a:prstGeom>
+          <a:noFill/>
+          <a:ln/>
+        </p:spPr>
+        <p:txBody>
+          <a:bodyPr wrap="square" lIns="0" tIns="0" rIns="0" bIns="0" rtlCol="0" anchor="t"/>
+          <a:lstStyle/>
+          <a:p>
+            <a:pPr indent="0" marL="0">
+              <a:buNone/>
+            </a:pPr>
+            <a:r>
+              <a:rPr lang="en-US" sz="1150" dirty="0">
+                <a:solidFill>
+                  <a:srgbClr val="5B7083"/>
+                </a:solidFill>
+                <a:latin typeface="Calibri" pitchFamily="34" charset="0"/>
+                <a:ea typeface="Calibri" pitchFamily="34" charset="-122"/>
+                <a:cs typeface="Calibri" pitchFamily="34" charset="-120"/>
+              </a:rPr>
+              <a:t>The built-in AI panel updates diagrams when code changes — and vice versa — so the map never lies.</a:t>
+            </a:r>
+            <a:endParaRPr lang="en-US" sz="1150" dirty="0"/>
+          </a:p>
+        </p:txBody>
+      </p:sp>
+      <p:sp>
+        <p:nvSpPr>
+          <p:cNvPr id="19" name="Shape 13"/>
+          <p:cNvSpPr/>
+          <p:nvPr/>
+        </p:nvSpPr>
+        <p:spPr>
+          <a:xfrm>
+            <a:off x="457200" y="3822192"/>
+            <a:ext cx="502920" cy="502920"/>
+          </a:xfrm>
+          <a:prstGeom prst="ellipse">
+            <a:avLst/>
+          </a:prstGeom>
+          <a:solidFill>
+            <a:srgbClr val="1C7293"/>
+          </a:solidFill>
+          <a:ln/>
+        </p:spPr>
+      </p:sp>
+      <p:pic>
+        <p:nvPicPr>
+          <p:cNvPr id="20" name="Image 4" descr="preencoded.png">    </p:cNvPr>
+          <p:cNvPicPr>
+            <a:picLocks noChangeAspect="1"/>
+          </p:cNvPicPr>
+          <p:nvPr/>
+        </p:nvPicPr>
+        <p:blipFill>
+          <a:blip r:embed="rId5"/>
+          <a:stretch>
+            <a:fillRect/>
+          </a:stretch>
+        </p:blipFill>
+        <p:spPr>
+          <a:xfrm>
+            <a:off x="592988" y="3957980"/>
+            <a:ext cx="231343" cy="231343"/>
+          </a:xfrm>
+          <a:prstGeom prst="rect">
+            <a:avLst/>
+          </a:prstGeom>
+        </p:spPr>
+      </p:pic>
+      <p:sp>
+        <p:nvSpPr>
+          <p:cNvPr id="21" name="Text 14"/>
+          <p:cNvSpPr/>
+          <p:nvPr/>
+        </p:nvSpPr>
+        <p:spPr>
+          <a:xfrm>
+            <a:off x="1143000" y="3785616"/>
+            <a:ext cx="4069080" cy="292608"/>
+          </a:xfrm>
+          <a:prstGeom prst="rect">
+            <a:avLst/>
+          </a:prstGeom>
+          <a:noFill/>
+          <a:ln/>
+        </p:spPr>
+        <p:txBody>
+          <a:bodyPr wrap="square" lIns="0" tIns="0" rIns="0" bIns="0" rtlCol="0" anchor="ctr"/>
+          <a:lstStyle/>
+          <a:p>
+            <a:pPr indent="0" marL="0">
+              <a:buNone/>
+            </a:pPr>
+            <a:r>
+              <a:rPr lang="en-US" sz="1450" b="1" dirty="0">
+                <a:solidFill>
+                  <a:srgbClr val="13283A"/>
+                </a:solidFill>
+                <a:latin typeface="Calibri" pitchFamily="34" charset="0"/>
+                <a:ea typeface="Calibri" pitchFamily="34" charset="-122"/>
+                <a:cs typeface="Calibri" pitchFamily="34" charset="-120"/>
+              </a:rPr>
+              <a:t>See who's reading</a:t>
+            </a:r>
+            <a:endParaRPr lang="en-US" sz="1450" dirty="0"/>
+          </a:p>
+        </p:txBody>
+      </p:sp>
+      <p:sp>
+        <p:nvSpPr>
+          <p:cNvPr id="22" name="Text 15"/>
+          <p:cNvSpPr/>
+          <p:nvPr/>
+        </p:nvSpPr>
+        <p:spPr>
+          <a:xfrm>
+            <a:off x="1143000" y="4078224"/>
+            <a:ext cx="4069080" cy="420624"/>
+          </a:xfrm>
+          <a:prstGeom prst="rect">
+            <a:avLst/>
+          </a:prstGeom>
+          <a:noFill/>
+          <a:ln/>
+        </p:spPr>
+        <p:txBody>
+          <a:bodyPr wrap="square" lIns="0" tIns="0" rIns="0" bIns="0" rtlCol="0" anchor="t"/>
+          <a:lstStyle/>
+          <a:p>
+            <a:pPr indent="0" marL="0">
+              <a:buNone/>
+            </a:pPr>
+            <a:r>
+              <a:rPr lang="en-US" sz="1150" dirty="0">
+                <a:solidFill>
+                  <a:srgbClr val="5B7083"/>
+                </a:solidFill>
+                <a:latin typeface="Calibri" pitchFamily="34" charset="0"/>
+                <a:ea typeface="Calibri" pitchFamily="34" charset="-122"/>
+                <a:cs typeface="Calibri" pitchFamily="34" charset="-120"/>
+              </a:rPr>
+              <a:t>Per-repo presence and chat ride the same diagram tree — you see which subsystem a teammate is on. Access is your GitHub repo permission; no new accounts.</a:t>
+            </a:r>
+            <a:endParaRPr lang="en-US" sz="1150" dirty="0"/>
+          </a:p>
+        </p:txBody>
+      </p:sp>
+      <p:sp>
+        <p:nvSpPr>
+          <p:cNvPr id="23" name="Shape 16"/>
+          <p:cNvSpPr/>
+          <p:nvPr/>
+        </p:nvSpPr>
+        <p:spPr>
+          <a:xfrm>
+            <a:off x="5486400" y="1170432"/>
+            <a:ext cx="3200400" cy="3246120"/>
           </a:xfrm>
           <a:prstGeom prst="roundRect">
             <a:avLst>
-              <a:gd name="adj" fmla="val 2025"/>
+              <a:gd name="adj" fmla="val 2286"/>
             </a:avLst>
           </a:prstGeom>
           <a:solidFill>
-            <a:srgbClr val="0E2433"/>
+            <a:srgbClr val="FFFFFF"/>
           </a:solidFill>
-          <a:ln/>
+          <a:ln w="12700">
+            <a:solidFill>
+              <a:srgbClr val="C9D7E2"/>
+            </a:solidFill>
+            <a:prstDash val="solid"/>
+          </a:ln>
           <a:effectLst>
             <a:outerShdw sx="100000" sy="100000" kx="0" ky="0" algn="bl" rotWithShape="0" blurRad="88900" dist="25400" dir="8100000">
               <a:srgbClr val="1A2A3A">
@@ -4911,358 +5920,427 @@
       </p:sp>
       <p:sp>
         <p:nvSpPr>
-          <p:cNvPr id="4" name="Text 2"/>
-          <p:cNvSpPr/>
-          <p:nvPr/>
-        </p:nvSpPr>
-        <p:spPr>
-          <a:xfrm>
-            <a:off x="749808" y="1371600"/>
-            <a:ext cx="3611880" cy="3200400"/>
-          </a:xfrm>
-          <a:prstGeom prst="rect">
-            <a:avLst/>
-          </a:prstGeom>
-          <a:noFill/>
-          <a:ln/>
-        </p:spPr>
-        <p:txBody>
-          <a:bodyPr wrap="square" lIns="0" tIns="0" rIns="0" bIns="0" rtlCol="0" anchor="t"/>
+          <p:cNvPr id="24" name="Shape 17"/>
+          <p:cNvSpPr/>
+          <p:nvPr/>
+        </p:nvSpPr>
+        <p:spPr>
+          <a:xfrm>
+            <a:off x="5596128" y="1298448"/>
+            <a:ext cx="2980944" cy="292608"/>
+          </a:xfrm>
+          <a:prstGeom prst="rect">
+            <a:avLst/>
+          </a:prstGeom>
+          <a:solidFill>
+            <a:srgbClr val="EDF4F9"/>
+          </a:solidFill>
+          <a:ln/>
+        </p:spPr>
+      </p:sp>
+      <p:sp>
+        <p:nvSpPr>
+          <p:cNvPr id="25" name="Text 18"/>
+          <p:cNvSpPr/>
+          <p:nvPr/>
+        </p:nvSpPr>
+        <p:spPr>
+          <a:xfrm>
+            <a:off x="5687568" y="1298448"/>
+            <a:ext cx="2834640" cy="292608"/>
+          </a:xfrm>
+          <a:prstGeom prst="rect">
+            <a:avLst/>
+          </a:prstGeom>
+          <a:noFill/>
+          <a:ln/>
+        </p:spPr>
+        <p:txBody>
+          <a:bodyPr wrap="square" lIns="0" tIns="0" rIns="0" bIns="0" rtlCol="0" anchor="ctr"/>
           <a:lstStyle/>
           <a:p>
             <a:pPr indent="0" marL="0">
-              <a:lnSpc>
-                <a:spcPts val="1600"/>
-              </a:lnSpc>
-              <a:buNone/>
-            </a:pPr>
-            <a:r>
-              <a:rPr lang="en-US" sz="1050" dirty="0">
-                <a:solidFill>
-                  <a:srgbClr val="5B8AA6"/>
+              <a:buNone/>
+            </a:pPr>
+            <a:r>
+              <a:rPr lang="en-US" sz="850" dirty="0">
+                <a:solidFill>
+                  <a:srgbClr val="1C7293"/>
                 </a:solidFill>
                 <a:latin typeface="Consolas" pitchFamily="34" charset="0"/>
                 <a:ea typeface="Consolas" pitchFamily="34" charset="-122"/>
                 <a:cs typeface="Consolas" pitchFamily="34" charset="-120"/>
               </a:rPr>
-              <a:t>---</a:t>
-            </a:r>
-            <a:endParaRPr lang="en-US" sz="1050" dirty="0"/>
-          </a:p>
-          <a:p>
-            <a:pPr indent="0" marL="0">
-              <a:lnSpc>
-                <a:spcPts val="1600"/>
-              </a:lnSpc>
-              <a:buNone/>
-            </a:pPr>
-            <a:r>
-              <a:rPr lang="en-US" sz="1050" dirty="0">
-                <a:solidFill>
-                  <a:srgbClr val="7FB3D5"/>
+              <a:t>overview  ▸  billing  ▸  charge-flow</a:t>
+            </a:r>
+            <a:endParaRPr lang="en-US" sz="850" dirty="0"/>
+          </a:p>
+        </p:txBody>
+      </p:sp>
+      <p:sp>
+        <p:nvSpPr>
+          <p:cNvPr id="26" name="Shape 19"/>
+          <p:cNvSpPr/>
+          <p:nvPr/>
+        </p:nvSpPr>
+        <p:spPr>
+          <a:xfrm>
+            <a:off x="6400800" y="1828800"/>
+            <a:ext cx="1371600" cy="384048"/>
+          </a:xfrm>
+          <a:prstGeom prst="roundRect">
+            <a:avLst>
+              <a:gd name="adj" fmla="val 14286"/>
+            </a:avLst>
+          </a:prstGeom>
+          <a:solidFill>
+            <a:srgbClr val="065A82"/>
+          </a:solidFill>
+          <a:ln w="15875">
+            <a:solidFill>
+              <a:srgbClr val="065A82"/>
+            </a:solidFill>
+            <a:prstDash val="solid"/>
+          </a:ln>
+        </p:spPr>
+      </p:sp>
+      <p:sp>
+        <p:nvSpPr>
+          <p:cNvPr id="27" name="Text 20"/>
+          <p:cNvSpPr/>
+          <p:nvPr/>
+        </p:nvSpPr>
+        <p:spPr>
+          <a:xfrm>
+            <a:off x="6400800" y="1828800"/>
+            <a:ext cx="1371600" cy="384048"/>
+          </a:xfrm>
+          <a:prstGeom prst="rect">
+            <a:avLst/>
+          </a:prstGeom>
+          <a:noFill/>
+          <a:ln/>
+        </p:spPr>
+        <p:txBody>
+          <a:bodyPr wrap="square" lIns="0" tIns="0" rIns="0" bIns="0" rtlCol="0" anchor="ctr"/>
+          <a:lstStyle/>
+          <a:p>
+            <a:pPr algn="ctr" indent="0" marL="0">
+              <a:buNone/>
+            </a:pPr>
+            <a:r>
+              <a:rPr lang="en-US" sz="950" dirty="0">
+                <a:solidFill>
+                  <a:srgbClr val="FFFFFF"/>
                 </a:solidFill>
                 <a:latin typeface="Consolas" pitchFamily="34" charset="0"/>
                 <a:ea typeface="Consolas" pitchFamily="34" charset="-122"/>
                 <a:cs typeface="Consolas" pitchFamily="34" charset="-120"/>
               </a:rPr>
-              <a:t>name: billing</a:t>
-            </a:r>
-            <a:endParaRPr lang="en-US" sz="1050" dirty="0"/>
-          </a:p>
-          <a:p>
-            <a:pPr indent="0" marL="0">
-              <a:lnSpc>
-                <a:spcPts val="1600"/>
-              </a:lnSpc>
-              <a:buNone/>
-            </a:pPr>
-            <a:r>
-              <a:rPr lang="en-US" sz="1050" dirty="0">
-                <a:solidFill>
-                  <a:srgbClr val="7FB3D5"/>
+              <a:t>API Gateway</a:t>
+            </a:r>
+            <a:endParaRPr lang="en-US" sz="950" dirty="0"/>
+          </a:p>
+        </p:txBody>
+      </p:sp>
+      <p:sp>
+        <p:nvSpPr>
+          <p:cNvPr id="28" name="Shape 21"/>
+          <p:cNvSpPr/>
+          <p:nvPr/>
+        </p:nvSpPr>
+        <p:spPr>
+          <a:xfrm>
+            <a:off x="5806440" y="2697480"/>
+            <a:ext cx="1097280" cy="384048"/>
+          </a:xfrm>
+          <a:prstGeom prst="roundRect">
+            <a:avLst>
+              <a:gd name="adj" fmla="val 14286"/>
+            </a:avLst>
+          </a:prstGeom>
+          <a:solidFill>
+            <a:srgbClr val="EDF4F9"/>
+          </a:solidFill>
+          <a:ln w="15875">
+            <a:solidFill>
+              <a:srgbClr val="1C7293"/>
+            </a:solidFill>
+            <a:prstDash val="solid"/>
+          </a:ln>
+        </p:spPr>
+      </p:sp>
+      <p:sp>
+        <p:nvSpPr>
+          <p:cNvPr id="29" name="Text 22"/>
+          <p:cNvSpPr/>
+          <p:nvPr/>
+        </p:nvSpPr>
+        <p:spPr>
+          <a:xfrm>
+            <a:off x="5806440" y="2697480"/>
+            <a:ext cx="1097280" cy="384048"/>
+          </a:xfrm>
+          <a:prstGeom prst="rect">
+            <a:avLst/>
+          </a:prstGeom>
+          <a:noFill/>
+          <a:ln/>
+        </p:spPr>
+        <p:txBody>
+          <a:bodyPr wrap="square" lIns="0" tIns="0" rIns="0" bIns="0" rtlCol="0" anchor="ctr"/>
+          <a:lstStyle/>
+          <a:p>
+            <a:pPr algn="ctr" indent="0" marL="0">
+              <a:buNone/>
+            </a:pPr>
+            <a:r>
+              <a:rPr lang="en-US" sz="950" dirty="0">
+                <a:solidFill>
+                  <a:srgbClr val="13283A"/>
                 </a:solidFill>
                 <a:latin typeface="Consolas" pitchFamily="34" charset="0"/>
                 <a:ea typeface="Consolas" pitchFamily="34" charset="-122"/>
                 <a:cs typeface="Consolas" pitchFamily="34" charset="-120"/>
               </a:rPr>
-              <a:t>description: charges &amp; refunds</a:t>
-            </a:r>
-            <a:endParaRPr lang="en-US" sz="1050" dirty="0"/>
-          </a:p>
-          <a:p>
-            <a:pPr indent="0" marL="0">
-              <a:lnSpc>
-                <a:spcPts val="1600"/>
-              </a:lnSpc>
-              <a:buNone/>
-            </a:pPr>
-            <a:r>
-              <a:rPr lang="en-US" sz="1050" dirty="0">
-                <a:solidFill>
-                  <a:srgbClr val="5B8AA6"/>
+              <a:t>Charge</a:t>
+            </a:r>
+            <a:endParaRPr lang="en-US" sz="950" dirty="0"/>
+          </a:p>
+        </p:txBody>
+      </p:sp>
+      <p:sp>
+        <p:nvSpPr>
+          <p:cNvPr id="30" name="Shape 23"/>
+          <p:cNvSpPr/>
+          <p:nvPr/>
+        </p:nvSpPr>
+        <p:spPr>
+          <a:xfrm>
+            <a:off x="7269480" y="2697480"/>
+            <a:ext cx="1097280" cy="384048"/>
+          </a:xfrm>
+          <a:prstGeom prst="roundRect">
+            <a:avLst>
+              <a:gd name="adj" fmla="val 14286"/>
+            </a:avLst>
+          </a:prstGeom>
+          <a:solidFill>
+            <a:srgbClr val="EDF4F9"/>
+          </a:solidFill>
+          <a:ln w="15875">
+            <a:solidFill>
+              <a:srgbClr val="1C7293"/>
+            </a:solidFill>
+            <a:prstDash val="solid"/>
+          </a:ln>
+        </p:spPr>
+      </p:sp>
+      <p:sp>
+        <p:nvSpPr>
+          <p:cNvPr id="31" name="Text 24"/>
+          <p:cNvSpPr/>
+          <p:nvPr/>
+        </p:nvSpPr>
+        <p:spPr>
+          <a:xfrm>
+            <a:off x="7269480" y="2697480"/>
+            <a:ext cx="1097280" cy="384048"/>
+          </a:xfrm>
+          <a:prstGeom prst="rect">
+            <a:avLst/>
+          </a:prstGeom>
+          <a:noFill/>
+          <a:ln/>
+        </p:spPr>
+        <p:txBody>
+          <a:bodyPr wrap="square" lIns="0" tIns="0" rIns="0" bIns="0" rtlCol="0" anchor="ctr"/>
+          <a:lstStyle/>
+          <a:p>
+            <a:pPr algn="ctr" indent="0" marL="0">
+              <a:buNone/>
+            </a:pPr>
+            <a:r>
+              <a:rPr lang="en-US" sz="950" dirty="0">
+                <a:solidFill>
+                  <a:srgbClr val="13283A"/>
                 </a:solidFill>
                 <a:latin typeface="Consolas" pitchFamily="34" charset="0"/>
                 <a:ea typeface="Consolas" pitchFamily="34" charset="-122"/>
                 <a:cs typeface="Consolas" pitchFamily="34" charset="-120"/>
               </a:rPr>
-              <a:t>---</a:t>
-            </a:r>
-            <a:endParaRPr lang="en-US" sz="1050" dirty="0"/>
-          </a:p>
-          <a:p>
-            <a:pPr indent="0" marL="0">
-              <a:lnSpc>
-                <a:spcPts val="1600"/>
-              </a:lnSpc>
-              <a:buNone/>
-            </a:pPr>
-            <a:endParaRPr lang="en-US" sz="1050" dirty="0"/>
-          </a:p>
-          <a:p>
-            <a:pPr indent="0" marL="0">
-              <a:lnSpc>
-                <a:spcPts val="1600"/>
-              </a:lnSpc>
-              <a:buNone/>
-            </a:pPr>
-            <a:r>
-              <a:rPr lang="en-US" sz="1050" dirty="0">
-                <a:solidFill>
-                  <a:srgbClr val="5B8AA6"/>
+              <a:t>Refund</a:t>
+            </a:r>
+            <a:endParaRPr lang="en-US" sz="950" dirty="0"/>
+          </a:p>
+        </p:txBody>
+      </p:sp>
+      <p:sp>
+        <p:nvSpPr>
+          <p:cNvPr id="32" name="Shape 25"/>
+          <p:cNvSpPr/>
+          <p:nvPr/>
+        </p:nvSpPr>
+        <p:spPr>
+          <a:xfrm flipH="1">
+            <a:off x="6355080" y="2212848"/>
+            <a:ext cx="731520" cy="484632"/>
+          </a:xfrm>
+          <a:prstGeom prst="line">
+            <a:avLst/>
+          </a:prstGeom>
+          <a:noFill/>
+          <a:ln w="15875">
+            <a:solidFill>
+              <a:srgbClr val="1C7293"/>
+            </a:solidFill>
+            <a:prstDash val="solid"/>
+          </a:ln>
+        </p:spPr>
+      </p:sp>
+      <p:sp>
+        <p:nvSpPr>
+          <p:cNvPr id="33" name="Shape 26"/>
+          <p:cNvSpPr/>
+          <p:nvPr/>
+        </p:nvSpPr>
+        <p:spPr>
+          <a:xfrm>
+            <a:off x="7086600" y="2212848"/>
+            <a:ext cx="731520" cy="484632"/>
+          </a:xfrm>
+          <a:prstGeom prst="line">
+            <a:avLst/>
+          </a:prstGeom>
+          <a:noFill/>
+          <a:ln w="15875">
+            <a:solidFill>
+              <a:srgbClr val="1C7293"/>
+            </a:solidFill>
+            <a:prstDash val="solid"/>
+          </a:ln>
+        </p:spPr>
+      </p:sp>
+      <p:sp>
+        <p:nvSpPr>
+          <p:cNvPr id="34" name="Shape 27"/>
+          <p:cNvSpPr/>
+          <p:nvPr/>
+        </p:nvSpPr>
+        <p:spPr>
+          <a:xfrm>
+            <a:off x="6537960" y="3584448"/>
+            <a:ext cx="1097280" cy="457200"/>
+          </a:xfrm>
+          <a:prstGeom prst="ellipse">
+            <a:avLst/>
+          </a:prstGeom>
+          <a:solidFill>
+            <a:srgbClr val="FFFFFF"/>
+          </a:solidFill>
+          <a:ln w="15875">
+            <a:solidFill>
+              <a:srgbClr val="1C7293"/>
+            </a:solidFill>
+            <a:prstDash val="solid"/>
+          </a:ln>
+        </p:spPr>
+      </p:sp>
+      <p:sp>
+        <p:nvSpPr>
+          <p:cNvPr id="35" name="Text 28"/>
+          <p:cNvSpPr/>
+          <p:nvPr/>
+        </p:nvSpPr>
+        <p:spPr>
+          <a:xfrm>
+            <a:off x="6537960" y="3584448"/>
+            <a:ext cx="1097280" cy="457200"/>
+          </a:xfrm>
+          <a:prstGeom prst="rect">
+            <a:avLst/>
+          </a:prstGeom>
+          <a:noFill/>
+          <a:ln/>
+        </p:spPr>
+        <p:txBody>
+          <a:bodyPr wrap="square" lIns="0" tIns="0" rIns="0" bIns="0" rtlCol="0" anchor="ctr"/>
+          <a:lstStyle/>
+          <a:p>
+            <a:pPr algn="ctr" indent="0" marL="0">
+              <a:buNone/>
+            </a:pPr>
+            <a:r>
+              <a:rPr lang="en-US" sz="900" dirty="0">
+                <a:solidFill>
+                  <a:srgbClr val="13283A"/>
                 </a:solidFill>
                 <a:latin typeface="Consolas" pitchFamily="34" charset="0"/>
                 <a:ea typeface="Consolas" pitchFamily="34" charset="-122"/>
                 <a:cs typeface="Consolas" pitchFamily="34" charset="-120"/>
               </a:rPr>
-              <a:t>```mermaid</a:t>
-            </a:r>
-            <a:endParaRPr lang="en-US" sz="1050" dirty="0"/>
-          </a:p>
-          <a:p>
-            <a:pPr indent="0" marL="0">
-              <a:lnSpc>
-                <a:spcPts val="1600"/>
-              </a:lnSpc>
-              <a:buNone/>
-            </a:pPr>
-            <a:r>
-              <a:rPr lang="en-US" sz="1050" dirty="0">
-                <a:solidFill>
-                  <a:srgbClr val="CADCFC"/>
-                </a:solidFill>
-                <a:latin typeface="Consolas" pitchFamily="34" charset="0"/>
-                <a:ea typeface="Consolas" pitchFamily="34" charset="-122"/>
-                <a:cs typeface="Consolas" pitchFamily="34" charset="-120"/>
-              </a:rPr>
-              <a:t>flowchart TD</a:t>
-            </a:r>
-            <a:endParaRPr lang="en-US" sz="1050" dirty="0"/>
-          </a:p>
-          <a:p>
-            <a:pPr indent="0" marL="0">
-              <a:lnSpc>
-                <a:spcPts val="1600"/>
-              </a:lnSpc>
-              <a:buNone/>
-            </a:pPr>
-            <a:r>
-              <a:rPr lang="en-US" sz="1050" dirty="0">
-                <a:solidFill>
-                  <a:srgbClr val="CADCFC"/>
-                </a:solidFill>
-                <a:latin typeface="Consolas" pitchFamily="34" charset="0"/>
-                <a:ea typeface="Consolas" pitchFamily="34" charset="-122"/>
-                <a:cs typeface="Consolas" pitchFamily="34" charset="-120"/>
-              </a:rPr>
-              <a:t>  API --&gt; Charge</a:t>
-            </a:r>
-            <a:endParaRPr lang="en-US" sz="1050" dirty="0"/>
-          </a:p>
-          <a:p>
-            <a:pPr indent="0" marL="0">
-              <a:lnSpc>
-                <a:spcPts val="1600"/>
-              </a:lnSpc>
-              <a:buNone/>
-            </a:pPr>
-            <a:r>
-              <a:rPr lang="en-US" sz="1050" dirty="0">
-                <a:solidFill>
-                  <a:srgbClr val="CADCFC"/>
-                </a:solidFill>
-                <a:latin typeface="Consolas" pitchFamily="34" charset="0"/>
-                <a:ea typeface="Consolas" pitchFamily="34" charset="-122"/>
-                <a:cs typeface="Consolas" pitchFamily="34" charset="-120"/>
-              </a:rPr>
-              <a:t>  API --&gt; Refund</a:t>
-            </a:r>
-            <a:endParaRPr lang="en-US" sz="1050" dirty="0"/>
-          </a:p>
-          <a:p>
-            <a:pPr indent="0" marL="0">
-              <a:lnSpc>
-                <a:spcPts val="1600"/>
-              </a:lnSpc>
-              <a:buNone/>
-            </a:pPr>
-            <a:r>
-              <a:rPr lang="en-US" sz="1050" dirty="0">
-                <a:solidFill>
-                  <a:srgbClr val="CADCFC"/>
-                </a:solidFill>
-                <a:latin typeface="Consolas" pitchFamily="34" charset="0"/>
-                <a:ea typeface="Consolas" pitchFamily="34" charset="-122"/>
-                <a:cs typeface="Consolas" pitchFamily="34" charset="-120"/>
-              </a:rPr>
-              <a:t>  Charge --&gt; DB[(Billing DB)]</a:t>
-            </a:r>
-            <a:endParaRPr lang="en-US" sz="1050" dirty="0"/>
-          </a:p>
-          <a:p>
-            <a:pPr indent="0" marL="0">
-              <a:lnSpc>
-                <a:spcPts val="1600"/>
-              </a:lnSpc>
-              <a:buNone/>
-            </a:pPr>
-            <a:endParaRPr lang="en-US" sz="1050" dirty="0"/>
-          </a:p>
-          <a:p>
-            <a:pPr indent="0" marL="0">
-              <a:lnSpc>
-                <a:spcPts val="1600"/>
-              </a:lnSpc>
-              <a:buNone/>
-            </a:pPr>
-            <a:r>
-              <a:rPr lang="en-US" sz="1050" dirty="0">
-                <a:solidFill>
-                  <a:srgbClr val="02C39A"/>
-                </a:solidFill>
-                <a:latin typeface="Consolas" pitchFamily="34" charset="0"/>
-                <a:ea typeface="Consolas" pitchFamily="34" charset="-122"/>
-                <a:cs typeface="Consolas" pitchFamily="34" charset="-120"/>
-              </a:rPr>
-              <a:t>  click Charge call</a:t>
-            </a:r>
-            <a:endParaRPr lang="en-US" sz="1050" dirty="0"/>
-          </a:p>
-          <a:p>
-            <a:pPr indent="0" marL="0">
-              <a:lnSpc>
-                <a:spcPts val="1600"/>
-              </a:lnSpc>
-              <a:buNone/>
-            </a:pPr>
-            <a:r>
-              <a:rPr lang="en-US" sz="1050" dirty="0">
-                <a:solidFill>
-                  <a:srgbClr val="02C39A"/>
-                </a:solidFill>
-                <a:latin typeface="Consolas" pitchFamily="34" charset="0"/>
-                <a:ea typeface="Consolas" pitchFamily="34" charset="-122"/>
-                <a:cs typeface="Consolas" pitchFamily="34" charset="-120"/>
-              </a:rPr>
-              <a:t>    navigate("./charge-flow.md")</a:t>
-            </a:r>
-            <a:endParaRPr lang="en-US" sz="1050" dirty="0"/>
-          </a:p>
-          <a:p>
-            <a:pPr indent="0" marL="0">
-              <a:lnSpc>
-                <a:spcPts val="1600"/>
-              </a:lnSpc>
-              <a:buNone/>
-            </a:pPr>
-            <a:r>
-              <a:rPr lang="en-US" sz="1050" dirty="0">
-                <a:solidFill>
-                  <a:srgbClr val="02C39A"/>
-                </a:solidFill>
-                <a:latin typeface="Consolas" pitchFamily="34" charset="0"/>
-                <a:ea typeface="Consolas" pitchFamily="34" charset="-122"/>
-                <a:cs typeface="Consolas" pitchFamily="34" charset="-120"/>
-              </a:rPr>
-              <a:t>  click DB call</a:t>
-            </a:r>
-            <a:endParaRPr lang="en-US" sz="1050" dirty="0"/>
-          </a:p>
-          <a:p>
-            <a:pPr indent="0" marL="0">
-              <a:lnSpc>
-                <a:spcPts val="1600"/>
-              </a:lnSpc>
-              <a:buNone/>
-            </a:pPr>
-            <a:r>
-              <a:rPr lang="en-US" sz="1050" dirty="0">
-                <a:solidFill>
-                  <a:srgbClr val="02C39A"/>
-                </a:solidFill>
-                <a:latin typeface="Consolas" pitchFamily="34" charset="0"/>
-                <a:ea typeface="Consolas" pitchFamily="34" charset="-122"/>
-                <a:cs typeface="Consolas" pitchFamily="34" charset="-120"/>
-              </a:rPr>
-              <a:t>    navigate("./src/db.ts#L25-L40")</a:t>
-            </a:r>
-            <a:endParaRPr lang="en-US" sz="1050" dirty="0"/>
-          </a:p>
-        </p:txBody>
-      </p:sp>
-      <p:sp>
-        <p:nvSpPr>
-          <p:cNvPr id="5" name="Shape 3"/>
-          <p:cNvSpPr/>
-          <p:nvPr/>
-        </p:nvSpPr>
-        <p:spPr>
-          <a:xfrm>
-            <a:off x="4983480" y="1234440"/>
-            <a:ext cx="502920" cy="502920"/>
-          </a:xfrm>
-          <a:prstGeom prst="ellipse">
-            <a:avLst/>
-          </a:prstGeom>
-          <a:solidFill>
-            <a:srgbClr val="065A82"/>
-          </a:solidFill>
-          <a:ln/>
-        </p:spPr>
-      </p:sp>
-      <p:pic>
-        <p:nvPicPr>
-          <p:cNvPr id="6" name="Image 0" descr="preencoded.png">    </p:cNvPr>
-          <p:cNvPicPr>
-            <a:picLocks noChangeAspect="1"/>
-          </p:cNvPicPr>
-          <p:nvPr/>
-        </p:nvPicPr>
-        <p:blipFill>
-          <a:blip r:embed="rId1"/>
-          <a:stretch>
-            <a:fillRect/>
-          </a:stretch>
-        </p:blipFill>
-        <p:spPr>
-          <a:xfrm>
-            <a:off x="5119268" y="1370228"/>
-            <a:ext cx="231343" cy="231343"/>
-          </a:xfrm>
-          <a:prstGeom prst="rect">
-            <a:avLst/>
-          </a:prstGeom>
-        </p:spPr>
-      </p:pic>
-      <p:sp>
-        <p:nvSpPr>
-          <p:cNvPr id="7" name="Text 4"/>
-          <p:cNvSpPr/>
-          <p:nvPr/>
-        </p:nvSpPr>
-        <p:spPr>
-          <a:xfrm>
-            <a:off x="5669280" y="1197864"/>
-            <a:ext cx="3017520" cy="292608"/>
+              <a:t>Billing DB</a:t>
+            </a:r>
+            <a:endParaRPr lang="en-US" sz="900" dirty="0"/>
+          </a:p>
+        </p:txBody>
+      </p:sp>
+      <p:sp>
+        <p:nvSpPr>
+          <p:cNvPr id="36" name="Shape 29"/>
+          <p:cNvSpPr/>
+          <p:nvPr/>
+        </p:nvSpPr>
+        <p:spPr>
+          <a:xfrm>
+            <a:off x="6355080" y="3081528"/>
+            <a:ext cx="548640" cy="502920"/>
+          </a:xfrm>
+          <a:prstGeom prst="line">
+            <a:avLst/>
+          </a:prstGeom>
+          <a:noFill/>
+          <a:ln w="15875">
+            <a:solidFill>
+              <a:srgbClr val="1C7293"/>
+            </a:solidFill>
+            <a:prstDash val="solid"/>
+          </a:ln>
+        </p:spPr>
+      </p:sp>
+      <p:sp>
+        <p:nvSpPr>
+          <p:cNvPr id="37" name="Shape 30"/>
+          <p:cNvSpPr/>
+          <p:nvPr/>
+        </p:nvSpPr>
+        <p:spPr>
+          <a:xfrm flipH="1">
+            <a:off x="7269480" y="3081528"/>
+            <a:ext cx="548640" cy="502920"/>
+          </a:xfrm>
+          <a:prstGeom prst="line">
+            <a:avLst/>
+          </a:prstGeom>
+          <a:noFill/>
+          <a:ln w="15875">
+            <a:solidFill>
+              <a:srgbClr val="1C7293"/>
+            </a:solidFill>
+            <a:prstDash val="solid"/>
+          </a:ln>
+        </p:spPr>
+      </p:sp>
+      <p:sp>
+        <p:nvSpPr>
+          <p:cNvPr id="38" name="Text 31"/>
+          <p:cNvSpPr/>
+          <p:nvPr/>
+        </p:nvSpPr>
+        <p:spPr>
+          <a:xfrm>
+            <a:off x="5394960" y="4553712"/>
+            <a:ext cx="3383280" cy="320040"/>
           </a:xfrm>
           <a:prstGeom prst="rect">
             <a:avLst/>
@@ -5274,304 +6352,21 @@
           <a:bodyPr wrap="square" lIns="0" tIns="0" rIns="0" bIns="0" rtlCol="0" anchor="ctr"/>
           <a:lstStyle/>
           <a:p>
-            <a:pPr indent="0" marL="0">
-              <a:buNone/>
-            </a:pPr>
-            <a:r>
-              <a:rPr lang="en-US" sz="1450" b="1" dirty="0">
-                <a:solidFill>
-                  <a:srgbClr val="13283A"/>
+            <a:pPr algn="ctr" indent="0" marL="0">
+              <a:buNone/>
+            </a:pPr>
+            <a:r>
+              <a:rPr lang="en-US" sz="1000" i="1" dirty="0">
+                <a:solidFill>
+                  <a:srgbClr val="5B7083"/>
                 </a:solidFill>
                 <a:latin typeface="Calibri" pitchFamily="34" charset="0"/>
                 <a:ea typeface="Calibri" pitchFamily="34" charset="-122"/>
                 <a:cs typeface="Calibri" pitchFamily="34" charset="-120"/>
               </a:rPr>
-              <a:t>No proprietary format</a:t>
-            </a:r>
-            <a:endParaRPr lang="en-US" sz="1450" dirty="0"/>
-          </a:p>
-        </p:txBody>
-      </p:sp>
-      <p:sp>
-        <p:nvSpPr>
-          <p:cNvPr id="8" name="Text 5"/>
-          <p:cNvSpPr/>
-          <p:nvPr/>
-        </p:nvSpPr>
-        <p:spPr>
-          <a:xfrm>
-            <a:off x="5669280" y="1490472"/>
-            <a:ext cx="3017520" cy="822960"/>
-          </a:xfrm>
-          <a:prstGeom prst="rect">
-            <a:avLst/>
-          </a:prstGeom>
-          <a:noFill/>
-          <a:ln/>
-        </p:spPr>
-        <p:txBody>
-          <a:bodyPr wrap="square" lIns="0" tIns="0" rIns="0" bIns="0" rtlCol="0" anchor="t"/>
-          <a:lstStyle/>
-          <a:p>
-            <a:pPr indent="0" marL="0">
-              <a:buNone/>
-            </a:pPr>
-            <a:r>
-              <a:rPr lang="en-US" sz="1150" dirty="0">
-                <a:solidFill>
-                  <a:srgbClr val="5B7083"/>
-                </a:solidFill>
-                <a:latin typeface="Calibri" pitchFamily="34" charset="0"/>
-                <a:ea typeface="Calibri" pitchFamily="34" charset="-122"/>
-                <a:cs typeface="Calibri" pitchFamily="34" charset="-120"/>
-              </a:rPr>
-              <a:t>Frontmatter + one mermaid block per file. Renders on GitHub, reviews in PRs, versions with the code it describes.</a:t>
-            </a:r>
-            <a:endParaRPr lang="en-US" sz="1150" dirty="0"/>
-          </a:p>
-        </p:txBody>
-      </p:sp>
-      <p:sp>
-        <p:nvSpPr>
-          <p:cNvPr id="9" name="Shape 6"/>
-          <p:cNvSpPr/>
-          <p:nvPr/>
-        </p:nvSpPr>
-        <p:spPr>
-          <a:xfrm>
-            <a:off x="4983480" y="2423160"/>
-            <a:ext cx="502920" cy="502920"/>
-          </a:xfrm>
-          <a:prstGeom prst="ellipse">
-            <a:avLst/>
-          </a:prstGeom>
-          <a:solidFill>
-            <a:srgbClr val="1C7293"/>
-          </a:solidFill>
-          <a:ln/>
-        </p:spPr>
-      </p:sp>
-      <p:pic>
-        <p:nvPicPr>
-          <p:cNvPr id="10" name="Image 1" descr="preencoded.png">    </p:cNvPr>
-          <p:cNvPicPr>
-            <a:picLocks noChangeAspect="1"/>
-          </p:cNvPicPr>
-          <p:nvPr/>
-        </p:nvPicPr>
-        <p:blipFill>
-          <a:blip r:embed="rId2"/>
-          <a:stretch>
-            <a:fillRect/>
-          </a:stretch>
-        </p:blipFill>
-        <p:spPr>
-          <a:xfrm>
-            <a:off x="5119268" y="2558948"/>
-            <a:ext cx="231343" cy="231343"/>
-          </a:xfrm>
-          <a:prstGeom prst="rect">
-            <a:avLst/>
-          </a:prstGeom>
-        </p:spPr>
-      </p:pic>
-      <p:sp>
-        <p:nvSpPr>
-          <p:cNvPr id="11" name="Text 7"/>
-          <p:cNvSpPr/>
-          <p:nvPr/>
-        </p:nvSpPr>
-        <p:spPr>
-          <a:xfrm>
-            <a:off x="5669280" y="2386584"/>
-            <a:ext cx="3017520" cy="292608"/>
-          </a:xfrm>
-          <a:prstGeom prst="rect">
-            <a:avLst/>
-          </a:prstGeom>
-          <a:noFill/>
-          <a:ln/>
-        </p:spPr>
-        <p:txBody>
-          <a:bodyPr wrap="square" lIns="0" tIns="0" rIns="0" bIns="0" rtlCol="0" anchor="ctr"/>
-          <a:lstStyle/>
-          <a:p>
-            <a:pPr indent="0" marL="0">
-              <a:buNone/>
-            </a:pPr>
-            <a:r>
-              <a:rPr lang="en-US" sz="1450" b="1" dirty="0">
-                <a:solidFill>
-                  <a:srgbClr val="13283A"/>
-                </a:solidFill>
-                <a:latin typeface="Calibri" pitchFamily="34" charset="0"/>
-                <a:ea typeface="Calibri" pitchFamily="34" charset="-122"/>
-                <a:cs typeface="Calibri" pitchFamily="34" charset="-120"/>
-              </a:rPr>
-              <a:t>Portable by construction</a:t>
-            </a:r>
-            <a:endParaRPr lang="en-US" sz="1450" dirty="0"/>
-          </a:p>
-        </p:txBody>
-      </p:sp>
-      <p:sp>
-        <p:nvSpPr>
-          <p:cNvPr id="12" name="Text 8"/>
-          <p:cNvSpPr/>
-          <p:nvPr/>
-        </p:nvSpPr>
-        <p:spPr>
-          <a:xfrm>
-            <a:off x="5669280" y="2679192"/>
-            <a:ext cx="3017520" cy="822960"/>
-          </a:xfrm>
-          <a:prstGeom prst="rect">
-            <a:avLst/>
-          </a:prstGeom>
-          <a:noFill/>
-          <a:ln/>
-        </p:spPr>
-        <p:txBody>
-          <a:bodyPr wrap="square" lIns="0" tIns="0" rIns="0" bIns="0" rtlCol="0" anchor="t"/>
-          <a:lstStyle/>
-          <a:p>
-            <a:pPr indent="0" marL="0">
-              <a:buNone/>
-            </a:pPr>
-            <a:r>
-              <a:rPr lang="en-US" sz="1150" dirty="0">
-                <a:solidFill>
-                  <a:srgbClr val="5B7083"/>
-                </a:solidFill>
-                <a:latin typeface="Calibri" pitchFamily="34" charset="0"/>
-                <a:ea typeface="Calibri" pitchFamily="34" charset="-122"/>
-                <a:cs typeface="Calibri" pitchFamily="34" charset="-120"/>
-              </a:rPr>
-              <a:t>Every link is a relative path. The same architecture folder works on any machine, in any tool — no lock-in.</a:t>
-            </a:r>
-            <a:endParaRPr lang="en-US" sz="1150" dirty="0"/>
-          </a:p>
-        </p:txBody>
-      </p:sp>
-      <p:sp>
-        <p:nvSpPr>
-          <p:cNvPr id="13" name="Shape 9"/>
-          <p:cNvSpPr/>
-          <p:nvPr/>
-        </p:nvSpPr>
-        <p:spPr>
-          <a:xfrm>
-            <a:off x="4983480" y="3611880"/>
-            <a:ext cx="502920" cy="502920"/>
-          </a:xfrm>
-          <a:prstGeom prst="ellipse">
-            <a:avLst/>
-          </a:prstGeom>
-          <a:solidFill>
-            <a:srgbClr val="21295C"/>
-          </a:solidFill>
-          <a:ln/>
-        </p:spPr>
-      </p:sp>
-      <p:pic>
-        <p:nvPicPr>
-          <p:cNvPr id="14" name="Image 2" descr="preencoded.png">    </p:cNvPr>
-          <p:cNvPicPr>
-            <a:picLocks noChangeAspect="1"/>
-          </p:cNvPicPr>
-          <p:nvPr/>
-        </p:nvPicPr>
-        <p:blipFill>
-          <a:blip r:embed="rId3"/>
-          <a:stretch>
-            <a:fillRect/>
-          </a:stretch>
-        </p:blipFill>
-        <p:spPr>
-          <a:xfrm>
-            <a:off x="5119268" y="3747668"/>
-            <a:ext cx="231343" cy="231343"/>
-          </a:xfrm>
-          <a:prstGeom prst="rect">
-            <a:avLst/>
-          </a:prstGeom>
-        </p:spPr>
-      </p:pic>
-      <p:sp>
-        <p:nvSpPr>
-          <p:cNvPr id="15" name="Text 10"/>
-          <p:cNvSpPr/>
-          <p:nvPr/>
-        </p:nvSpPr>
-        <p:spPr>
-          <a:xfrm>
-            <a:off x="5669280" y="3575304"/>
-            <a:ext cx="3017520" cy="292608"/>
-          </a:xfrm>
-          <a:prstGeom prst="rect">
-            <a:avLst/>
-          </a:prstGeom>
-          <a:noFill/>
-          <a:ln/>
-        </p:spPr>
-        <p:txBody>
-          <a:bodyPr wrap="square" lIns="0" tIns="0" rIns="0" bIns="0" rtlCol="0" anchor="ctr"/>
-          <a:lstStyle/>
-          <a:p>
-            <a:pPr indent="0" marL="0">
-              <a:buNone/>
-            </a:pPr>
-            <a:r>
-              <a:rPr lang="en-US" sz="1450" b="1" dirty="0">
-                <a:solidFill>
-                  <a:srgbClr val="13283A"/>
-                </a:solidFill>
-                <a:latin typeface="Calibri" pitchFamily="34" charset="0"/>
-                <a:ea typeface="Calibri" pitchFamily="34" charset="-122"/>
-                <a:cs typeface="Calibri" pitchFamily="34" charset="-120"/>
-              </a:rPr>
-              <a:t>One click to ground truth</a:t>
-            </a:r>
-            <a:endParaRPr lang="en-US" sz="1450" dirty="0"/>
-          </a:p>
-        </p:txBody>
-      </p:sp>
-      <p:sp>
-        <p:nvSpPr>
-          <p:cNvPr id="16" name="Text 11"/>
-          <p:cNvSpPr/>
-          <p:nvPr/>
-        </p:nvSpPr>
-        <p:spPr>
-          <a:xfrm>
-            <a:off x="5669280" y="3867912"/>
-            <a:ext cx="3017520" cy="822960"/>
-          </a:xfrm>
-          <a:prstGeom prst="rect">
-            <a:avLst/>
-          </a:prstGeom>
-          <a:noFill/>
-          <a:ln/>
-        </p:spPr>
-        <p:txBody>
-          <a:bodyPr wrap="square" lIns="0" tIns="0" rIns="0" bIns="0" rtlCol="0" anchor="t"/>
-          <a:lstStyle/>
-          <a:p>
-            <a:pPr indent="0" marL="0">
-              <a:buNone/>
-            </a:pPr>
-            <a:r>
-              <a:rPr lang="en-US" sz="1150" dirty="0">
-                <a:solidFill>
-                  <a:srgbClr val="5B7083"/>
-                </a:solidFill>
-                <a:latin typeface="Calibri" pitchFamily="34" charset="0"/>
-                <a:ea typeface="Calibri" pitchFamily="34" charset="-122"/>
-                <a:cs typeface="Calibri" pitchFamily="34" charset="-120"/>
-              </a:rPr>
-              <a:t>Targets ending in .md open a child diagram; anything else opens the code pane, jumping straight to the cited lines.</a:t>
-            </a:r>
-            <a:endParaRPr lang="en-US" sz="1150" dirty="0"/>
+              <a:t>every node is a click — to a child diagram or the source itself</a:t>
+            </a:r>
+            <a:endParaRPr lang="en-US" sz="1000" dirty="0"/>
           </a:p>
         </p:txBody>
       </p:sp>
@@ -5640,7 +6435,7 @@
                 <a:ea typeface="Consolas" pitchFamily="34" charset="-122"/>
                 <a:cs typeface="Consolas" pitchFamily="34" charset="-120"/>
               </a:rPr>
-              <a:t>Why now</a:t>
+              <a:t>Plain markdown, versioned with the code</a:t>
             </a:r>
             <a:endParaRPr lang="en-US" sz="2500" dirty="0"/>
           </a:p>
@@ -5654,8 +6449,337 @@
         </p:nvSpPr>
         <p:spPr>
           <a:xfrm>
-            <a:off x="1466088" y="1371600"/>
-            <a:ext cx="603504" cy="603504"/>
+            <a:off x="457200" y="1143000"/>
+            <a:ext cx="4160520" cy="3611880"/>
+          </a:xfrm>
+          <a:prstGeom prst="roundRect">
+            <a:avLst>
+              <a:gd name="adj" fmla="val 2025"/>
+            </a:avLst>
+          </a:prstGeom>
+          <a:solidFill>
+            <a:srgbClr val="0E2433"/>
+          </a:solidFill>
+          <a:ln/>
+          <a:effectLst>
+            <a:outerShdw sx="100000" sy="100000" kx="0" ky="0" algn="bl" rotWithShape="0" blurRad="88900" dist="25400" dir="8100000">
+              <a:srgbClr val="1A2A3A">
+                <a:alpha val="18000"/>
+              </a:srgbClr>
+            </a:outerShdw>
+          </a:effectLst>
+        </p:spPr>
+      </p:sp>
+      <p:sp>
+        <p:nvSpPr>
+          <p:cNvPr id="4" name="Text 2"/>
+          <p:cNvSpPr/>
+          <p:nvPr/>
+        </p:nvSpPr>
+        <p:spPr>
+          <a:xfrm>
+            <a:off x="749808" y="1371600"/>
+            <a:ext cx="3611880" cy="3200400"/>
+          </a:xfrm>
+          <a:prstGeom prst="rect">
+            <a:avLst/>
+          </a:prstGeom>
+          <a:noFill/>
+          <a:ln/>
+        </p:spPr>
+        <p:txBody>
+          <a:bodyPr wrap="square" lIns="0" tIns="0" rIns="0" bIns="0" rtlCol="0" anchor="t"/>
+          <a:lstStyle/>
+          <a:p>
+            <a:pPr indent="0" marL="0">
+              <a:lnSpc>
+                <a:spcPts val="1600"/>
+              </a:lnSpc>
+              <a:buNone/>
+            </a:pPr>
+            <a:r>
+              <a:rPr lang="en-US" sz="1050" dirty="0">
+                <a:solidFill>
+                  <a:srgbClr val="5B8AA6"/>
+                </a:solidFill>
+                <a:latin typeface="Consolas" pitchFamily="34" charset="0"/>
+                <a:ea typeface="Consolas" pitchFamily="34" charset="-122"/>
+                <a:cs typeface="Consolas" pitchFamily="34" charset="-120"/>
+              </a:rPr>
+              <a:t>---</a:t>
+            </a:r>
+            <a:endParaRPr lang="en-US" sz="1050" dirty="0"/>
+          </a:p>
+          <a:p>
+            <a:pPr indent="0" marL="0">
+              <a:lnSpc>
+                <a:spcPts val="1600"/>
+              </a:lnSpc>
+              <a:buNone/>
+            </a:pPr>
+            <a:r>
+              <a:rPr lang="en-US" sz="1050" dirty="0">
+                <a:solidFill>
+                  <a:srgbClr val="7FB3D5"/>
+                </a:solidFill>
+                <a:latin typeface="Consolas" pitchFamily="34" charset="0"/>
+                <a:ea typeface="Consolas" pitchFamily="34" charset="-122"/>
+                <a:cs typeface="Consolas" pitchFamily="34" charset="-120"/>
+              </a:rPr>
+              <a:t>name: billing</a:t>
+            </a:r>
+            <a:endParaRPr lang="en-US" sz="1050" dirty="0"/>
+          </a:p>
+          <a:p>
+            <a:pPr indent="0" marL="0">
+              <a:lnSpc>
+                <a:spcPts val="1600"/>
+              </a:lnSpc>
+              <a:buNone/>
+            </a:pPr>
+            <a:r>
+              <a:rPr lang="en-US" sz="1050" dirty="0">
+                <a:solidFill>
+                  <a:srgbClr val="7FB3D5"/>
+                </a:solidFill>
+                <a:latin typeface="Consolas" pitchFamily="34" charset="0"/>
+                <a:ea typeface="Consolas" pitchFamily="34" charset="-122"/>
+                <a:cs typeface="Consolas" pitchFamily="34" charset="-120"/>
+              </a:rPr>
+              <a:t>description: charges &amp; refunds</a:t>
+            </a:r>
+            <a:endParaRPr lang="en-US" sz="1050" dirty="0"/>
+          </a:p>
+          <a:p>
+            <a:pPr indent="0" marL="0">
+              <a:lnSpc>
+                <a:spcPts val="1600"/>
+              </a:lnSpc>
+              <a:buNone/>
+            </a:pPr>
+            <a:r>
+              <a:rPr lang="en-US" sz="1050" dirty="0">
+                <a:solidFill>
+                  <a:srgbClr val="5B8AA6"/>
+                </a:solidFill>
+                <a:latin typeface="Consolas" pitchFamily="34" charset="0"/>
+                <a:ea typeface="Consolas" pitchFamily="34" charset="-122"/>
+                <a:cs typeface="Consolas" pitchFamily="34" charset="-120"/>
+              </a:rPr>
+              <a:t>---</a:t>
+            </a:r>
+            <a:endParaRPr lang="en-US" sz="1050" dirty="0"/>
+          </a:p>
+          <a:p>
+            <a:pPr indent="0" marL="0">
+              <a:lnSpc>
+                <a:spcPts val="1600"/>
+              </a:lnSpc>
+              <a:buNone/>
+            </a:pPr>
+            <a:endParaRPr lang="en-US" sz="1050" dirty="0"/>
+          </a:p>
+          <a:p>
+            <a:pPr indent="0" marL="0">
+              <a:lnSpc>
+                <a:spcPts val="1600"/>
+              </a:lnSpc>
+              <a:buNone/>
+            </a:pPr>
+            <a:r>
+              <a:rPr lang="en-US" sz="1050" dirty="0">
+                <a:solidFill>
+                  <a:srgbClr val="5B8AA6"/>
+                </a:solidFill>
+                <a:latin typeface="Consolas" pitchFamily="34" charset="0"/>
+                <a:ea typeface="Consolas" pitchFamily="34" charset="-122"/>
+                <a:cs typeface="Consolas" pitchFamily="34" charset="-120"/>
+              </a:rPr>
+              <a:t>```mermaid</a:t>
+            </a:r>
+            <a:endParaRPr lang="en-US" sz="1050" dirty="0"/>
+          </a:p>
+          <a:p>
+            <a:pPr indent="0" marL="0">
+              <a:lnSpc>
+                <a:spcPts val="1600"/>
+              </a:lnSpc>
+              <a:buNone/>
+            </a:pPr>
+            <a:r>
+              <a:rPr lang="en-US" sz="1050" dirty="0">
+                <a:solidFill>
+                  <a:srgbClr val="CADCFC"/>
+                </a:solidFill>
+                <a:latin typeface="Consolas" pitchFamily="34" charset="0"/>
+                <a:ea typeface="Consolas" pitchFamily="34" charset="-122"/>
+                <a:cs typeface="Consolas" pitchFamily="34" charset="-120"/>
+              </a:rPr>
+              <a:t>flowchart TD</a:t>
+            </a:r>
+            <a:endParaRPr lang="en-US" sz="1050" dirty="0"/>
+          </a:p>
+          <a:p>
+            <a:pPr indent="0" marL="0">
+              <a:lnSpc>
+                <a:spcPts val="1600"/>
+              </a:lnSpc>
+              <a:buNone/>
+            </a:pPr>
+            <a:r>
+              <a:rPr lang="en-US" sz="1050" dirty="0">
+                <a:solidFill>
+                  <a:srgbClr val="CADCFC"/>
+                </a:solidFill>
+                <a:latin typeface="Consolas" pitchFamily="34" charset="0"/>
+                <a:ea typeface="Consolas" pitchFamily="34" charset="-122"/>
+                <a:cs typeface="Consolas" pitchFamily="34" charset="-120"/>
+              </a:rPr>
+              <a:t>  API --&gt; Charge</a:t>
+            </a:r>
+            <a:endParaRPr lang="en-US" sz="1050" dirty="0"/>
+          </a:p>
+          <a:p>
+            <a:pPr indent="0" marL="0">
+              <a:lnSpc>
+                <a:spcPts val="1600"/>
+              </a:lnSpc>
+              <a:buNone/>
+            </a:pPr>
+            <a:r>
+              <a:rPr lang="en-US" sz="1050" dirty="0">
+                <a:solidFill>
+                  <a:srgbClr val="CADCFC"/>
+                </a:solidFill>
+                <a:latin typeface="Consolas" pitchFamily="34" charset="0"/>
+                <a:ea typeface="Consolas" pitchFamily="34" charset="-122"/>
+                <a:cs typeface="Consolas" pitchFamily="34" charset="-120"/>
+              </a:rPr>
+              <a:t>  API --&gt; Refund</a:t>
+            </a:r>
+            <a:endParaRPr lang="en-US" sz="1050" dirty="0"/>
+          </a:p>
+          <a:p>
+            <a:pPr indent="0" marL="0">
+              <a:lnSpc>
+                <a:spcPts val="1600"/>
+              </a:lnSpc>
+              <a:buNone/>
+            </a:pPr>
+            <a:r>
+              <a:rPr lang="en-US" sz="1050" dirty="0">
+                <a:solidFill>
+                  <a:srgbClr val="CADCFC"/>
+                </a:solidFill>
+                <a:latin typeface="Consolas" pitchFamily="34" charset="0"/>
+                <a:ea typeface="Consolas" pitchFamily="34" charset="-122"/>
+                <a:cs typeface="Consolas" pitchFamily="34" charset="-120"/>
+              </a:rPr>
+              <a:t>  Charge --&gt; DB[(Billing DB)]</a:t>
+            </a:r>
+            <a:endParaRPr lang="en-US" sz="1050" dirty="0"/>
+          </a:p>
+          <a:p>
+            <a:pPr indent="0" marL="0">
+              <a:lnSpc>
+                <a:spcPts val="1600"/>
+              </a:lnSpc>
+              <a:buNone/>
+            </a:pPr>
+            <a:endParaRPr lang="en-US" sz="1050" dirty="0"/>
+          </a:p>
+          <a:p>
+            <a:pPr indent="0" marL="0">
+              <a:lnSpc>
+                <a:spcPts val="1600"/>
+              </a:lnSpc>
+              <a:buNone/>
+            </a:pPr>
+            <a:r>
+              <a:rPr lang="en-US" sz="1050" dirty="0">
+                <a:solidFill>
+                  <a:srgbClr val="02C39A"/>
+                </a:solidFill>
+                <a:latin typeface="Consolas" pitchFamily="34" charset="0"/>
+                <a:ea typeface="Consolas" pitchFamily="34" charset="-122"/>
+                <a:cs typeface="Consolas" pitchFamily="34" charset="-120"/>
+              </a:rPr>
+              <a:t>  click Charge call</a:t>
+            </a:r>
+            <a:endParaRPr lang="en-US" sz="1050" dirty="0"/>
+          </a:p>
+          <a:p>
+            <a:pPr indent="0" marL="0">
+              <a:lnSpc>
+                <a:spcPts val="1600"/>
+              </a:lnSpc>
+              <a:buNone/>
+            </a:pPr>
+            <a:r>
+              <a:rPr lang="en-US" sz="1050" dirty="0">
+                <a:solidFill>
+                  <a:srgbClr val="02C39A"/>
+                </a:solidFill>
+                <a:latin typeface="Consolas" pitchFamily="34" charset="0"/>
+                <a:ea typeface="Consolas" pitchFamily="34" charset="-122"/>
+                <a:cs typeface="Consolas" pitchFamily="34" charset="-120"/>
+              </a:rPr>
+              <a:t>    navigate("./charge-flow.md")</a:t>
+            </a:r>
+            <a:endParaRPr lang="en-US" sz="1050" dirty="0"/>
+          </a:p>
+          <a:p>
+            <a:pPr indent="0" marL="0">
+              <a:lnSpc>
+                <a:spcPts val="1600"/>
+              </a:lnSpc>
+              <a:buNone/>
+            </a:pPr>
+            <a:r>
+              <a:rPr lang="en-US" sz="1050" dirty="0">
+                <a:solidFill>
+                  <a:srgbClr val="02C39A"/>
+                </a:solidFill>
+                <a:latin typeface="Consolas" pitchFamily="34" charset="0"/>
+                <a:ea typeface="Consolas" pitchFamily="34" charset="-122"/>
+                <a:cs typeface="Consolas" pitchFamily="34" charset="-120"/>
+              </a:rPr>
+              <a:t>  click DB call</a:t>
+            </a:r>
+            <a:endParaRPr lang="en-US" sz="1050" dirty="0"/>
+          </a:p>
+          <a:p>
+            <a:pPr indent="0" marL="0">
+              <a:lnSpc>
+                <a:spcPts val="1600"/>
+              </a:lnSpc>
+              <a:buNone/>
+            </a:pPr>
+            <a:r>
+              <a:rPr lang="en-US" sz="1050" dirty="0">
+                <a:solidFill>
+                  <a:srgbClr val="02C39A"/>
+                </a:solidFill>
+                <a:latin typeface="Consolas" pitchFamily="34" charset="0"/>
+                <a:ea typeface="Consolas" pitchFamily="34" charset="-122"/>
+                <a:cs typeface="Consolas" pitchFamily="34" charset="-120"/>
+              </a:rPr>
+              <a:t>    navigate("./src/db.ts#L25-L40")</a:t>
+            </a:r>
+            <a:endParaRPr lang="en-US" sz="1050" dirty="0"/>
+          </a:p>
+        </p:txBody>
+      </p:sp>
+      <p:sp>
+        <p:nvSpPr>
+          <p:cNvPr id="5" name="Shape 3"/>
+          <p:cNvSpPr/>
+          <p:nvPr/>
+        </p:nvSpPr>
+        <p:spPr>
+          <a:xfrm>
+            <a:off x="4983480" y="1234440"/>
+            <a:ext cx="502920" cy="502920"/>
           </a:xfrm>
           <a:prstGeom prst="ellipse">
             <a:avLst/>
@@ -5668,7 +6792,7 @@
       </p:sp>
       <p:pic>
         <p:nvPicPr>
-          <p:cNvPr id="4" name="Image 0" descr="preencoded.png">    </p:cNvPr>
+          <p:cNvPr id="6" name="Image 0" descr="preencoded.png">    </p:cNvPr>
           <p:cNvPicPr>
             <a:picLocks noChangeAspect="1"/>
           </p:cNvPicPr>
@@ -5682,8 +6806,8 @@
         </p:blipFill>
         <p:spPr>
           <a:xfrm>
-            <a:off x="1629034" y="1534546"/>
-            <a:ext cx="277612" cy="277612"/>
+            <a:off x="5119268" y="1370228"/>
+            <a:ext cx="231343" cy="231343"/>
           </a:xfrm>
           <a:prstGeom prst="rect">
             <a:avLst/>
@@ -5692,14 +6816,14 @@
       </p:pic>
       <p:sp>
         <p:nvSpPr>
-          <p:cNvPr id="5" name="Text 2"/>
-          <p:cNvSpPr/>
-          <p:nvPr/>
-        </p:nvSpPr>
-        <p:spPr>
-          <a:xfrm>
-            <a:off x="457200" y="2194560"/>
-            <a:ext cx="2621280" cy="347472"/>
+          <p:cNvPr id="7" name="Text 4"/>
+          <p:cNvSpPr/>
+          <p:nvPr/>
+        </p:nvSpPr>
+        <p:spPr>
+          <a:xfrm>
+            <a:off x="5669280" y="1197864"/>
+            <a:ext cx="3017520" cy="292608"/>
           </a:xfrm>
           <a:prstGeom prst="rect">
             <a:avLst/>
@@ -5711,50 +6835,11 @@
           <a:bodyPr wrap="square" lIns="0" tIns="0" rIns="0" bIns="0" rtlCol="0" anchor="ctr"/>
           <a:lstStyle/>
           <a:p>
-            <a:pPr algn="ctr" indent="0" marL="0">
-              <a:buNone/>
-            </a:pPr>
-            <a:r>
-              <a:rPr lang="en-US" sz="1550" b="1" dirty="0">
-                <a:solidFill>
-                  <a:srgbClr val="13283A"/>
-                </a:solidFill>
-                <a:latin typeface="Consolas" pitchFamily="34" charset="0"/>
-                <a:ea typeface="Consolas" pitchFamily="34" charset="-122"/>
-                <a:cs typeface="Consolas" pitchFamily="34" charset="-120"/>
-              </a:rPr>
-              <a:t>The inflection hit</a:t>
-            </a:r>
-            <a:endParaRPr lang="en-US" sz="1550" dirty="0"/>
-          </a:p>
-        </p:txBody>
-      </p:sp>
-      <p:sp>
-        <p:nvSpPr>
-          <p:cNvPr id="6" name="Text 3"/>
-          <p:cNvSpPr/>
-          <p:nvPr/>
-        </p:nvSpPr>
-        <p:spPr>
-          <a:xfrm>
-            <a:off x="548640" y="2606040"/>
-            <a:ext cx="2438400" cy="1691640"/>
-          </a:xfrm>
-          <a:prstGeom prst="rect">
-            <a:avLst/>
-          </a:prstGeom>
-          <a:noFill/>
-          <a:ln/>
-        </p:spPr>
-        <p:txBody>
-          <a:bodyPr wrap="square" lIns="0" tIns="0" rIns="0" bIns="0" rtlCol="0" anchor="t"/>
-          <a:lstStyle/>
-          <a:p>
             <a:pPr indent="0" marL="0">
               <a:buNone/>
             </a:pPr>
             <a:r>
-              <a:rPr lang="en-US" sz="1250" dirty="0">
+              <a:rPr lang="en-US" sz="1450" b="1" dirty="0">
                 <a:solidFill>
                   <a:srgbClr val="13283A"/>
                 </a:solidFill>
@@ -5762,22 +6847,61 @@
                 <a:ea typeface="Calibri" pitchFamily="34" charset="-122"/>
                 <a:cs typeface="Calibri" pitchFamily="34" charset="-120"/>
               </a:rPr>
-              <a:t>AI assistants crossed the line: the majority of new code is generated. Reading speed — not writing speed — is the constraint on shipping.</a:t>
-            </a:r>
-            <a:endParaRPr lang="en-US" sz="1250" dirty="0"/>
-          </a:p>
-        </p:txBody>
-      </p:sp>
-      <p:sp>
-        <p:nvSpPr>
-          <p:cNvPr id="7" name="Shape 4"/>
-          <p:cNvSpPr/>
-          <p:nvPr/>
-        </p:nvSpPr>
-        <p:spPr>
-          <a:xfrm>
-            <a:off x="4270248" y="1371600"/>
-            <a:ext cx="603504" cy="603504"/>
+              <a:t>No proprietary format</a:t>
+            </a:r>
+            <a:endParaRPr lang="en-US" sz="1450" dirty="0"/>
+          </a:p>
+        </p:txBody>
+      </p:sp>
+      <p:sp>
+        <p:nvSpPr>
+          <p:cNvPr id="8" name="Text 5"/>
+          <p:cNvSpPr/>
+          <p:nvPr/>
+        </p:nvSpPr>
+        <p:spPr>
+          <a:xfrm>
+            <a:off x="5669280" y="1490472"/>
+            <a:ext cx="3017520" cy="822960"/>
+          </a:xfrm>
+          <a:prstGeom prst="rect">
+            <a:avLst/>
+          </a:prstGeom>
+          <a:noFill/>
+          <a:ln/>
+        </p:spPr>
+        <p:txBody>
+          <a:bodyPr wrap="square" lIns="0" tIns="0" rIns="0" bIns="0" rtlCol="0" anchor="t"/>
+          <a:lstStyle/>
+          <a:p>
+            <a:pPr indent="0" marL="0">
+              <a:buNone/>
+            </a:pPr>
+            <a:r>
+              <a:rPr lang="en-US" sz="1150" dirty="0">
+                <a:solidFill>
+                  <a:srgbClr val="5B7083"/>
+                </a:solidFill>
+                <a:latin typeface="Calibri" pitchFamily="34" charset="0"/>
+                <a:ea typeface="Calibri" pitchFamily="34" charset="-122"/>
+                <a:cs typeface="Calibri" pitchFamily="34" charset="-120"/>
+              </a:rPr>
+              <a:t>Frontmatter + one mermaid block per file. Renders on GitHub, reviews in PRs, versions with the code it describes.</a:t>
+            </a:r>
+            <a:endParaRPr lang="en-US" sz="1150" dirty="0"/>
+          </a:p>
+        </p:txBody>
+      </p:sp>
+      <p:sp>
+        <p:nvSpPr>
+          <p:cNvPr id="9" name="Shape 6"/>
+          <p:cNvSpPr/>
+          <p:nvPr/>
+        </p:nvSpPr>
+        <p:spPr>
+          <a:xfrm>
+            <a:off x="4983480" y="2423160"/>
+            <a:ext cx="502920" cy="502920"/>
           </a:xfrm>
           <a:prstGeom prst="ellipse">
             <a:avLst/>
@@ -5790,7 +6914,7 @@
       </p:sp>
       <p:pic>
         <p:nvPicPr>
-          <p:cNvPr id="8" name="Image 1" descr="preencoded.png">    </p:cNvPr>
+          <p:cNvPr id="10" name="Image 1" descr="preencoded.png">    </p:cNvPr>
           <p:cNvPicPr>
             <a:picLocks noChangeAspect="1"/>
           </p:cNvPicPr>
@@ -5804,8 +6928,8 @@
         </p:blipFill>
         <p:spPr>
           <a:xfrm>
-            <a:off x="4433194" y="1534546"/>
-            <a:ext cx="277612" cy="277612"/>
+            <a:off x="5119268" y="2558948"/>
+            <a:ext cx="231343" cy="231343"/>
           </a:xfrm>
           <a:prstGeom prst="rect">
             <a:avLst/>
@@ -5814,14 +6938,14 @@
       </p:pic>
       <p:sp>
         <p:nvSpPr>
-          <p:cNvPr id="9" name="Text 5"/>
-          <p:cNvSpPr/>
-          <p:nvPr/>
-        </p:nvSpPr>
-        <p:spPr>
-          <a:xfrm>
-            <a:off x="3261360" y="2194560"/>
-            <a:ext cx="2621280" cy="347472"/>
+          <p:cNvPr id="11" name="Text 7"/>
+          <p:cNvSpPr/>
+          <p:nvPr/>
+        </p:nvSpPr>
+        <p:spPr>
+          <a:xfrm>
+            <a:off x="5669280" y="2386584"/>
+            <a:ext cx="3017520" cy="292608"/>
           </a:xfrm>
           <a:prstGeom prst="rect">
             <a:avLst/>
@@ -5833,50 +6957,11 @@
           <a:bodyPr wrap="square" lIns="0" tIns="0" rIns="0" bIns="0" rtlCol="0" anchor="ctr"/>
           <a:lstStyle/>
           <a:p>
-            <a:pPr algn="ctr" indent="0" marL="0">
-              <a:buNone/>
-            </a:pPr>
-            <a:r>
-              <a:rPr lang="en-US" sz="1550" b="1" dirty="0">
-                <a:solidFill>
-                  <a:srgbClr val="13283A"/>
-                </a:solidFill>
-                <a:latin typeface="Consolas" pitchFamily="34" charset="0"/>
-                <a:ea typeface="Consolas" pitchFamily="34" charset="-122"/>
-                <a:cs typeface="Consolas" pitchFamily="34" charset="-120"/>
-              </a:rPr>
-              <a:t>Upkeep became free</a:t>
-            </a:r>
-            <a:endParaRPr lang="en-US" sz="1550" dirty="0"/>
-          </a:p>
-        </p:txBody>
-      </p:sp>
-      <p:sp>
-        <p:nvSpPr>
-          <p:cNvPr id="10" name="Text 6"/>
-          <p:cNvSpPr/>
-          <p:nvPr/>
-        </p:nvSpPr>
-        <p:spPr>
-          <a:xfrm>
-            <a:off x="3352800" y="2606040"/>
-            <a:ext cx="2438400" cy="1691640"/>
-          </a:xfrm>
-          <a:prstGeom prst="rect">
-            <a:avLst/>
-          </a:prstGeom>
-          <a:noFill/>
-          <a:ln/>
-        </p:spPr>
-        <p:txBody>
-          <a:bodyPr wrap="square" lIns="0" tIns="0" rIns="0" bIns="0" rtlCol="0" anchor="t"/>
-          <a:lstStyle/>
-          <a:p>
             <a:pPr indent="0" marL="0">
               <a:buNone/>
             </a:pPr>
             <a:r>
-              <a:rPr lang="en-US" sz="1250" dirty="0">
+              <a:rPr lang="en-US" sz="1450" b="1" dirty="0">
                 <a:solidFill>
                   <a:srgbClr val="13283A"/>
                 </a:solidFill>
@@ -5884,35 +6969,74 @@
                 <a:ea typeface="Calibri" pitchFamily="34" charset="-122"/>
                 <a:cs typeface="Calibri" pitchFamily="34" charset="-120"/>
               </a:rPr>
-              <a:t>Keeping diagrams aligned with code used to be human toil nobody did. An agent now does it in the background, on every change.</a:t>
-            </a:r>
-            <a:endParaRPr lang="en-US" sz="1250" dirty="0"/>
-          </a:p>
-        </p:txBody>
-      </p:sp>
-      <p:sp>
-        <p:nvSpPr>
-          <p:cNvPr id="11" name="Shape 7"/>
-          <p:cNvSpPr/>
-          <p:nvPr/>
-        </p:nvSpPr>
-        <p:spPr>
-          <a:xfrm>
-            <a:off x="7074408" y="1371600"/>
-            <a:ext cx="603504" cy="603504"/>
+              <a:t>Portable by construction</a:t>
+            </a:r>
+            <a:endParaRPr lang="en-US" sz="1450" dirty="0"/>
+          </a:p>
+        </p:txBody>
+      </p:sp>
+      <p:sp>
+        <p:nvSpPr>
+          <p:cNvPr id="12" name="Text 8"/>
+          <p:cNvSpPr/>
+          <p:nvPr/>
+        </p:nvSpPr>
+        <p:spPr>
+          <a:xfrm>
+            <a:off x="5669280" y="2679192"/>
+            <a:ext cx="3017520" cy="822960"/>
+          </a:xfrm>
+          <a:prstGeom prst="rect">
+            <a:avLst/>
+          </a:prstGeom>
+          <a:noFill/>
+          <a:ln/>
+        </p:spPr>
+        <p:txBody>
+          <a:bodyPr wrap="square" lIns="0" tIns="0" rIns="0" bIns="0" rtlCol="0" anchor="t"/>
+          <a:lstStyle/>
+          <a:p>
+            <a:pPr indent="0" marL="0">
+              <a:buNone/>
+            </a:pPr>
+            <a:r>
+              <a:rPr lang="en-US" sz="1150" dirty="0">
+                <a:solidFill>
+                  <a:srgbClr val="5B7083"/>
+                </a:solidFill>
+                <a:latin typeface="Calibri" pitchFamily="34" charset="0"/>
+                <a:ea typeface="Calibri" pitchFamily="34" charset="-122"/>
+                <a:cs typeface="Calibri" pitchFamily="34" charset="-120"/>
+              </a:rPr>
+              <a:t>Every link is a relative path. The same architecture folder works on any machine, in any tool — no lock-in.</a:t>
+            </a:r>
+            <a:endParaRPr lang="en-US" sz="1150" dirty="0"/>
+          </a:p>
+        </p:txBody>
+      </p:sp>
+      <p:sp>
+        <p:nvSpPr>
+          <p:cNvPr id="13" name="Shape 9"/>
+          <p:cNvSpPr/>
+          <p:nvPr/>
+        </p:nvSpPr>
+        <p:spPr>
+          <a:xfrm>
+            <a:off x="4983480" y="3611880"/>
+            <a:ext cx="502920" cy="502920"/>
           </a:xfrm>
           <a:prstGeom prst="ellipse">
             <a:avLst/>
           </a:prstGeom>
           <a:solidFill>
-            <a:srgbClr val="02C39A"/>
+            <a:srgbClr val="21295C"/>
           </a:solidFill>
           <a:ln/>
         </p:spPr>
       </p:sp>
       <p:pic>
         <p:nvPicPr>
-          <p:cNvPr id="12" name="Image 2" descr="preencoded.png">    </p:cNvPr>
+          <p:cNvPr id="14" name="Image 2" descr="preencoded.png">    </p:cNvPr>
           <p:cNvPicPr>
             <a:picLocks noChangeAspect="1"/>
           </p:cNvPicPr>
@@ -5926,8 +7050,8 @@
         </p:blipFill>
         <p:spPr>
           <a:xfrm>
-            <a:off x="7237354" y="1534546"/>
-            <a:ext cx="277612" cy="277612"/>
+            <a:off x="5119268" y="3747668"/>
+            <a:ext cx="231343" cy="231343"/>
           </a:xfrm>
           <a:prstGeom prst="rect">
             <a:avLst/>
@@ -5936,14 +7060,14 @@
       </p:pic>
       <p:sp>
         <p:nvSpPr>
-          <p:cNvPr id="13" name="Text 8"/>
-          <p:cNvSpPr/>
-          <p:nvPr/>
-        </p:nvSpPr>
-        <p:spPr>
-          <a:xfrm>
-            <a:off x="6065520" y="2194560"/>
-            <a:ext cx="2621280" cy="347472"/>
+          <p:cNvPr id="15" name="Text 10"/>
+          <p:cNvSpPr/>
+          <p:nvPr/>
+        </p:nvSpPr>
+        <p:spPr>
+          <a:xfrm>
+            <a:off x="5669280" y="3575304"/>
+            <a:ext cx="3017520" cy="292608"/>
           </a:xfrm>
           <a:prstGeom prst="rect">
             <a:avLst/>
@@ -5955,50 +7079,11 @@
           <a:bodyPr wrap="square" lIns="0" tIns="0" rIns="0" bIns="0" rtlCol="0" anchor="ctr"/>
           <a:lstStyle/>
           <a:p>
-            <a:pPr algn="ctr" indent="0" marL="0">
-              <a:buNone/>
-            </a:pPr>
-            <a:r>
-              <a:rPr lang="en-US" sz="1550" b="1" dirty="0">
-                <a:solidFill>
-                  <a:srgbClr val="13283A"/>
-                </a:solidFill>
-                <a:latin typeface="Consolas" pitchFamily="34" charset="0"/>
-                <a:ea typeface="Consolas" pitchFamily="34" charset="-122"/>
-                <a:cs typeface="Consolas" pitchFamily="34" charset="-120"/>
-              </a:rPr>
-              <a:t>Mermaid already won</a:t>
-            </a:r>
-            <a:endParaRPr lang="en-US" sz="1550" dirty="0"/>
-          </a:p>
-        </p:txBody>
-      </p:sp>
-      <p:sp>
-        <p:nvSpPr>
-          <p:cNvPr id="14" name="Text 9"/>
-          <p:cNvSpPr/>
-          <p:nvPr/>
-        </p:nvSpPr>
-        <p:spPr>
-          <a:xfrm>
-            <a:off x="6156960" y="2606040"/>
-            <a:ext cx="2438400" cy="1691640"/>
-          </a:xfrm>
-          <a:prstGeom prst="rect">
-            <a:avLst/>
-          </a:prstGeom>
-          <a:noFill/>
-          <a:ln/>
-        </p:spPr>
-        <p:txBody>
-          <a:bodyPr wrap="square" lIns="0" tIns="0" rIns="0" bIns="0" rtlCol="0" anchor="t"/>
-          <a:lstStyle/>
-          <a:p>
             <a:pPr indent="0" marL="0">
               <a:buNone/>
             </a:pPr>
             <a:r>
-              <a:rPr lang="en-US" sz="1250" dirty="0">
+              <a:rPr lang="en-US" sz="1450" b="1" dirty="0">
                 <a:solidFill>
                   <a:srgbClr val="13283A"/>
                 </a:solidFill>
@@ -6006,38 +7091,38 @@
                 <a:ea typeface="Calibri" pitchFamily="34" charset="-122"/>
                 <a:cs typeface="Calibri" pitchFamily="34" charset="-120"/>
               </a:rPr>
-              <a:t>GitHub, GitLab, Notion, and Obsidian all render mermaid natively. Developers already author it — codeswim makes it navigable.</a:t>
-            </a:r>
-            <a:endParaRPr lang="en-US" sz="1250" dirty="0"/>
-          </a:p>
-        </p:txBody>
-      </p:sp>
-      <p:sp>
-        <p:nvSpPr>
-          <p:cNvPr id="15" name="Text 10"/>
-          <p:cNvSpPr/>
-          <p:nvPr/>
-        </p:nvSpPr>
-        <p:spPr>
-          <a:xfrm>
-            <a:off x="457200" y="4526280"/>
-            <a:ext cx="8229600" cy="365760"/>
-          </a:xfrm>
-          <a:prstGeom prst="rect">
-            <a:avLst/>
-          </a:prstGeom>
-          <a:noFill/>
-          <a:ln/>
-        </p:spPr>
-        <p:txBody>
-          <a:bodyPr wrap="square" lIns="0" tIns="0" rIns="0" bIns="0" rtlCol="0" anchor="ctr"/>
-          <a:lstStyle/>
-          <a:p>
-            <a:pPr algn="ctr" indent="0" marL="0">
-              <a:buNone/>
-            </a:pPr>
-            <a:r>
-              <a:rPr lang="en-US" sz="1350" i="1" dirty="0">
+              <a:t>One click to ground truth</a:t>
+            </a:r>
+            <a:endParaRPr lang="en-US" sz="1450" dirty="0"/>
+          </a:p>
+        </p:txBody>
+      </p:sp>
+      <p:sp>
+        <p:nvSpPr>
+          <p:cNvPr id="16" name="Text 11"/>
+          <p:cNvSpPr/>
+          <p:nvPr/>
+        </p:nvSpPr>
+        <p:spPr>
+          <a:xfrm>
+            <a:off x="5669280" y="3867912"/>
+            <a:ext cx="3017520" cy="822960"/>
+          </a:xfrm>
+          <a:prstGeom prst="rect">
+            <a:avLst/>
+          </a:prstGeom>
+          <a:noFill/>
+          <a:ln/>
+        </p:spPr>
+        <p:txBody>
+          <a:bodyPr wrap="square" lIns="0" tIns="0" rIns="0" bIns="0" rtlCol="0" anchor="t"/>
+          <a:lstStyle/>
+          <a:p>
+            <a:pPr indent="0" marL="0">
+              <a:buNone/>
+            </a:pPr>
+            <a:r>
+              <a:rPr lang="en-US" sz="1150" dirty="0">
                 <a:solidFill>
                   <a:srgbClr val="5B7083"/>
                 </a:solidFill>
@@ -6045,9 +7130,9 @@
                 <a:ea typeface="Calibri" pitchFamily="34" charset="-122"/>
                 <a:cs typeface="Calibri" pitchFamily="34" charset="-120"/>
               </a:rPr>
-              <a:t>Three curves crossing at once — the tool that sits at the intersection gets adopted by default.</a:t>
-            </a:r>
-            <a:endParaRPr lang="en-US" sz="1350" dirty="0"/>
+              <a:t>Targets ending in .md open a child diagram; anything else opens the code pane, jumping straight to the cited lines.</a:t>
+            </a:r>
+            <a:endParaRPr lang="en-US" sz="1150" dirty="0"/>
           </a:p>
         </p:txBody>
       </p:sp>
@@ -6116,7 +7201,7 @@
                 <a:ea typeface="Consolas" pitchFamily="34" charset="-122"/>
                 <a:cs typeface="Consolas" pitchFamily="34" charset="-120"/>
               </a:rPr>
-              <a:t>Where codeswim sits</a:t>
+              <a:t>Why now</a:t>
             </a:r>
             <a:endParaRPr lang="en-US" sz="2500" dirty="0"/>
           </a:p>
@@ -6130,30 +7215,52 @@
         </p:nvSpPr>
         <p:spPr>
           <a:xfrm>
-            <a:off x="457200" y="1234440"/>
-            <a:ext cx="4023360" cy="1600200"/>
-          </a:xfrm>
-          <a:prstGeom prst="roundRect">
-            <a:avLst>
-              <a:gd name="adj" fmla="val 4571"/>
-            </a:avLst>
+            <a:off x="1466088" y="1371600"/>
+            <a:ext cx="603504" cy="603504"/>
+          </a:xfrm>
+          <a:prstGeom prst="ellipse">
+            <a:avLst/>
           </a:prstGeom>
           <a:solidFill>
-            <a:srgbClr val="EDF4F9"/>
+            <a:srgbClr val="065A82"/>
           </a:solidFill>
           <a:ln/>
         </p:spPr>
       </p:sp>
-      <p:sp>
-        <p:nvSpPr>
-          <p:cNvPr id="4" name="Text 2"/>
-          <p:cNvSpPr/>
-          <p:nvPr/>
-        </p:nvSpPr>
-        <p:spPr>
-          <a:xfrm>
-            <a:off x="685800" y="1399032"/>
-            <a:ext cx="3566160" cy="292608"/>
+      <p:pic>
+        <p:nvPicPr>
+          <p:cNvPr id="4" name="Image 0" descr="preencoded.png">    </p:cNvPr>
+          <p:cNvPicPr>
+            <a:picLocks noChangeAspect="1"/>
+          </p:cNvPicPr>
+          <p:nvPr/>
+        </p:nvPicPr>
+        <p:blipFill>
+          <a:blip r:embed="rId1"/>
+          <a:stretch>
+            <a:fillRect/>
+          </a:stretch>
+        </p:blipFill>
+        <p:spPr>
+          <a:xfrm>
+            <a:off x="1629034" y="1534546"/>
+            <a:ext cx="277612" cy="277612"/>
+          </a:xfrm>
+          <a:prstGeom prst="rect">
+            <a:avLst/>
+          </a:prstGeom>
+        </p:spPr>
+      </p:pic>
+      <p:sp>
+        <p:nvSpPr>
+          <p:cNvPr id="5" name="Text 2"/>
+          <p:cNvSpPr/>
+          <p:nvPr/>
+        </p:nvSpPr>
+        <p:spPr>
+          <a:xfrm>
+            <a:off x="457200" y="2194560"/>
+            <a:ext cx="2621280" cy="347472"/>
           </a:xfrm>
           <a:prstGeom prst="rect">
             <a:avLst/>
@@ -6165,11 +7272,50 @@
           <a:bodyPr wrap="square" lIns="0" tIns="0" rIns="0" bIns="0" rtlCol="0" anchor="ctr"/>
           <a:lstStyle/>
           <a:p>
+            <a:pPr algn="ctr" indent="0" marL="0">
+              <a:buNone/>
+            </a:pPr>
+            <a:r>
+              <a:rPr lang="en-US" sz="1550" b="1" dirty="0">
+                <a:solidFill>
+                  <a:srgbClr val="13283A"/>
+                </a:solidFill>
+                <a:latin typeface="Consolas" pitchFamily="34" charset="0"/>
+                <a:ea typeface="Consolas" pitchFamily="34" charset="-122"/>
+                <a:cs typeface="Consolas" pitchFamily="34" charset="-120"/>
+              </a:rPr>
+              <a:t>The inflection hit</a:t>
+            </a:r>
+            <a:endParaRPr lang="en-US" sz="1550" dirty="0"/>
+          </a:p>
+        </p:txBody>
+      </p:sp>
+      <p:sp>
+        <p:nvSpPr>
+          <p:cNvPr id="6" name="Text 3"/>
+          <p:cNvSpPr/>
+          <p:nvPr/>
+        </p:nvSpPr>
+        <p:spPr>
+          <a:xfrm>
+            <a:off x="548640" y="2606040"/>
+            <a:ext cx="2438400" cy="1691640"/>
+          </a:xfrm>
+          <a:prstGeom prst="rect">
+            <a:avLst/>
+          </a:prstGeom>
+          <a:noFill/>
+          <a:ln/>
+        </p:spPr>
+        <p:txBody>
+          <a:bodyPr wrap="square" lIns="0" tIns="0" rIns="0" bIns="0" rtlCol="0" anchor="t"/>
+          <a:lstStyle/>
+          <a:p>
             <a:pPr indent="0" marL="0">
               <a:buNone/>
             </a:pPr>
             <a:r>
-              <a:rPr lang="en-US" sz="1450" b="1" dirty="0">
+              <a:rPr lang="en-US" sz="1250" dirty="0">
                 <a:solidFill>
                   <a:srgbClr val="13283A"/>
                 </a:solidFill>
@@ -6177,22 +7323,66 @@
                 <a:ea typeface="Calibri" pitchFamily="34" charset="-122"/>
                 <a:cs typeface="Calibri" pitchFamily="34" charset="-120"/>
               </a:rPr>
-              <a:t>AI coding IDEs</a:t>
-            </a:r>
-            <a:endParaRPr lang="en-US" sz="1450" dirty="0"/>
-          </a:p>
-        </p:txBody>
-      </p:sp>
-      <p:sp>
-        <p:nvSpPr>
-          <p:cNvPr id="5" name="Text 3"/>
-          <p:cNvSpPr/>
-          <p:nvPr/>
-        </p:nvSpPr>
-        <p:spPr>
-          <a:xfrm>
-            <a:off x="685800" y="1691640"/>
-            <a:ext cx="3566160" cy="237744"/>
+              <a:t>AI assistants crossed the line: the majority of new code is generated. Reading speed — not writing speed — is the constraint on shipping.</a:t>
+            </a:r>
+            <a:endParaRPr lang="en-US" sz="1250" dirty="0"/>
+          </a:p>
+        </p:txBody>
+      </p:sp>
+      <p:sp>
+        <p:nvSpPr>
+          <p:cNvPr id="7" name="Shape 4"/>
+          <p:cNvSpPr/>
+          <p:nvPr/>
+        </p:nvSpPr>
+        <p:spPr>
+          <a:xfrm>
+            <a:off x="4270248" y="1371600"/>
+            <a:ext cx="603504" cy="603504"/>
+          </a:xfrm>
+          <a:prstGeom prst="ellipse">
+            <a:avLst/>
+          </a:prstGeom>
+          <a:solidFill>
+            <a:srgbClr val="1C7293"/>
+          </a:solidFill>
+          <a:ln/>
+        </p:spPr>
+      </p:sp>
+      <p:pic>
+        <p:nvPicPr>
+          <p:cNvPr id="8" name="Image 1" descr="preencoded.png">    </p:cNvPr>
+          <p:cNvPicPr>
+            <a:picLocks noChangeAspect="1"/>
+          </p:cNvPicPr>
+          <p:nvPr/>
+        </p:nvPicPr>
+        <p:blipFill>
+          <a:blip r:embed="rId2"/>
+          <a:stretch>
+            <a:fillRect/>
+          </a:stretch>
+        </p:blipFill>
+        <p:spPr>
+          <a:xfrm>
+            <a:off x="4433194" y="1534546"/>
+            <a:ext cx="277612" cy="277612"/>
+          </a:xfrm>
+          <a:prstGeom prst="rect">
+            <a:avLst/>
+          </a:prstGeom>
+        </p:spPr>
+      </p:pic>
+      <p:sp>
+        <p:nvSpPr>
+          <p:cNvPr id="9" name="Text 5"/>
+          <p:cNvSpPr/>
+          <p:nvPr/>
+        </p:nvSpPr>
+        <p:spPr>
+          <a:xfrm>
+            <a:off x="3261360" y="2194560"/>
+            <a:ext cx="2621280" cy="347472"/>
           </a:xfrm>
           <a:prstGeom prst="rect">
             <a:avLst/>
@@ -6204,34 +7394,34 @@
           <a:bodyPr wrap="square" lIns="0" tIns="0" rIns="0" bIns="0" rtlCol="0" anchor="ctr"/>
           <a:lstStyle/>
           <a:p>
-            <a:pPr indent="0" marL="0">
-              <a:buNone/>
-            </a:pPr>
-            <a:r>
-              <a:rPr lang="en-US" sz="950" dirty="0">
-                <a:solidFill>
-                  <a:srgbClr val="5B7083"/>
+            <a:pPr algn="ctr" indent="0" marL="0">
+              <a:buNone/>
+            </a:pPr>
+            <a:r>
+              <a:rPr lang="en-US" sz="1550" b="1" dirty="0">
+                <a:solidFill>
+                  <a:srgbClr val="13283A"/>
                 </a:solidFill>
                 <a:latin typeface="Consolas" pitchFamily="34" charset="0"/>
                 <a:ea typeface="Consolas" pitchFamily="34" charset="-122"/>
                 <a:cs typeface="Consolas" pitchFamily="34" charset="-120"/>
               </a:rPr>
-              <a:t>Cursor · Copilot · Windsurf</a:t>
-            </a:r>
-            <a:endParaRPr lang="en-US" sz="950" dirty="0"/>
-          </a:p>
-        </p:txBody>
-      </p:sp>
-      <p:sp>
-        <p:nvSpPr>
-          <p:cNvPr id="6" name="Text 4"/>
-          <p:cNvSpPr/>
-          <p:nvPr/>
-        </p:nvSpPr>
-        <p:spPr>
-          <a:xfrm>
-            <a:off x="685800" y="1984248"/>
-            <a:ext cx="3566160" cy="685800"/>
+              <a:t>Upkeep became free</a:t>
+            </a:r>
+            <a:endParaRPr lang="en-US" sz="1550" dirty="0"/>
+          </a:p>
+        </p:txBody>
+      </p:sp>
+      <p:sp>
+        <p:nvSpPr>
+          <p:cNvPr id="10" name="Text 6"/>
+          <p:cNvSpPr/>
+          <p:nvPr/>
+        </p:nvSpPr>
+        <p:spPr>
+          <a:xfrm>
+            <a:off x="3352800" y="2606040"/>
+            <a:ext cx="2438400" cy="1691640"/>
           </a:xfrm>
           <a:prstGeom prst="rect">
             <a:avLst/>
@@ -6247,7 +7437,7 @@
               <a:buNone/>
             </a:pPr>
             <a:r>
-              <a:rPr lang="en-US" sz="1150" dirty="0">
+              <a:rPr lang="en-US" sz="1250" dirty="0">
                 <a:solidFill>
                   <a:srgbClr val="13283A"/>
                 </a:solidFill>
@@ -6255,44 +7445,66 @@
                 <a:ea typeface="Calibri" pitchFamily="34" charset="-122"/>
                 <a:cs typeface="Calibri" pitchFamily="34" charset="-120"/>
               </a:rPr>
-              <a:t>Optimize writing code faster — which makes the pile of unread code grow faster. No answer for understanding.</a:t>
-            </a:r>
-            <a:endParaRPr lang="en-US" sz="1150" dirty="0"/>
-          </a:p>
-        </p:txBody>
-      </p:sp>
-      <p:sp>
-        <p:nvSpPr>
-          <p:cNvPr id="7" name="Shape 5"/>
-          <p:cNvSpPr/>
-          <p:nvPr/>
-        </p:nvSpPr>
-        <p:spPr>
-          <a:xfrm>
-            <a:off x="457200" y="3017520"/>
-            <a:ext cx="4023360" cy="1600200"/>
-          </a:xfrm>
-          <a:prstGeom prst="roundRect">
-            <a:avLst>
-              <a:gd name="adj" fmla="val 4571"/>
-            </a:avLst>
+              <a:t>Keeping diagrams aligned with code used to be human toil nobody did. An agent now does it in the background, on every change.</a:t>
+            </a:r>
+            <a:endParaRPr lang="en-US" sz="1250" dirty="0"/>
+          </a:p>
+        </p:txBody>
+      </p:sp>
+      <p:sp>
+        <p:nvSpPr>
+          <p:cNvPr id="11" name="Shape 7"/>
+          <p:cNvSpPr/>
+          <p:nvPr/>
+        </p:nvSpPr>
+        <p:spPr>
+          <a:xfrm>
+            <a:off x="7074408" y="1371600"/>
+            <a:ext cx="603504" cy="603504"/>
+          </a:xfrm>
+          <a:prstGeom prst="ellipse">
+            <a:avLst/>
           </a:prstGeom>
           <a:solidFill>
-            <a:srgbClr val="EDF4F9"/>
+            <a:srgbClr val="02C39A"/>
           </a:solidFill>
           <a:ln/>
         </p:spPr>
       </p:sp>
-      <p:sp>
-        <p:nvSpPr>
-          <p:cNvPr id="8" name="Text 6"/>
-          <p:cNvSpPr/>
-          <p:nvPr/>
-        </p:nvSpPr>
-        <p:spPr>
-          <a:xfrm>
-            <a:off x="685800" y="3182112"/>
-            <a:ext cx="3566160" cy="292608"/>
+      <p:pic>
+        <p:nvPicPr>
+          <p:cNvPr id="12" name="Image 2" descr="preencoded.png">    </p:cNvPr>
+          <p:cNvPicPr>
+            <a:picLocks noChangeAspect="1"/>
+          </p:cNvPicPr>
+          <p:nvPr/>
+        </p:nvPicPr>
+        <p:blipFill>
+          <a:blip r:embed="rId3"/>
+          <a:stretch>
+            <a:fillRect/>
+          </a:stretch>
+        </p:blipFill>
+        <p:spPr>
+          <a:xfrm>
+            <a:off x="7237354" y="1534546"/>
+            <a:ext cx="277612" cy="277612"/>
+          </a:xfrm>
+          <a:prstGeom prst="rect">
+            <a:avLst/>
+          </a:prstGeom>
+        </p:spPr>
+      </p:pic>
+      <p:sp>
+        <p:nvSpPr>
+          <p:cNvPr id="13" name="Text 8"/>
+          <p:cNvSpPr/>
+          <p:nvPr/>
+        </p:nvSpPr>
+        <p:spPr>
+          <a:xfrm>
+            <a:off x="6065520" y="2194560"/>
+            <a:ext cx="2621280" cy="347472"/>
           </a:xfrm>
           <a:prstGeom prst="rect">
             <a:avLst/>
@@ -6304,11 +7516,50 @@
           <a:bodyPr wrap="square" lIns="0" tIns="0" rIns="0" bIns="0" rtlCol="0" anchor="ctr"/>
           <a:lstStyle/>
           <a:p>
+            <a:pPr algn="ctr" indent="0" marL="0">
+              <a:buNone/>
+            </a:pPr>
+            <a:r>
+              <a:rPr lang="en-US" sz="1550" b="1" dirty="0">
+                <a:solidFill>
+                  <a:srgbClr val="13283A"/>
+                </a:solidFill>
+                <a:latin typeface="Consolas" pitchFamily="34" charset="0"/>
+                <a:ea typeface="Consolas" pitchFamily="34" charset="-122"/>
+                <a:cs typeface="Consolas" pitchFamily="34" charset="-120"/>
+              </a:rPr>
+              <a:t>Mermaid already won</a:t>
+            </a:r>
+            <a:endParaRPr lang="en-US" sz="1550" dirty="0"/>
+          </a:p>
+        </p:txBody>
+      </p:sp>
+      <p:sp>
+        <p:nvSpPr>
+          <p:cNvPr id="14" name="Text 9"/>
+          <p:cNvSpPr/>
+          <p:nvPr/>
+        </p:nvSpPr>
+        <p:spPr>
+          <a:xfrm>
+            <a:off x="6156960" y="2606040"/>
+            <a:ext cx="2438400" cy="1691640"/>
+          </a:xfrm>
+          <a:prstGeom prst="rect">
+            <a:avLst/>
+          </a:prstGeom>
+          <a:noFill/>
+          <a:ln/>
+        </p:spPr>
+        <p:txBody>
+          <a:bodyPr wrap="square" lIns="0" tIns="0" rIns="0" bIns="0" rtlCol="0" anchor="t"/>
+          <a:lstStyle/>
+          <a:p>
             <a:pPr indent="0" marL="0">
               <a:buNone/>
             </a:pPr>
             <a:r>
-              <a:rPr lang="en-US" sz="1450" b="1" dirty="0">
+              <a:rPr lang="en-US" sz="1250" dirty="0">
                 <a:solidFill>
                   <a:srgbClr val="13283A"/>
                 </a:solidFill>
@@ -6316,22 +7567,22 @@
                 <a:ea typeface="Calibri" pitchFamily="34" charset="-122"/>
                 <a:cs typeface="Calibri" pitchFamily="34" charset="-120"/>
               </a:rPr>
-              <a:t>Diagram &amp; doc tools</a:t>
-            </a:r>
-            <a:endParaRPr lang="en-US" sz="1450" dirty="0"/>
-          </a:p>
-        </p:txBody>
-      </p:sp>
-      <p:sp>
-        <p:nvSpPr>
-          <p:cNvPr id="9" name="Text 7"/>
-          <p:cNvSpPr/>
-          <p:nvPr/>
-        </p:nvSpPr>
-        <p:spPr>
-          <a:xfrm>
-            <a:off x="685800" y="3474720"/>
-            <a:ext cx="3566160" cy="237744"/>
+              <a:t>GitHub, GitLab, Notion, and Obsidian all render mermaid natively. Developers already author it — codeswim makes it navigable.</a:t>
+            </a:r>
+            <a:endParaRPr lang="en-US" sz="1250" dirty="0"/>
+          </a:p>
+        </p:txBody>
+      </p:sp>
+      <p:sp>
+        <p:nvSpPr>
+          <p:cNvPr id="15" name="Text 10"/>
+          <p:cNvSpPr/>
+          <p:nvPr/>
+        </p:nvSpPr>
+        <p:spPr>
+          <a:xfrm>
+            <a:off x="457200" y="4526280"/>
+            <a:ext cx="8229600" cy="365760"/>
           </a:xfrm>
           <a:prstGeom prst="rect">
             <a:avLst/>
@@ -6343,273 +7594,21 @@
           <a:bodyPr wrap="square" lIns="0" tIns="0" rIns="0" bIns="0" rtlCol="0" anchor="ctr"/>
           <a:lstStyle/>
           <a:p>
-            <a:pPr indent="0" marL="0">
-              <a:buNone/>
-            </a:pPr>
-            <a:r>
-              <a:rPr lang="en-US" sz="950" dirty="0">
+            <a:pPr algn="ctr" indent="0" marL="0">
+              <a:buNone/>
+            </a:pPr>
+            <a:r>
+              <a:rPr lang="en-US" sz="1350" i="1" dirty="0">
                 <a:solidFill>
                   <a:srgbClr val="5B7083"/>
-                </a:solidFill>
-                <a:latin typeface="Consolas" pitchFamily="34" charset="0"/>
-                <a:ea typeface="Consolas" pitchFamily="34" charset="-122"/>
-                <a:cs typeface="Consolas" pitchFamily="34" charset="-120"/>
-              </a:rPr>
-              <a:t>Lucidchart · Confluence · CodeSee</a:t>
-            </a:r>
-            <a:endParaRPr lang="en-US" sz="950" dirty="0"/>
-          </a:p>
-        </p:txBody>
-      </p:sp>
-      <p:sp>
-        <p:nvSpPr>
-          <p:cNvPr id="10" name="Text 8"/>
-          <p:cNvSpPr/>
-          <p:nvPr/>
-        </p:nvSpPr>
-        <p:spPr>
-          <a:xfrm>
-            <a:off x="685800" y="3767328"/>
-            <a:ext cx="3566160" cy="685800"/>
-          </a:xfrm>
-          <a:prstGeom prst="rect">
-            <a:avLst/>
-          </a:prstGeom>
-          <a:noFill/>
-          <a:ln/>
-        </p:spPr>
-        <p:txBody>
-          <a:bodyPr wrap="square" lIns="0" tIns="0" rIns="0" bIns="0" rtlCol="0" anchor="t"/>
-          <a:lstStyle/>
-          <a:p>
-            <a:pPr indent="0" marL="0">
-              <a:buNone/>
-            </a:pPr>
-            <a:r>
-              <a:rPr lang="en-US" sz="1150" dirty="0">
-                <a:solidFill>
-                  <a:srgbClr val="13283A"/>
                 </a:solidFill>
                 <a:latin typeface="Calibri" pitchFamily="34" charset="0"/>
                 <a:ea typeface="Calibri" pitchFamily="34" charset="-122"/>
                 <a:cs typeface="Calibri" pitchFamily="34" charset="-120"/>
               </a:rPr>
-              <a:t>Pictures live outside the repo, drift the moment they're drawn, and aren't connected to the code they describe.</a:t>
-            </a:r>
-            <a:endParaRPr lang="en-US" sz="1150" dirty="0"/>
-          </a:p>
-        </p:txBody>
-      </p:sp>
-      <p:sp>
-        <p:nvSpPr>
-          <p:cNvPr id="11" name="Shape 9"/>
-          <p:cNvSpPr/>
-          <p:nvPr/>
-        </p:nvSpPr>
-        <p:spPr>
-          <a:xfrm>
-            <a:off x="4754880" y="1234440"/>
-            <a:ext cx="3931920" cy="3383280"/>
-          </a:xfrm>
-          <a:prstGeom prst="roundRect">
-            <a:avLst>
-              <a:gd name="adj" fmla="val 2162"/>
-            </a:avLst>
-          </a:prstGeom>
-          <a:solidFill>
-            <a:srgbClr val="065A82"/>
-          </a:solidFill>
-          <a:ln/>
-          <a:effectLst>
-            <a:outerShdw sx="100000" sy="100000" kx="0" ky="0" algn="bl" rotWithShape="0" blurRad="88900" dist="25400" dir="8100000">
-              <a:srgbClr val="1A2A3A">
-                <a:alpha val="18000"/>
-              </a:srgbClr>
-            </a:outerShdw>
-          </a:effectLst>
-        </p:spPr>
-      </p:sp>
-      <p:sp>
-        <p:nvSpPr>
-          <p:cNvPr id="12" name="Text 10"/>
-          <p:cNvSpPr/>
-          <p:nvPr/>
-        </p:nvSpPr>
-        <p:spPr>
-          <a:xfrm>
-            <a:off x="5029200" y="1463040"/>
-            <a:ext cx="3383280" cy="365760"/>
-          </a:xfrm>
-          <a:prstGeom prst="rect">
-            <a:avLst/>
-          </a:prstGeom>
-          <a:noFill/>
-          <a:ln/>
-        </p:spPr>
-        <p:txBody>
-          <a:bodyPr wrap="square" lIns="0" tIns="0" rIns="0" bIns="0" rtlCol="0" anchor="ctr"/>
-          <a:lstStyle/>
-          <a:p>
-            <a:pPr indent="0" marL="0">
-              <a:buNone/>
-            </a:pPr>
-            <a:r>
-              <a:rPr lang="en-US" sz="1900" b="1" dirty="0">
-                <a:solidFill>
-                  <a:srgbClr val="FFFFFF"/>
-                </a:solidFill>
-                <a:latin typeface="Consolas" pitchFamily="34" charset="0"/>
-                <a:ea typeface="Consolas" pitchFamily="34" charset="-122"/>
-                <a:cs typeface="Consolas" pitchFamily="34" charset="-120"/>
-              </a:rPr>
-              <a:t>codeswim</a:t>
-            </a:r>
-            <a:endParaRPr lang="en-US" sz="1900" dirty="0"/>
-          </a:p>
-        </p:txBody>
-      </p:sp>
-      <p:sp>
-        <p:nvSpPr>
-          <p:cNvPr id="13" name="Text 11"/>
-          <p:cNvSpPr/>
-          <p:nvPr/>
-        </p:nvSpPr>
-        <p:spPr>
-          <a:xfrm>
-            <a:off x="5029200" y="1856232"/>
-            <a:ext cx="3383280" cy="274320"/>
-          </a:xfrm>
-          <a:prstGeom prst="rect">
-            <a:avLst/>
-          </a:prstGeom>
-          <a:noFill/>
-          <a:ln/>
-        </p:spPr>
-        <p:txBody>
-          <a:bodyPr wrap="square" lIns="0" tIns="0" rIns="0" bIns="0" rtlCol="0" anchor="ctr"/>
-          <a:lstStyle/>
-          <a:p>
-            <a:pPr indent="0" marL="0">
-              <a:buNone/>
-            </a:pPr>
-            <a:r>
-              <a:rPr lang="en-US" sz="1150" i="1" dirty="0">
-                <a:solidFill>
-                  <a:srgbClr val="02C39A"/>
-                </a:solidFill>
-                <a:latin typeface="Calibri" pitchFamily="34" charset="0"/>
-                <a:ea typeface="Calibri" pitchFamily="34" charset="-122"/>
-                <a:cs typeface="Calibri" pitchFamily="34" charset="-120"/>
-              </a:rPr>
-              <a:t>the reading layer for AI-era codebases</a:t>
-            </a:r>
-            <a:endParaRPr lang="en-US" sz="1150" dirty="0"/>
-          </a:p>
-        </p:txBody>
-      </p:sp>
-      <p:sp>
-        <p:nvSpPr>
-          <p:cNvPr id="14" name="Text 12"/>
-          <p:cNvSpPr/>
-          <p:nvPr/>
-        </p:nvSpPr>
-        <p:spPr>
-          <a:xfrm>
-            <a:off x="5029200" y="2286000"/>
-            <a:ext cx="3383280" cy="2057400"/>
-          </a:xfrm>
-          <a:prstGeom prst="rect">
-            <a:avLst/>
-          </a:prstGeom>
-          <a:noFill/>
-          <a:ln/>
-        </p:spPr>
-        <p:txBody>
-          <a:bodyPr wrap="square" lIns="0" tIns="0" rIns="0" bIns="0" rtlCol="0" anchor="t"/>
-          <a:lstStyle/>
-          <a:p>
-            <a:pPr marL="177800" indent="-177800">
-              <a:spcAft>
-                <a:spcPts val="800"/>
-              </a:spcAft>
-              <a:buSzPct val="100000"/>
-              <a:buChar char="✓"/>
-            </a:pPr>
-            <a:r>
-              <a:rPr lang="en-US" sz="1250" dirty="0">
-                <a:solidFill>
-                  <a:srgbClr val="FFFFFF"/>
-                </a:solidFill>
-                <a:latin typeface="Calibri" pitchFamily="34" charset="0"/>
-                <a:ea typeface="Calibri" pitchFamily="34" charset="-122"/>
-                <a:cs typeface="Calibri" pitchFamily="34" charset="-120"/>
-              </a:rPr>
-              <a:t>Diagrams are plain markdown in the repo — zero lock-in</a:t>
-            </a:r>
-            <a:endParaRPr lang="en-US" sz="1250" dirty="0"/>
-          </a:p>
-          <a:p>
-            <a:pPr marL="177800" indent="-177800">
-              <a:spcAft>
-                <a:spcPts val="800"/>
-              </a:spcAft>
-              <a:buSzPct val="100000"/>
-              <a:buChar char="✓"/>
-            </a:pPr>
-            <a:r>
-              <a:rPr lang="en-US" sz="1250" dirty="0">
-                <a:solidFill>
-                  <a:srgbClr val="FFFFFF"/>
-                </a:solidFill>
-                <a:latin typeface="Calibri" pitchFamily="34" charset="0"/>
-                <a:ea typeface="Calibri" pitchFamily="34" charset="-122"/>
-                <a:cs typeface="Calibri" pitchFamily="34" charset="-120"/>
-              </a:rPr>
-              <a:t>Clickable navigation down to the exact source line</a:t>
-            </a:r>
-            <a:endParaRPr lang="en-US" sz="1250" dirty="0"/>
-          </a:p>
-          <a:p>
-            <a:pPr marL="177800" indent="-177800">
-              <a:spcAft>
-                <a:spcPts val="800"/>
-              </a:spcAft>
-              <a:buSzPct val="100000"/>
-              <a:buChar char="✓"/>
-            </a:pPr>
-            <a:r>
-              <a:rPr lang="en-US" sz="1250" dirty="0">
-                <a:solidFill>
-                  <a:srgbClr val="FFFFFF"/>
-                </a:solidFill>
-                <a:latin typeface="Calibri" pitchFamily="34" charset="0"/>
-                <a:ea typeface="Calibri" pitchFamily="34" charset="-122"/>
-                <a:cs typeface="Calibri" pitchFamily="34" charset="-120"/>
-              </a:rPr>
-              <a:t>Live file watching: the map updates as the code moves</a:t>
-            </a:r>
-            <a:endParaRPr lang="en-US" sz="1250" dirty="0"/>
-          </a:p>
-          <a:p>
-            <a:pPr marL="177800" indent="-177800">
-              <a:spcAft>
-                <a:spcPts val="800"/>
-              </a:spcAft>
-              <a:buSzPct val="100000"/>
-              <a:buChar char="✓"/>
-            </a:pPr>
-            <a:r>
-              <a:rPr lang="en-US" sz="1250" dirty="0">
-                <a:solidFill>
-                  <a:srgbClr val="FFFFFF"/>
-                </a:solidFill>
-                <a:latin typeface="Calibri" pitchFamily="34" charset="0"/>
-                <a:ea typeface="Calibri" pitchFamily="34" charset="-122"/>
-                <a:cs typeface="Calibri" pitchFamily="34" charset="-120"/>
-              </a:rPr>
-              <a:t>Agent-enforced alignment plus a CI coverage check — drift fails the build</a:t>
-            </a:r>
-            <a:endParaRPr lang="en-US" sz="1250" dirty="0"/>
+              <a:t>Three curves crossing at once — the tool that sits at the intersection gets adopted by default.</a:t>
+            </a:r>
+            <a:endParaRPr lang="en-US" sz="1350" dirty="0"/>
           </a:p>
         </p:txBody>
       </p:sp>
@@ -6678,7 +7677,7 @@
                 <a:ea typeface="Consolas" pitchFamily="34" charset="-122"/>
                 <a:cs typeface="Consolas" pitchFamily="34" charset="-120"/>
               </a:rPr>
-              <a:t>Not a demo — a working platform</a:t>
+              <a:t>Where codeswim sits</a:t>
             </a:r>
             <a:endParaRPr lang="en-US" sz="2500" dirty="0"/>
           </a:p>
@@ -6692,8 +7691,8 @@
         </p:nvSpPr>
         <p:spPr>
           <a:xfrm>
-            <a:off x="457200" y="1188720"/>
-            <a:ext cx="3977640" cy="1600200"/>
+            <a:off x="457200" y="1234440"/>
+            <a:ext cx="4023360" cy="1600200"/>
           </a:xfrm>
           <a:prstGeom prst="roundRect">
             <a:avLst>
@@ -6702,6 +7701,284 @@
           </a:prstGeom>
           <a:solidFill>
             <a:srgbClr val="EDF4F9"/>
+          </a:solidFill>
+          <a:ln/>
+        </p:spPr>
+      </p:sp>
+      <p:sp>
+        <p:nvSpPr>
+          <p:cNvPr id="4" name="Text 2"/>
+          <p:cNvSpPr/>
+          <p:nvPr/>
+        </p:nvSpPr>
+        <p:spPr>
+          <a:xfrm>
+            <a:off x="685800" y="1399032"/>
+            <a:ext cx="3566160" cy="292608"/>
+          </a:xfrm>
+          <a:prstGeom prst="rect">
+            <a:avLst/>
+          </a:prstGeom>
+          <a:noFill/>
+          <a:ln/>
+        </p:spPr>
+        <p:txBody>
+          <a:bodyPr wrap="square" lIns="0" tIns="0" rIns="0" bIns="0" rtlCol="0" anchor="ctr"/>
+          <a:lstStyle/>
+          <a:p>
+            <a:pPr indent="0" marL="0">
+              <a:buNone/>
+            </a:pPr>
+            <a:r>
+              <a:rPr lang="en-US" sz="1450" b="1" dirty="0">
+                <a:solidFill>
+                  <a:srgbClr val="13283A"/>
+                </a:solidFill>
+                <a:latin typeface="Calibri" pitchFamily="34" charset="0"/>
+                <a:ea typeface="Calibri" pitchFamily="34" charset="-122"/>
+                <a:cs typeface="Calibri" pitchFamily="34" charset="-120"/>
+              </a:rPr>
+              <a:t>AI coding IDEs</a:t>
+            </a:r>
+            <a:endParaRPr lang="en-US" sz="1450" dirty="0"/>
+          </a:p>
+        </p:txBody>
+      </p:sp>
+      <p:sp>
+        <p:nvSpPr>
+          <p:cNvPr id="5" name="Text 3"/>
+          <p:cNvSpPr/>
+          <p:nvPr/>
+        </p:nvSpPr>
+        <p:spPr>
+          <a:xfrm>
+            <a:off x="685800" y="1691640"/>
+            <a:ext cx="3566160" cy="237744"/>
+          </a:xfrm>
+          <a:prstGeom prst="rect">
+            <a:avLst/>
+          </a:prstGeom>
+          <a:noFill/>
+          <a:ln/>
+        </p:spPr>
+        <p:txBody>
+          <a:bodyPr wrap="square" lIns="0" tIns="0" rIns="0" bIns="0" rtlCol="0" anchor="ctr"/>
+          <a:lstStyle/>
+          <a:p>
+            <a:pPr indent="0" marL="0">
+              <a:buNone/>
+            </a:pPr>
+            <a:r>
+              <a:rPr lang="en-US" sz="950" dirty="0">
+                <a:solidFill>
+                  <a:srgbClr val="5B7083"/>
+                </a:solidFill>
+                <a:latin typeface="Consolas" pitchFamily="34" charset="0"/>
+                <a:ea typeface="Consolas" pitchFamily="34" charset="-122"/>
+                <a:cs typeface="Consolas" pitchFamily="34" charset="-120"/>
+              </a:rPr>
+              <a:t>Cursor · Copilot · Windsurf</a:t>
+            </a:r>
+            <a:endParaRPr lang="en-US" sz="950" dirty="0"/>
+          </a:p>
+        </p:txBody>
+      </p:sp>
+      <p:sp>
+        <p:nvSpPr>
+          <p:cNvPr id="6" name="Text 4"/>
+          <p:cNvSpPr/>
+          <p:nvPr/>
+        </p:nvSpPr>
+        <p:spPr>
+          <a:xfrm>
+            <a:off x="685800" y="1984248"/>
+            <a:ext cx="3566160" cy="685800"/>
+          </a:xfrm>
+          <a:prstGeom prst="rect">
+            <a:avLst/>
+          </a:prstGeom>
+          <a:noFill/>
+          <a:ln/>
+        </p:spPr>
+        <p:txBody>
+          <a:bodyPr wrap="square" lIns="0" tIns="0" rIns="0" bIns="0" rtlCol="0" anchor="t"/>
+          <a:lstStyle/>
+          <a:p>
+            <a:pPr indent="0" marL="0">
+              <a:buNone/>
+            </a:pPr>
+            <a:r>
+              <a:rPr lang="en-US" sz="1150" dirty="0">
+                <a:solidFill>
+                  <a:srgbClr val="13283A"/>
+                </a:solidFill>
+                <a:latin typeface="Calibri" pitchFamily="34" charset="0"/>
+                <a:ea typeface="Calibri" pitchFamily="34" charset="-122"/>
+                <a:cs typeface="Calibri" pitchFamily="34" charset="-120"/>
+              </a:rPr>
+              <a:t>Optimize writing code faster — which makes the pile of unread code grow faster. No answer for understanding.</a:t>
+            </a:r>
+            <a:endParaRPr lang="en-US" sz="1150" dirty="0"/>
+          </a:p>
+        </p:txBody>
+      </p:sp>
+      <p:sp>
+        <p:nvSpPr>
+          <p:cNvPr id="7" name="Shape 5"/>
+          <p:cNvSpPr/>
+          <p:nvPr/>
+        </p:nvSpPr>
+        <p:spPr>
+          <a:xfrm>
+            <a:off x="457200" y="3017520"/>
+            <a:ext cx="4023360" cy="1600200"/>
+          </a:xfrm>
+          <a:prstGeom prst="roundRect">
+            <a:avLst>
+              <a:gd name="adj" fmla="val 4571"/>
+            </a:avLst>
+          </a:prstGeom>
+          <a:solidFill>
+            <a:srgbClr val="EDF4F9"/>
+          </a:solidFill>
+          <a:ln/>
+        </p:spPr>
+      </p:sp>
+      <p:sp>
+        <p:nvSpPr>
+          <p:cNvPr id="8" name="Text 6"/>
+          <p:cNvSpPr/>
+          <p:nvPr/>
+        </p:nvSpPr>
+        <p:spPr>
+          <a:xfrm>
+            <a:off x="685800" y="3182112"/>
+            <a:ext cx="3566160" cy="292608"/>
+          </a:xfrm>
+          <a:prstGeom prst="rect">
+            <a:avLst/>
+          </a:prstGeom>
+          <a:noFill/>
+          <a:ln/>
+        </p:spPr>
+        <p:txBody>
+          <a:bodyPr wrap="square" lIns="0" tIns="0" rIns="0" bIns="0" rtlCol="0" anchor="ctr"/>
+          <a:lstStyle/>
+          <a:p>
+            <a:pPr indent="0" marL="0">
+              <a:buNone/>
+            </a:pPr>
+            <a:r>
+              <a:rPr lang="en-US" sz="1450" b="1" dirty="0">
+                <a:solidFill>
+                  <a:srgbClr val="13283A"/>
+                </a:solidFill>
+                <a:latin typeface="Calibri" pitchFamily="34" charset="0"/>
+                <a:ea typeface="Calibri" pitchFamily="34" charset="-122"/>
+                <a:cs typeface="Calibri" pitchFamily="34" charset="-120"/>
+              </a:rPr>
+              <a:t>Diagram &amp; doc tools</a:t>
+            </a:r>
+            <a:endParaRPr lang="en-US" sz="1450" dirty="0"/>
+          </a:p>
+        </p:txBody>
+      </p:sp>
+      <p:sp>
+        <p:nvSpPr>
+          <p:cNvPr id="9" name="Text 7"/>
+          <p:cNvSpPr/>
+          <p:nvPr/>
+        </p:nvSpPr>
+        <p:spPr>
+          <a:xfrm>
+            <a:off x="685800" y="3474720"/>
+            <a:ext cx="3566160" cy="237744"/>
+          </a:xfrm>
+          <a:prstGeom prst="rect">
+            <a:avLst/>
+          </a:prstGeom>
+          <a:noFill/>
+          <a:ln/>
+        </p:spPr>
+        <p:txBody>
+          <a:bodyPr wrap="square" lIns="0" tIns="0" rIns="0" bIns="0" rtlCol="0" anchor="ctr"/>
+          <a:lstStyle/>
+          <a:p>
+            <a:pPr indent="0" marL="0">
+              <a:buNone/>
+            </a:pPr>
+            <a:r>
+              <a:rPr lang="en-US" sz="950" dirty="0">
+                <a:solidFill>
+                  <a:srgbClr val="5B7083"/>
+                </a:solidFill>
+                <a:latin typeface="Consolas" pitchFamily="34" charset="0"/>
+                <a:ea typeface="Consolas" pitchFamily="34" charset="-122"/>
+                <a:cs typeface="Consolas" pitchFamily="34" charset="-120"/>
+              </a:rPr>
+              <a:t>Lucidchart · Confluence · CodeSee</a:t>
+            </a:r>
+            <a:endParaRPr lang="en-US" sz="950" dirty="0"/>
+          </a:p>
+        </p:txBody>
+      </p:sp>
+      <p:sp>
+        <p:nvSpPr>
+          <p:cNvPr id="10" name="Text 8"/>
+          <p:cNvSpPr/>
+          <p:nvPr/>
+        </p:nvSpPr>
+        <p:spPr>
+          <a:xfrm>
+            <a:off x="685800" y="3767328"/>
+            <a:ext cx="3566160" cy="685800"/>
+          </a:xfrm>
+          <a:prstGeom prst="rect">
+            <a:avLst/>
+          </a:prstGeom>
+          <a:noFill/>
+          <a:ln/>
+        </p:spPr>
+        <p:txBody>
+          <a:bodyPr wrap="square" lIns="0" tIns="0" rIns="0" bIns="0" rtlCol="0" anchor="t"/>
+          <a:lstStyle/>
+          <a:p>
+            <a:pPr indent="0" marL="0">
+              <a:buNone/>
+            </a:pPr>
+            <a:r>
+              <a:rPr lang="en-US" sz="1150" dirty="0">
+                <a:solidFill>
+                  <a:srgbClr val="13283A"/>
+                </a:solidFill>
+                <a:latin typeface="Calibri" pitchFamily="34" charset="0"/>
+                <a:ea typeface="Calibri" pitchFamily="34" charset="-122"/>
+                <a:cs typeface="Calibri" pitchFamily="34" charset="-120"/>
+              </a:rPr>
+              <a:t>Pictures live outside the repo, drift the moment they're drawn, and aren't connected to the code they describe.</a:t>
+            </a:r>
+            <a:endParaRPr lang="en-US" sz="1150" dirty="0"/>
+          </a:p>
+        </p:txBody>
+      </p:sp>
+      <p:sp>
+        <p:nvSpPr>
+          <p:cNvPr id="11" name="Shape 9"/>
+          <p:cNvSpPr/>
+          <p:nvPr/>
+        </p:nvSpPr>
+        <p:spPr>
+          <a:xfrm>
+            <a:off x="4754880" y="1234440"/>
+            <a:ext cx="3931920" cy="3383280"/>
+          </a:xfrm>
+          <a:prstGeom prst="roundRect">
+            <a:avLst>
+              <a:gd name="adj" fmla="val 2162"/>
+            </a:avLst>
+          </a:prstGeom>
+          <a:solidFill>
+            <a:srgbClr val="065A82"/>
           </a:solidFill>
           <a:ln/>
           <a:effectLst>
@@ -6715,58 +7992,14 @@
       </p:sp>
       <p:sp>
         <p:nvSpPr>
-          <p:cNvPr id="4" name="Shape 2"/>
-          <p:cNvSpPr/>
-          <p:nvPr/>
-        </p:nvSpPr>
-        <p:spPr>
-          <a:xfrm>
-            <a:off x="658368" y="1389888"/>
-            <a:ext cx="457200" cy="457200"/>
-          </a:xfrm>
-          <a:prstGeom prst="ellipse">
-            <a:avLst/>
-          </a:prstGeom>
-          <a:solidFill>
-            <a:srgbClr val="065A82"/>
-          </a:solidFill>
-          <a:ln/>
-        </p:spPr>
-      </p:sp>
-      <p:pic>
-        <p:nvPicPr>
-          <p:cNvPr id="5" name="Image 0" descr="preencoded.png">    </p:cNvPr>
-          <p:cNvPicPr>
-            <a:picLocks noChangeAspect="1"/>
-          </p:cNvPicPr>
-          <p:nvPr/>
-        </p:nvPicPr>
-        <p:blipFill>
-          <a:blip r:embed="rId1"/>
-          <a:stretch>
-            <a:fillRect/>
-          </a:stretch>
-        </p:blipFill>
-        <p:spPr>
-          <a:xfrm>
-            <a:off x="781812" y="1513332"/>
-            <a:ext cx="210312" cy="210312"/>
-          </a:xfrm>
-          <a:prstGeom prst="rect">
-            <a:avLst/>
-          </a:prstGeom>
-        </p:spPr>
-      </p:pic>
-      <p:sp>
-        <p:nvSpPr>
-          <p:cNvPr id="6" name="Text 3"/>
-          <p:cNvSpPr/>
-          <p:nvPr/>
-        </p:nvSpPr>
-        <p:spPr>
-          <a:xfrm>
-            <a:off x="1261872" y="1389888"/>
-            <a:ext cx="2971800" cy="292608"/>
+          <p:cNvPr id="12" name="Text 10"/>
+          <p:cNvSpPr/>
+          <p:nvPr/>
+        </p:nvSpPr>
+        <p:spPr>
+          <a:xfrm>
+            <a:off x="5029200" y="1463040"/>
+            <a:ext cx="3383280" cy="365760"/>
           </a:xfrm>
           <a:prstGeom prst="rect">
             <a:avLst/>
@@ -6782,30 +8015,69 @@
               <a:buNone/>
             </a:pPr>
             <a:r>
-              <a:rPr lang="en-US" sz="1400" b="1" dirty="0">
-                <a:solidFill>
-                  <a:srgbClr val="13283A"/>
+              <a:rPr lang="en-US" sz="1900" b="1" dirty="0">
+                <a:solidFill>
+                  <a:srgbClr val="FFFFFF"/>
+                </a:solidFill>
+                <a:latin typeface="Consolas" pitchFamily="34" charset="0"/>
+                <a:ea typeface="Consolas" pitchFamily="34" charset="-122"/>
+                <a:cs typeface="Consolas" pitchFamily="34" charset="-120"/>
+              </a:rPr>
+              <a:t>codeswim</a:t>
+            </a:r>
+            <a:endParaRPr lang="en-US" sz="1900" dirty="0"/>
+          </a:p>
+        </p:txBody>
+      </p:sp>
+      <p:sp>
+        <p:nvSpPr>
+          <p:cNvPr id="13" name="Text 11"/>
+          <p:cNvSpPr/>
+          <p:nvPr/>
+        </p:nvSpPr>
+        <p:spPr>
+          <a:xfrm>
+            <a:off x="5029200" y="1856232"/>
+            <a:ext cx="3383280" cy="274320"/>
+          </a:xfrm>
+          <a:prstGeom prst="rect">
+            <a:avLst/>
+          </a:prstGeom>
+          <a:noFill/>
+          <a:ln/>
+        </p:spPr>
+        <p:txBody>
+          <a:bodyPr wrap="square" lIns="0" tIns="0" rIns="0" bIns="0" rtlCol="0" anchor="ctr"/>
+          <a:lstStyle/>
+          <a:p>
+            <a:pPr indent="0" marL="0">
+              <a:buNone/>
+            </a:pPr>
+            <a:r>
+              <a:rPr lang="en-US" sz="1150" i="1" dirty="0">
+                <a:solidFill>
+                  <a:srgbClr val="02C39A"/>
                 </a:solidFill>
                 <a:latin typeface="Calibri" pitchFamily="34" charset="0"/>
                 <a:ea typeface="Calibri" pitchFamily="34" charset="-122"/>
                 <a:cs typeface="Calibri" pitchFamily="34" charset="-120"/>
               </a:rPr>
-              <a:t>Desktop navigator</a:t>
-            </a:r>
-            <a:endParaRPr lang="en-US" sz="1400" dirty="0"/>
-          </a:p>
-        </p:txBody>
-      </p:sp>
-      <p:sp>
-        <p:nvSpPr>
-          <p:cNvPr id="7" name="Text 4"/>
-          <p:cNvSpPr/>
-          <p:nvPr/>
-        </p:nvSpPr>
-        <p:spPr>
-          <a:xfrm>
-            <a:off x="1261872" y="1700784"/>
-            <a:ext cx="2971800" cy="914400"/>
+              <a:t>the reading layer for AI-era codebases</a:t>
+            </a:r>
+            <a:endParaRPr lang="en-US" sz="1150" dirty="0"/>
+          </a:p>
+        </p:txBody>
+      </p:sp>
+      <p:sp>
+        <p:nvSpPr>
+          <p:cNvPr id="14" name="Text 12"/>
+          <p:cNvSpPr/>
+          <p:nvPr/>
+        </p:nvSpPr>
+        <p:spPr>
+          <a:xfrm>
+            <a:off x="5029200" y="2286000"/>
+            <a:ext cx="3383280" cy="2057400"/>
           </a:xfrm>
           <a:prstGeom prst="rect">
             <a:avLst/>
@@ -6817,511 +8089,107 @@
           <a:bodyPr wrap="square" lIns="0" tIns="0" rIns="0" bIns="0" rtlCol="0" anchor="t"/>
           <a:lstStyle/>
           <a:p>
-            <a:pPr indent="0" marL="0">
-              <a:buNone/>
-            </a:pPr>
-            <a:r>
-              <a:rPr lang="en-US" sz="1100" dirty="0">
-                <a:solidFill>
-                  <a:srgbClr val="13283A"/>
+            <a:pPr marL="177800" indent="-177800">
+              <a:spcAft>
+                <a:spcPts val="800"/>
+              </a:spcAft>
+              <a:buSzPct val="100000"/>
+              <a:buChar char="✓"/>
+            </a:pPr>
+            <a:r>
+              <a:rPr lang="en-US" sz="1250" dirty="0">
+                <a:solidFill>
+                  <a:srgbClr val="FFFFFF"/>
                 </a:solidFill>
                 <a:latin typeface="Calibri" pitchFamily="34" charset="0"/>
                 <a:ea typeface="Calibri" pitchFamily="34" charset="-122"/>
                 <a:cs typeface="Calibri" pitchFamily="34" charset="-120"/>
               </a:rPr>
-              <a:t>Electron app for macOS, Windows, and Linux. Folder in, clickable architecture out. Installers ship from CI on every tag.</a:t>
-            </a:r>
-            <a:endParaRPr lang="en-US" sz="1100" dirty="0"/>
-          </a:p>
-        </p:txBody>
-      </p:sp>
-      <p:sp>
-        <p:nvSpPr>
-          <p:cNvPr id="8" name="Shape 5"/>
-          <p:cNvSpPr/>
-          <p:nvPr/>
-        </p:nvSpPr>
-        <p:spPr>
-          <a:xfrm>
-            <a:off x="4709160" y="1188720"/>
-            <a:ext cx="3977640" cy="1600200"/>
-          </a:xfrm>
-          <a:prstGeom prst="roundRect">
-            <a:avLst>
-              <a:gd name="adj" fmla="val 4571"/>
-            </a:avLst>
-          </a:prstGeom>
-          <a:solidFill>
-            <a:srgbClr val="EDF4F9"/>
-          </a:solidFill>
-          <a:ln/>
-          <a:effectLst>
-            <a:outerShdw sx="100000" sy="100000" kx="0" ky="0" algn="bl" rotWithShape="0" blurRad="88900" dist="25400" dir="8100000">
-              <a:srgbClr val="1A2A3A">
-                <a:alpha val="18000"/>
-              </a:srgbClr>
-            </a:outerShdw>
-          </a:effectLst>
-        </p:spPr>
-      </p:sp>
-      <p:sp>
-        <p:nvSpPr>
-          <p:cNvPr id="9" name="Shape 6"/>
-          <p:cNvSpPr/>
-          <p:nvPr/>
-        </p:nvSpPr>
-        <p:spPr>
-          <a:xfrm>
-            <a:off x="4910328" y="1389888"/>
-            <a:ext cx="457200" cy="457200"/>
-          </a:xfrm>
-          <a:prstGeom prst="ellipse">
-            <a:avLst/>
-          </a:prstGeom>
-          <a:solidFill>
-            <a:srgbClr val="1C7293"/>
-          </a:solidFill>
-          <a:ln/>
-        </p:spPr>
-      </p:sp>
-      <p:pic>
-        <p:nvPicPr>
-          <p:cNvPr id="10" name="Image 1" descr="preencoded.png">    </p:cNvPr>
-          <p:cNvPicPr>
-            <a:picLocks noChangeAspect="1"/>
-          </p:cNvPicPr>
-          <p:nvPr/>
-        </p:nvPicPr>
-        <p:blipFill>
-          <a:blip r:embed="rId2"/>
-          <a:stretch>
-            <a:fillRect/>
-          </a:stretch>
-        </p:blipFill>
-        <p:spPr>
-          <a:xfrm>
-            <a:off x="5033772" y="1513332"/>
-            <a:ext cx="210312" cy="210312"/>
-          </a:xfrm>
-          <a:prstGeom prst="rect">
-            <a:avLst/>
-          </a:prstGeom>
-        </p:spPr>
-      </p:pic>
-      <p:sp>
-        <p:nvSpPr>
-          <p:cNvPr id="11" name="Text 7"/>
-          <p:cNvSpPr/>
-          <p:nvPr/>
-        </p:nvSpPr>
-        <p:spPr>
-          <a:xfrm>
-            <a:off x="5513832" y="1389888"/>
-            <a:ext cx="2971800" cy="292608"/>
-          </a:xfrm>
-          <a:prstGeom prst="rect">
-            <a:avLst/>
-          </a:prstGeom>
-          <a:noFill/>
-          <a:ln/>
-        </p:spPr>
-        <p:txBody>
-          <a:bodyPr wrap="square" lIns="0" tIns="0" rIns="0" bIns="0" rtlCol="0" anchor="ctr"/>
-          <a:lstStyle/>
-          <a:p>
-            <a:pPr indent="0" marL="0">
-              <a:buNone/>
-            </a:pPr>
-            <a:r>
-              <a:rPr lang="en-US" sz="1400" b="1" dirty="0">
-                <a:solidFill>
-                  <a:srgbClr val="13283A"/>
+              <a:t>Diagrams are plain markdown in the repo — zero lock-in</a:t>
+            </a:r>
+            <a:endParaRPr lang="en-US" sz="1250" dirty="0"/>
+          </a:p>
+          <a:p>
+            <a:pPr marL="177800" indent="-177800">
+              <a:spcAft>
+                <a:spcPts val="800"/>
+              </a:spcAft>
+              <a:buSzPct val="100000"/>
+              <a:buChar char="✓"/>
+            </a:pPr>
+            <a:r>
+              <a:rPr lang="en-US" sz="1250" dirty="0">
+                <a:solidFill>
+                  <a:srgbClr val="FFFFFF"/>
                 </a:solidFill>
                 <a:latin typeface="Calibri" pitchFamily="34" charset="0"/>
                 <a:ea typeface="Calibri" pitchFamily="34" charset="-122"/>
                 <a:cs typeface="Calibri" pitchFamily="34" charset="-120"/>
               </a:rPr>
-              <a:t>VS Code extension</a:t>
-            </a:r>
-            <a:endParaRPr lang="en-US" sz="1400" dirty="0"/>
-          </a:p>
-        </p:txBody>
-      </p:sp>
-      <p:sp>
-        <p:nvSpPr>
-          <p:cNvPr id="12" name="Text 8"/>
-          <p:cNvSpPr/>
-          <p:nvPr/>
-        </p:nvSpPr>
-        <p:spPr>
-          <a:xfrm>
-            <a:off x="5513832" y="1700784"/>
-            <a:ext cx="2971800" cy="914400"/>
-          </a:xfrm>
-          <a:prstGeom prst="rect">
-            <a:avLst/>
-          </a:prstGeom>
-          <a:noFill/>
-          <a:ln/>
-        </p:spPr>
-        <p:txBody>
-          <a:bodyPr wrap="square" lIns="0" tIns="0" rIns="0" bIns="0" rtlCol="0" anchor="t"/>
-          <a:lstStyle/>
-          <a:p>
-            <a:pPr indent="0" marL="0">
-              <a:buNone/>
-            </a:pPr>
-            <a:r>
-              <a:rPr lang="en-US" sz="1100" dirty="0">
-                <a:solidFill>
-                  <a:srgbClr val="13283A"/>
+              <a:t>Clickable navigation down to the exact source line</a:t>
+            </a:r>
+            <a:endParaRPr lang="en-US" sz="1250" dirty="0"/>
+          </a:p>
+          <a:p>
+            <a:pPr marL="177800" indent="-177800">
+              <a:spcAft>
+                <a:spcPts val="800"/>
+              </a:spcAft>
+              <a:buSzPct val="100000"/>
+              <a:buChar char="✓"/>
+            </a:pPr>
+            <a:r>
+              <a:rPr lang="en-US" sz="1250" dirty="0">
+                <a:solidFill>
+                  <a:srgbClr val="FFFFFF"/>
                 </a:solidFill>
                 <a:latin typeface="Calibri" pitchFamily="34" charset="0"/>
                 <a:ea typeface="Calibri" pitchFamily="34" charset="-122"/>
                 <a:cs typeface="Calibri" pitchFamily="34" charset="-120"/>
               </a:rPr>
-              <a:t>The same diagram navigation inside the editor developers already live in — one format, two surfaces.</a:t>
-            </a:r>
-            <a:endParaRPr lang="en-US" sz="1100" dirty="0"/>
-          </a:p>
-        </p:txBody>
-      </p:sp>
-      <p:sp>
-        <p:nvSpPr>
-          <p:cNvPr id="13" name="Shape 9"/>
-          <p:cNvSpPr/>
-          <p:nvPr/>
-        </p:nvSpPr>
-        <p:spPr>
-          <a:xfrm>
-            <a:off x="457200" y="2971800"/>
-            <a:ext cx="3977640" cy="1600200"/>
-          </a:xfrm>
-          <a:prstGeom prst="roundRect">
-            <a:avLst>
-              <a:gd name="adj" fmla="val 4571"/>
-            </a:avLst>
-          </a:prstGeom>
-          <a:solidFill>
-            <a:srgbClr val="EDF4F9"/>
-          </a:solidFill>
-          <a:ln/>
-          <a:effectLst>
-            <a:outerShdw sx="100000" sy="100000" kx="0" ky="0" algn="bl" rotWithShape="0" blurRad="88900" dist="25400" dir="8100000">
-              <a:srgbClr val="1A2A3A">
-                <a:alpha val="18000"/>
-              </a:srgbClr>
-            </a:outerShdw>
-          </a:effectLst>
-        </p:spPr>
-      </p:sp>
-      <p:sp>
-        <p:nvSpPr>
-          <p:cNvPr id="14" name="Shape 10"/>
-          <p:cNvSpPr/>
-          <p:nvPr/>
-        </p:nvSpPr>
-        <p:spPr>
-          <a:xfrm>
-            <a:off x="658368" y="3172968"/>
-            <a:ext cx="457200" cy="457200"/>
-          </a:xfrm>
-          <a:prstGeom prst="ellipse">
-            <a:avLst/>
-          </a:prstGeom>
-          <a:solidFill>
-            <a:srgbClr val="21295C"/>
-          </a:solidFill>
-          <a:ln/>
-        </p:spPr>
-      </p:sp>
-      <p:pic>
-        <p:nvPicPr>
-          <p:cNvPr id="15" name="Image 2" descr="preencoded.png">    </p:cNvPr>
-          <p:cNvPicPr>
-            <a:picLocks noChangeAspect="1"/>
-          </p:cNvPicPr>
-          <p:nvPr/>
-        </p:nvPicPr>
-        <p:blipFill>
-          <a:blip r:embed="rId3"/>
-          <a:stretch>
-            <a:fillRect/>
-          </a:stretch>
-        </p:blipFill>
-        <p:spPr>
-          <a:xfrm>
-            <a:off x="781812" y="3296412"/>
-            <a:ext cx="210312" cy="210312"/>
-          </a:xfrm>
-          <a:prstGeom prst="rect">
-            <a:avLst/>
-          </a:prstGeom>
-        </p:spPr>
-      </p:pic>
-      <p:sp>
-        <p:nvSpPr>
-          <p:cNvPr id="16" name="Text 11"/>
-          <p:cNvSpPr/>
-          <p:nvPr/>
-        </p:nvSpPr>
-        <p:spPr>
-          <a:xfrm>
-            <a:off x="1261872" y="3172968"/>
-            <a:ext cx="2971800" cy="292608"/>
-          </a:xfrm>
-          <a:prstGeom prst="rect">
-            <a:avLst/>
-          </a:prstGeom>
-          <a:noFill/>
-          <a:ln/>
-        </p:spPr>
-        <p:txBody>
-          <a:bodyPr wrap="square" lIns="0" tIns="0" rIns="0" bIns="0" rtlCol="0" anchor="ctr"/>
-          <a:lstStyle/>
-          <a:p>
-            <a:pPr indent="0" marL="0">
-              <a:buNone/>
-            </a:pPr>
-            <a:r>
-              <a:rPr lang="en-US" sz="1400" b="1" dirty="0">
-                <a:solidFill>
-                  <a:srgbClr val="13283A"/>
+              <a:t>Live file watching: the map updates as the code moves</a:t>
+            </a:r>
+            <a:endParaRPr lang="en-US" sz="1250" dirty="0"/>
+          </a:p>
+          <a:p>
+            <a:pPr marL="177800" indent="-177800">
+              <a:spcAft>
+                <a:spcPts val="800"/>
+              </a:spcAft>
+              <a:buSzPct val="100000"/>
+              <a:buChar char="✓"/>
+            </a:pPr>
+            <a:r>
+              <a:rPr lang="en-US" sz="1250" dirty="0">
+                <a:solidFill>
+                  <a:srgbClr val="FFFFFF"/>
                 </a:solidFill>
                 <a:latin typeface="Calibri" pitchFamily="34" charset="0"/>
                 <a:ea typeface="Calibri" pitchFamily="34" charset="-122"/>
                 <a:cs typeface="Calibri" pitchFamily="34" charset="-120"/>
               </a:rPr>
-              <a:t>codeswim-coverage CLI</a:t>
-            </a:r>
-            <a:endParaRPr lang="en-US" sz="1400" dirty="0"/>
-          </a:p>
-        </p:txBody>
-      </p:sp>
-      <p:sp>
-        <p:nvSpPr>
-          <p:cNvPr id="17" name="Text 12"/>
-          <p:cNvSpPr/>
-          <p:nvPr/>
-        </p:nvSpPr>
-        <p:spPr>
-          <a:xfrm>
-            <a:off x="1261872" y="3483864"/>
-            <a:ext cx="2971800" cy="914400"/>
-          </a:xfrm>
-          <a:prstGeom prst="rect">
-            <a:avLst/>
-          </a:prstGeom>
-          <a:noFill/>
-          <a:ln/>
-        </p:spPr>
-        <p:txBody>
-          <a:bodyPr wrap="square" lIns="0" tIns="0" rIns="0" bIns="0" rtlCol="0" anchor="t"/>
-          <a:lstStyle/>
-          <a:p>
-            <a:pPr indent="0" marL="0">
-              <a:buNone/>
-            </a:pPr>
-            <a:r>
-              <a:rPr lang="en-US" sz="1100" dirty="0">
-                <a:solidFill>
-                  <a:srgbClr val="13283A"/>
+              <a:t>Shared presence: the team reads one live map, not divergent wiki snapshots</a:t>
+            </a:r>
+            <a:endParaRPr lang="en-US" sz="1250" dirty="0"/>
+          </a:p>
+          <a:p>
+            <a:pPr marL="177800" indent="-177800">
+              <a:spcAft>
+                <a:spcPts val="800"/>
+              </a:spcAft>
+              <a:buSzPct val="100000"/>
+              <a:buChar char="✓"/>
+            </a:pPr>
+            <a:r>
+              <a:rPr lang="en-US" sz="1250" dirty="0">
+                <a:solidFill>
+                  <a:srgbClr val="FFFFFF"/>
                 </a:solidFill>
                 <a:latin typeface="Calibri" pitchFamily="34" charset="0"/>
                 <a:ea typeface="Calibri" pitchFamily="34" charset="-122"/>
                 <a:cs typeface="Calibri" pitchFamily="34" charset="-120"/>
               </a:rPr>
-              <a:t>A CI check that every source file is reachable from a diagram. Architecture drift becomes a failing build, not a surprise.</a:t>
-            </a:r>
-            <a:endParaRPr lang="en-US" sz="1100" dirty="0"/>
-          </a:p>
-        </p:txBody>
-      </p:sp>
-      <p:sp>
-        <p:nvSpPr>
-          <p:cNvPr id="18" name="Shape 13"/>
-          <p:cNvSpPr/>
-          <p:nvPr/>
-        </p:nvSpPr>
-        <p:spPr>
-          <a:xfrm>
-            <a:off x="4709160" y="2971800"/>
-            <a:ext cx="3977640" cy="1600200"/>
-          </a:xfrm>
-          <a:prstGeom prst="roundRect">
-            <a:avLst>
-              <a:gd name="adj" fmla="val 4571"/>
-            </a:avLst>
-          </a:prstGeom>
-          <a:solidFill>
-            <a:srgbClr val="EDF4F9"/>
-          </a:solidFill>
-          <a:ln/>
-          <a:effectLst>
-            <a:outerShdw sx="100000" sy="100000" kx="0" ky="0" algn="bl" rotWithShape="0" blurRad="88900" dist="25400" dir="8100000">
-              <a:srgbClr val="1A2A3A">
-                <a:alpha val="18000"/>
-              </a:srgbClr>
-            </a:outerShdw>
-          </a:effectLst>
-        </p:spPr>
-      </p:sp>
-      <p:sp>
-        <p:nvSpPr>
-          <p:cNvPr id="19" name="Shape 14"/>
-          <p:cNvSpPr/>
-          <p:nvPr/>
-        </p:nvSpPr>
-        <p:spPr>
-          <a:xfrm>
-            <a:off x="4910328" y="3172968"/>
-            <a:ext cx="457200" cy="457200"/>
-          </a:xfrm>
-          <a:prstGeom prst="ellipse">
-            <a:avLst/>
-          </a:prstGeom>
-          <a:solidFill>
-            <a:srgbClr val="02C39A"/>
-          </a:solidFill>
-          <a:ln/>
-        </p:spPr>
-      </p:sp>
-      <p:pic>
-        <p:nvPicPr>
-          <p:cNvPr id="20" name="Image 3" descr="preencoded.png">    </p:cNvPr>
-          <p:cNvPicPr>
-            <a:picLocks noChangeAspect="1"/>
-          </p:cNvPicPr>
-          <p:nvPr/>
-        </p:nvPicPr>
-        <p:blipFill>
-          <a:blip r:embed="rId4"/>
-          <a:stretch>
-            <a:fillRect/>
-          </a:stretch>
-        </p:blipFill>
-        <p:spPr>
-          <a:xfrm>
-            <a:off x="5033772" y="3296412"/>
-            <a:ext cx="210312" cy="210312"/>
-          </a:xfrm>
-          <a:prstGeom prst="rect">
-            <a:avLst/>
-          </a:prstGeom>
-        </p:spPr>
-      </p:pic>
-      <p:sp>
-        <p:nvSpPr>
-          <p:cNvPr id="21" name="Text 15"/>
-          <p:cNvSpPr/>
-          <p:nvPr/>
-        </p:nvSpPr>
-        <p:spPr>
-          <a:xfrm>
-            <a:off x="5513832" y="3172968"/>
-            <a:ext cx="2971800" cy="292608"/>
-          </a:xfrm>
-          <a:prstGeom prst="rect">
-            <a:avLst/>
-          </a:prstGeom>
-          <a:noFill/>
-          <a:ln/>
-        </p:spPr>
-        <p:txBody>
-          <a:bodyPr wrap="square" lIns="0" tIns="0" rIns="0" bIns="0" rtlCol="0" anchor="ctr"/>
-          <a:lstStyle/>
-          <a:p>
-            <a:pPr indent="0" marL="0">
-              <a:buNone/>
-            </a:pPr>
-            <a:r>
-              <a:rPr lang="en-US" sz="1400" b="1" dirty="0">
-                <a:solidFill>
-                  <a:srgbClr val="13283A"/>
-                </a:solidFill>
-                <a:latin typeface="Calibri" pitchFamily="34" charset="0"/>
-                <a:ea typeface="Calibri" pitchFamily="34" charset="-122"/>
-                <a:cs typeface="Calibri" pitchFamily="34" charset="-120"/>
-              </a:rPr>
-              <a:t>A method, not just a tool</a:t>
-            </a:r>
-            <a:endParaRPr lang="en-US" sz="1400" dirty="0"/>
-          </a:p>
-        </p:txBody>
-      </p:sp>
-      <p:sp>
-        <p:nvSpPr>
-          <p:cNvPr id="22" name="Text 16"/>
-          <p:cNvSpPr/>
-          <p:nvPr/>
-        </p:nvSpPr>
-        <p:spPr>
-          <a:xfrm>
-            <a:off x="5513832" y="3483864"/>
-            <a:ext cx="2971800" cy="914400"/>
-          </a:xfrm>
-          <a:prstGeom prst="rect">
-            <a:avLst/>
-          </a:prstGeom>
-          <a:noFill/>
-          <a:ln/>
-        </p:spPr>
-        <p:txBody>
-          <a:bodyPr wrap="square" lIns="0" tIns="0" rIns="0" bIns="0" rtlCol="0" anchor="t"/>
-          <a:lstStyle/>
-          <a:p>
-            <a:pPr indent="0" marL="0">
-              <a:buNone/>
-            </a:pPr>
-            <a:r>
-              <a:rPr lang="en-US" sz="1100" dirty="0">
-                <a:solidFill>
-                  <a:srgbClr val="13283A"/>
-                </a:solidFill>
-                <a:latin typeface="Calibri" pitchFamily="34" charset="0"/>
-                <a:ea typeface="Calibri" pitchFamily="34" charset="-122"/>
-                <a:cs typeface="Calibri" pitchFamily="34" charset="-120"/>
-              </a:rPr>
-              <a:t>Mermaid-Driven Development: overview → architecture → flows → decisions. A runnable example repo shows the way.</a:t>
-            </a:r>
-            <a:endParaRPr lang="en-US" sz="1100" dirty="0"/>
-          </a:p>
-        </p:txBody>
-      </p:sp>
-      <p:sp>
-        <p:nvSpPr>
-          <p:cNvPr id="23" name="Text 17"/>
-          <p:cNvSpPr/>
-          <p:nvPr/>
-        </p:nvSpPr>
-        <p:spPr>
-          <a:xfrm>
-            <a:off x="457200" y="4681728"/>
-            <a:ext cx="8229600" cy="365760"/>
-          </a:xfrm>
-          <a:prstGeom prst="rect">
-            <a:avLst/>
-          </a:prstGeom>
-          <a:noFill/>
-          <a:ln/>
-        </p:spPr>
-        <p:txBody>
-          <a:bodyPr wrap="square" lIns="0" tIns="0" rIns="0" bIns="0" rtlCol="0" anchor="ctr"/>
-          <a:lstStyle/>
-          <a:p>
-            <a:pPr algn="ctr" indent="0" marL="0">
-              <a:buNone/>
-            </a:pPr>
-            <a:r>
-              <a:rPr lang="en-US" sz="1250" i="1" dirty="0">
-                <a:solidFill>
-                  <a:srgbClr val="5B7083"/>
-                </a:solidFill>
-                <a:latin typeface="Calibri" pitchFamily="34" charset="0"/>
-                <a:ea typeface="Calibri" pitchFamily="34" charset="-122"/>
-                <a:cs typeface="Calibri" pitchFamily="34" charset="-120"/>
-              </a:rPr>
-              <a:t>Built and dogfooded by one engineer — codeswim's own architecture is navigated in codeswim.</a:t>
+              <a:t>Agent-enforced alignment plus a CI coverage check — drift fails the build</a:t>
             </a:r>
             <a:endParaRPr lang="en-US" sz="1250" dirty="0"/>
           </a:p>
@@ -7392,7 +8260,7 @@
                 <a:ea typeface="Consolas" pitchFamily="34" charset="-122"/>
                 <a:cs typeface="Consolas" pitchFamily="34" charset="-120"/>
               </a:rPr>
-              <a:t>Roadmap</a:t>
+              <a:t>Not a demo — a working platform</a:t>
             </a:r>
             <a:endParaRPr lang="en-US" sz="2500" dirty="0"/>
           </a:p>
@@ -7406,18 +8274,25 @@
         </p:nvSpPr>
         <p:spPr>
           <a:xfrm>
-            <a:off x="457200" y="1234440"/>
-            <a:ext cx="2621280" cy="3246120"/>
+            <a:off x="457200" y="1188720"/>
+            <a:ext cx="3977640" cy="1600200"/>
           </a:xfrm>
           <a:prstGeom prst="roundRect">
             <a:avLst>
-              <a:gd name="adj" fmla="val 2791"/>
+              <a:gd name="adj" fmla="val 4571"/>
             </a:avLst>
           </a:prstGeom>
           <a:solidFill>
             <a:srgbClr val="EDF4F9"/>
           </a:solidFill>
           <a:ln/>
+          <a:effectLst>
+            <a:outerShdw sx="100000" sy="100000" kx="0" ky="0" algn="bl" rotWithShape="0" blurRad="88900" dist="25400" dir="8100000">
+              <a:srgbClr val="1A2A3A">
+                <a:alpha val="18000"/>
+              </a:srgbClr>
+            </a:outerShdw>
+          </a:effectLst>
         </p:spPr>
       </p:sp>
       <p:sp>
@@ -7428,13 +8303,464 @@
         </p:nvSpPr>
         <p:spPr>
           <a:xfrm>
-            <a:off x="685800" y="1463040"/>
-            <a:ext cx="868680" cy="310896"/>
+            <a:off x="658368" y="1389888"/>
+            <a:ext cx="457200" cy="457200"/>
+          </a:xfrm>
+          <a:prstGeom prst="ellipse">
+            <a:avLst/>
+          </a:prstGeom>
+          <a:solidFill>
+            <a:srgbClr val="065A82"/>
+          </a:solidFill>
+          <a:ln/>
+        </p:spPr>
+      </p:sp>
+      <p:pic>
+        <p:nvPicPr>
+          <p:cNvPr id="5" name="Image 0" descr="preencoded.png">    </p:cNvPr>
+          <p:cNvPicPr>
+            <a:picLocks noChangeAspect="1"/>
+          </p:cNvPicPr>
+          <p:nvPr/>
+        </p:nvPicPr>
+        <p:blipFill>
+          <a:blip r:embed="rId1"/>
+          <a:stretch>
+            <a:fillRect/>
+          </a:stretch>
+        </p:blipFill>
+        <p:spPr>
+          <a:xfrm>
+            <a:off x="781812" y="1513332"/>
+            <a:ext cx="210312" cy="210312"/>
+          </a:xfrm>
+          <a:prstGeom prst="rect">
+            <a:avLst/>
+          </a:prstGeom>
+        </p:spPr>
+      </p:pic>
+      <p:sp>
+        <p:nvSpPr>
+          <p:cNvPr id="6" name="Text 3"/>
+          <p:cNvSpPr/>
+          <p:nvPr/>
+        </p:nvSpPr>
+        <p:spPr>
+          <a:xfrm>
+            <a:off x="1261872" y="1389888"/>
+            <a:ext cx="2971800" cy="292608"/>
+          </a:xfrm>
+          <a:prstGeom prst="rect">
+            <a:avLst/>
+          </a:prstGeom>
+          <a:noFill/>
+          <a:ln/>
+        </p:spPr>
+        <p:txBody>
+          <a:bodyPr wrap="square" lIns="0" tIns="0" rIns="0" bIns="0" rtlCol="0" anchor="ctr"/>
+          <a:lstStyle/>
+          <a:p>
+            <a:pPr indent="0" marL="0">
+              <a:buNone/>
+            </a:pPr>
+            <a:r>
+              <a:rPr lang="en-US" sz="1400" b="1" dirty="0">
+                <a:solidFill>
+                  <a:srgbClr val="13283A"/>
+                </a:solidFill>
+                <a:latin typeface="Calibri" pitchFamily="34" charset="0"/>
+                <a:ea typeface="Calibri" pitchFamily="34" charset="-122"/>
+                <a:cs typeface="Calibri" pitchFamily="34" charset="-120"/>
+              </a:rPr>
+              <a:t>Desktop navigator</a:t>
+            </a:r>
+            <a:endParaRPr lang="en-US" sz="1400" dirty="0"/>
+          </a:p>
+        </p:txBody>
+      </p:sp>
+      <p:sp>
+        <p:nvSpPr>
+          <p:cNvPr id="7" name="Text 4"/>
+          <p:cNvSpPr/>
+          <p:nvPr/>
+        </p:nvSpPr>
+        <p:spPr>
+          <a:xfrm>
+            <a:off x="1261872" y="1700784"/>
+            <a:ext cx="2971800" cy="914400"/>
+          </a:xfrm>
+          <a:prstGeom prst="rect">
+            <a:avLst/>
+          </a:prstGeom>
+          <a:noFill/>
+          <a:ln/>
+        </p:spPr>
+        <p:txBody>
+          <a:bodyPr wrap="square" lIns="0" tIns="0" rIns="0" bIns="0" rtlCol="0" anchor="t"/>
+          <a:lstStyle/>
+          <a:p>
+            <a:pPr indent="0" marL="0">
+              <a:buNone/>
+            </a:pPr>
+            <a:r>
+              <a:rPr lang="en-US" sz="1100" dirty="0">
+                <a:solidFill>
+                  <a:srgbClr val="13283A"/>
+                </a:solidFill>
+                <a:latin typeface="Calibri" pitchFamily="34" charset="0"/>
+                <a:ea typeface="Calibri" pitchFamily="34" charset="-122"/>
+                <a:cs typeface="Calibri" pitchFamily="34" charset="-120"/>
+              </a:rPr>
+              <a:t>Electron app for macOS, Windows, and Linux. Folder in, clickable architecture out. Installers ship from CI on every tag.</a:t>
+            </a:r>
+            <a:endParaRPr lang="en-US" sz="1100" dirty="0"/>
+          </a:p>
+        </p:txBody>
+      </p:sp>
+      <p:sp>
+        <p:nvSpPr>
+          <p:cNvPr id="8" name="Shape 5"/>
+          <p:cNvSpPr/>
+          <p:nvPr/>
+        </p:nvSpPr>
+        <p:spPr>
+          <a:xfrm>
+            <a:off x="4709160" y="1188720"/>
+            <a:ext cx="3977640" cy="1600200"/>
           </a:xfrm>
           <a:prstGeom prst="roundRect">
             <a:avLst>
-              <a:gd name="adj" fmla="val 50000"/>
+              <a:gd name="adj" fmla="val 4571"/>
             </a:avLst>
+          </a:prstGeom>
+          <a:solidFill>
+            <a:srgbClr val="EDF4F9"/>
+          </a:solidFill>
+          <a:ln/>
+          <a:effectLst>
+            <a:outerShdw sx="100000" sy="100000" kx="0" ky="0" algn="bl" rotWithShape="0" blurRad="88900" dist="25400" dir="8100000">
+              <a:srgbClr val="1A2A3A">
+                <a:alpha val="18000"/>
+              </a:srgbClr>
+            </a:outerShdw>
+          </a:effectLst>
+        </p:spPr>
+      </p:sp>
+      <p:sp>
+        <p:nvSpPr>
+          <p:cNvPr id="9" name="Shape 6"/>
+          <p:cNvSpPr/>
+          <p:nvPr/>
+        </p:nvSpPr>
+        <p:spPr>
+          <a:xfrm>
+            <a:off x="4910328" y="1389888"/>
+            <a:ext cx="457200" cy="457200"/>
+          </a:xfrm>
+          <a:prstGeom prst="ellipse">
+            <a:avLst/>
+          </a:prstGeom>
+          <a:solidFill>
+            <a:srgbClr val="1C7293"/>
+          </a:solidFill>
+          <a:ln/>
+        </p:spPr>
+      </p:sp>
+      <p:pic>
+        <p:nvPicPr>
+          <p:cNvPr id="10" name="Image 1" descr="preencoded.png">    </p:cNvPr>
+          <p:cNvPicPr>
+            <a:picLocks noChangeAspect="1"/>
+          </p:cNvPicPr>
+          <p:nvPr/>
+        </p:nvPicPr>
+        <p:blipFill>
+          <a:blip r:embed="rId2"/>
+          <a:stretch>
+            <a:fillRect/>
+          </a:stretch>
+        </p:blipFill>
+        <p:spPr>
+          <a:xfrm>
+            <a:off x="5033772" y="1513332"/>
+            <a:ext cx="210312" cy="210312"/>
+          </a:xfrm>
+          <a:prstGeom prst="rect">
+            <a:avLst/>
+          </a:prstGeom>
+        </p:spPr>
+      </p:pic>
+      <p:sp>
+        <p:nvSpPr>
+          <p:cNvPr id="11" name="Text 7"/>
+          <p:cNvSpPr/>
+          <p:nvPr/>
+        </p:nvSpPr>
+        <p:spPr>
+          <a:xfrm>
+            <a:off x="5513832" y="1389888"/>
+            <a:ext cx="2971800" cy="292608"/>
+          </a:xfrm>
+          <a:prstGeom prst="rect">
+            <a:avLst/>
+          </a:prstGeom>
+          <a:noFill/>
+          <a:ln/>
+        </p:spPr>
+        <p:txBody>
+          <a:bodyPr wrap="square" lIns="0" tIns="0" rIns="0" bIns="0" rtlCol="0" anchor="ctr"/>
+          <a:lstStyle/>
+          <a:p>
+            <a:pPr indent="0" marL="0">
+              <a:buNone/>
+            </a:pPr>
+            <a:r>
+              <a:rPr lang="en-US" sz="1400" b="1" dirty="0">
+                <a:solidFill>
+                  <a:srgbClr val="13283A"/>
+                </a:solidFill>
+                <a:latin typeface="Calibri" pitchFamily="34" charset="0"/>
+                <a:ea typeface="Calibri" pitchFamily="34" charset="-122"/>
+                <a:cs typeface="Calibri" pitchFamily="34" charset="-120"/>
+              </a:rPr>
+              <a:t>VS Code extension</a:t>
+            </a:r>
+            <a:endParaRPr lang="en-US" sz="1400" dirty="0"/>
+          </a:p>
+        </p:txBody>
+      </p:sp>
+      <p:sp>
+        <p:nvSpPr>
+          <p:cNvPr id="12" name="Text 8"/>
+          <p:cNvSpPr/>
+          <p:nvPr/>
+        </p:nvSpPr>
+        <p:spPr>
+          <a:xfrm>
+            <a:off x="5513832" y="1700784"/>
+            <a:ext cx="2971800" cy="914400"/>
+          </a:xfrm>
+          <a:prstGeom prst="rect">
+            <a:avLst/>
+          </a:prstGeom>
+          <a:noFill/>
+          <a:ln/>
+        </p:spPr>
+        <p:txBody>
+          <a:bodyPr wrap="square" lIns="0" tIns="0" rIns="0" bIns="0" rtlCol="0" anchor="t"/>
+          <a:lstStyle/>
+          <a:p>
+            <a:pPr indent="0" marL="0">
+              <a:buNone/>
+            </a:pPr>
+            <a:r>
+              <a:rPr lang="en-US" sz="1100" dirty="0">
+                <a:solidFill>
+                  <a:srgbClr val="13283A"/>
+                </a:solidFill>
+                <a:latin typeface="Calibri" pitchFamily="34" charset="0"/>
+                <a:ea typeface="Calibri" pitchFamily="34" charset="-122"/>
+                <a:cs typeface="Calibri" pitchFamily="34" charset="-120"/>
+              </a:rPr>
+              <a:t>The same diagram navigation inside the editor developers already live in — one format, two surfaces.</a:t>
+            </a:r>
+            <a:endParaRPr lang="en-US" sz="1100" dirty="0"/>
+          </a:p>
+        </p:txBody>
+      </p:sp>
+      <p:sp>
+        <p:nvSpPr>
+          <p:cNvPr id="13" name="Shape 9"/>
+          <p:cNvSpPr/>
+          <p:nvPr/>
+        </p:nvSpPr>
+        <p:spPr>
+          <a:xfrm>
+            <a:off x="457200" y="2971800"/>
+            <a:ext cx="3977640" cy="1600200"/>
+          </a:xfrm>
+          <a:prstGeom prst="roundRect">
+            <a:avLst>
+              <a:gd name="adj" fmla="val 4571"/>
+            </a:avLst>
+          </a:prstGeom>
+          <a:solidFill>
+            <a:srgbClr val="EDF4F9"/>
+          </a:solidFill>
+          <a:ln/>
+          <a:effectLst>
+            <a:outerShdw sx="100000" sy="100000" kx="0" ky="0" algn="bl" rotWithShape="0" blurRad="88900" dist="25400" dir="8100000">
+              <a:srgbClr val="1A2A3A">
+                <a:alpha val="18000"/>
+              </a:srgbClr>
+            </a:outerShdw>
+          </a:effectLst>
+        </p:spPr>
+      </p:sp>
+      <p:sp>
+        <p:nvSpPr>
+          <p:cNvPr id="14" name="Shape 10"/>
+          <p:cNvSpPr/>
+          <p:nvPr/>
+        </p:nvSpPr>
+        <p:spPr>
+          <a:xfrm>
+            <a:off x="658368" y="3172968"/>
+            <a:ext cx="457200" cy="457200"/>
+          </a:xfrm>
+          <a:prstGeom prst="ellipse">
+            <a:avLst/>
+          </a:prstGeom>
+          <a:solidFill>
+            <a:srgbClr val="21295C"/>
+          </a:solidFill>
+          <a:ln/>
+        </p:spPr>
+      </p:sp>
+      <p:pic>
+        <p:nvPicPr>
+          <p:cNvPr id="15" name="Image 2" descr="preencoded.png">    </p:cNvPr>
+          <p:cNvPicPr>
+            <a:picLocks noChangeAspect="1"/>
+          </p:cNvPicPr>
+          <p:nvPr/>
+        </p:nvPicPr>
+        <p:blipFill>
+          <a:blip r:embed="rId3"/>
+          <a:stretch>
+            <a:fillRect/>
+          </a:stretch>
+        </p:blipFill>
+        <p:spPr>
+          <a:xfrm>
+            <a:off x="781812" y="3296412"/>
+            <a:ext cx="210312" cy="210312"/>
+          </a:xfrm>
+          <a:prstGeom prst="rect">
+            <a:avLst/>
+          </a:prstGeom>
+        </p:spPr>
+      </p:pic>
+      <p:sp>
+        <p:nvSpPr>
+          <p:cNvPr id="16" name="Text 11"/>
+          <p:cNvSpPr/>
+          <p:nvPr/>
+        </p:nvSpPr>
+        <p:spPr>
+          <a:xfrm>
+            <a:off x="1261872" y="3172968"/>
+            <a:ext cx="2971800" cy="292608"/>
+          </a:xfrm>
+          <a:prstGeom prst="rect">
+            <a:avLst/>
+          </a:prstGeom>
+          <a:noFill/>
+          <a:ln/>
+        </p:spPr>
+        <p:txBody>
+          <a:bodyPr wrap="square" lIns="0" tIns="0" rIns="0" bIns="0" rtlCol="0" anchor="ctr"/>
+          <a:lstStyle/>
+          <a:p>
+            <a:pPr indent="0" marL="0">
+              <a:buNone/>
+            </a:pPr>
+            <a:r>
+              <a:rPr lang="en-US" sz="1400" b="1" dirty="0">
+                <a:solidFill>
+                  <a:srgbClr val="13283A"/>
+                </a:solidFill>
+                <a:latin typeface="Calibri" pitchFamily="34" charset="0"/>
+                <a:ea typeface="Calibri" pitchFamily="34" charset="-122"/>
+                <a:cs typeface="Calibri" pitchFamily="34" charset="-120"/>
+              </a:rPr>
+              <a:t>codeswim-coverage CLI</a:t>
+            </a:r>
+            <a:endParaRPr lang="en-US" sz="1400" dirty="0"/>
+          </a:p>
+        </p:txBody>
+      </p:sp>
+      <p:sp>
+        <p:nvSpPr>
+          <p:cNvPr id="17" name="Text 12"/>
+          <p:cNvSpPr/>
+          <p:nvPr/>
+        </p:nvSpPr>
+        <p:spPr>
+          <a:xfrm>
+            <a:off x="1261872" y="3483864"/>
+            <a:ext cx="2971800" cy="914400"/>
+          </a:xfrm>
+          <a:prstGeom prst="rect">
+            <a:avLst/>
+          </a:prstGeom>
+          <a:noFill/>
+          <a:ln/>
+        </p:spPr>
+        <p:txBody>
+          <a:bodyPr wrap="square" lIns="0" tIns="0" rIns="0" bIns="0" rtlCol="0" anchor="t"/>
+          <a:lstStyle/>
+          <a:p>
+            <a:pPr indent="0" marL="0">
+              <a:buNone/>
+            </a:pPr>
+            <a:r>
+              <a:rPr lang="en-US" sz="1100" dirty="0">
+                <a:solidFill>
+                  <a:srgbClr val="13283A"/>
+                </a:solidFill>
+                <a:latin typeface="Calibri" pitchFamily="34" charset="0"/>
+                <a:ea typeface="Calibri" pitchFamily="34" charset="-122"/>
+                <a:cs typeface="Calibri" pitchFamily="34" charset="-120"/>
+              </a:rPr>
+              <a:t>A CI check that every source file is reachable from a diagram. Architecture drift becomes a failing build, not a surprise.</a:t>
+            </a:r>
+            <a:endParaRPr lang="en-US" sz="1100" dirty="0"/>
+          </a:p>
+        </p:txBody>
+      </p:sp>
+      <p:sp>
+        <p:nvSpPr>
+          <p:cNvPr id="18" name="Shape 13"/>
+          <p:cNvSpPr/>
+          <p:nvPr/>
+        </p:nvSpPr>
+        <p:spPr>
+          <a:xfrm>
+            <a:off x="4709160" y="2971800"/>
+            <a:ext cx="3977640" cy="1600200"/>
+          </a:xfrm>
+          <a:prstGeom prst="roundRect">
+            <a:avLst>
+              <a:gd name="adj" fmla="val 4571"/>
+            </a:avLst>
+          </a:prstGeom>
+          <a:solidFill>
+            <a:srgbClr val="EDF4F9"/>
+          </a:solidFill>
+          <a:ln/>
+          <a:effectLst>
+            <a:outerShdw sx="100000" sy="100000" kx="0" ky="0" algn="bl" rotWithShape="0" blurRad="88900" dist="25400" dir="8100000">
+              <a:srgbClr val="1A2A3A">
+                <a:alpha val="18000"/>
+              </a:srgbClr>
+            </a:outerShdw>
+          </a:effectLst>
+        </p:spPr>
+      </p:sp>
+      <p:sp>
+        <p:nvSpPr>
+          <p:cNvPr id="19" name="Shape 14"/>
+          <p:cNvSpPr/>
+          <p:nvPr/>
+        </p:nvSpPr>
+        <p:spPr>
+          <a:xfrm>
+            <a:off x="4910328" y="3172968"/>
+            <a:ext cx="457200" cy="457200"/>
+          </a:xfrm>
+          <a:prstGeom prst="ellipse">
+            <a:avLst/>
           </a:prstGeom>
           <a:solidFill>
             <a:srgbClr val="02C39A"/>
@@ -7442,16 +8768,40 @@
           <a:ln/>
         </p:spPr>
       </p:sp>
-      <p:sp>
-        <p:nvSpPr>
-          <p:cNvPr id="5" name="Text 3"/>
-          <p:cNvSpPr/>
-          <p:nvPr/>
-        </p:nvSpPr>
-        <p:spPr>
-          <a:xfrm>
-            <a:off x="685800" y="1463040"/>
-            <a:ext cx="868680" cy="310896"/>
+      <p:pic>
+        <p:nvPicPr>
+          <p:cNvPr id="20" name="Image 3" descr="preencoded.png">    </p:cNvPr>
+          <p:cNvPicPr>
+            <a:picLocks noChangeAspect="1"/>
+          </p:cNvPicPr>
+          <p:nvPr/>
+        </p:nvPicPr>
+        <p:blipFill>
+          <a:blip r:embed="rId4"/>
+          <a:stretch>
+            <a:fillRect/>
+          </a:stretch>
+        </p:blipFill>
+        <p:spPr>
+          <a:xfrm>
+            <a:off x="5033772" y="3296412"/>
+            <a:ext cx="210312" cy="210312"/>
+          </a:xfrm>
+          <a:prstGeom prst="rect">
+            <a:avLst/>
+          </a:prstGeom>
+        </p:spPr>
+      </p:pic>
+      <p:sp>
+        <p:nvSpPr>
+          <p:cNvPr id="21" name="Text 15"/>
+          <p:cNvSpPr/>
+          <p:nvPr/>
+        </p:nvSpPr>
+        <p:spPr>
+          <a:xfrm>
+            <a:off x="5513832" y="3172968"/>
+            <a:ext cx="2971800" cy="292608"/>
           </a:xfrm>
           <a:prstGeom prst="rect">
             <a:avLst/>
@@ -7463,50 +8813,11 @@
           <a:bodyPr wrap="square" lIns="0" tIns="0" rIns="0" bIns="0" rtlCol="0" anchor="ctr"/>
           <a:lstStyle/>
           <a:p>
-            <a:pPr algn="ctr" indent="0" marL="0">
-              <a:buNone/>
-            </a:pPr>
-            <a:r>
-              <a:rPr lang="en-US" sz="1050" b="1" dirty="0">
-                <a:solidFill>
-                  <a:srgbClr val="FFFFFF"/>
-                </a:solidFill>
-                <a:latin typeface="Consolas" pitchFamily="34" charset="0"/>
-                <a:ea typeface="Consolas" pitchFamily="34" charset="-122"/>
-                <a:cs typeface="Consolas" pitchFamily="34" charset="-120"/>
-              </a:rPr>
-              <a:t>NOW</a:t>
-            </a:r>
-            <a:endParaRPr lang="en-US" sz="1050" dirty="0"/>
-          </a:p>
-        </p:txBody>
-      </p:sp>
-      <p:sp>
-        <p:nvSpPr>
-          <p:cNvPr id="6" name="Text 4"/>
-          <p:cNvSpPr/>
-          <p:nvPr/>
-        </p:nvSpPr>
-        <p:spPr>
-          <a:xfrm>
-            <a:off x="1664208" y="1463040"/>
-            <a:ext cx="1249680" cy="310896"/>
-          </a:xfrm>
-          <a:prstGeom prst="rect">
-            <a:avLst/>
-          </a:prstGeom>
-          <a:noFill/>
-          <a:ln/>
-        </p:spPr>
-        <p:txBody>
-          <a:bodyPr wrap="square" lIns="0" tIns="0" rIns="0" bIns="0" rtlCol="0" anchor="ctr"/>
-          <a:lstStyle/>
-          <a:p>
             <a:pPr indent="0" marL="0">
               <a:buNone/>
             </a:pPr>
             <a:r>
-              <a:rPr lang="en-US" sz="1350" b="1" dirty="0">
+              <a:rPr lang="en-US" sz="1400" b="1" dirty="0">
                 <a:solidFill>
                   <a:srgbClr val="13283A"/>
                 </a:solidFill>
@@ -7514,22 +8825,22 @@
                 <a:ea typeface="Calibri" pitchFamily="34" charset="-122"/>
                 <a:cs typeface="Calibri" pitchFamily="34" charset="-120"/>
               </a:rPr>
-              <a:t>Shipped</a:t>
-            </a:r>
-            <a:endParaRPr lang="en-US" sz="1350" dirty="0"/>
-          </a:p>
-        </p:txBody>
-      </p:sp>
-      <p:sp>
-        <p:nvSpPr>
-          <p:cNvPr id="7" name="Text 5"/>
-          <p:cNvSpPr/>
-          <p:nvPr/>
-        </p:nvSpPr>
-        <p:spPr>
-          <a:xfrm>
-            <a:off x="685800" y="1947672"/>
-            <a:ext cx="2164080" cy="2331720"/>
+              <a:t>A method, not just a tool</a:t>
+            </a:r>
+            <a:endParaRPr lang="en-US" sz="1400" dirty="0"/>
+          </a:p>
+        </p:txBody>
+      </p:sp>
+      <p:sp>
+        <p:nvSpPr>
+          <p:cNvPr id="22" name="Text 16"/>
+          <p:cNvSpPr/>
+          <p:nvPr/>
+        </p:nvSpPr>
+        <p:spPr>
+          <a:xfrm>
+            <a:off x="5513832" y="3483864"/>
+            <a:ext cx="2971800" cy="914400"/>
           </a:xfrm>
           <a:prstGeom prst="rect">
             <a:avLst/>
@@ -7541,15 +8852,11 @@
           <a:bodyPr wrap="square" lIns="0" tIns="0" rIns="0" bIns="0" rtlCol="0" anchor="t"/>
           <a:lstStyle/>
           <a:p>
-            <a:pPr marL="152400" indent="-152400">
-              <a:spcAft>
-                <a:spcPts val="700"/>
-              </a:spcAft>
-              <a:buSzPct val="100000"/>
-              <a:buChar char="•"/>
-            </a:pPr>
-            <a:r>
-              <a:rPr lang="en-US" sz="1150" dirty="0">
+            <a:pPr indent="0" marL="0">
+              <a:buNone/>
+            </a:pPr>
+            <a:r>
+              <a:rPr lang="en-US" sz="1100" dirty="0">
                 <a:solidFill>
                   <a:srgbClr val="13283A"/>
                 </a:solidFill>
@@ -7557,486 +8864,48 @@
                 <a:ea typeface="Calibri" pitchFamily="34" charset="-122"/>
                 <a:cs typeface="Calibri" pitchFamily="34" charset="-120"/>
               </a:rPr>
-              <a:t>Read-only navigator with live reload</a:t>
-            </a:r>
-            <a:endParaRPr lang="en-US" sz="1150" dirty="0"/>
-          </a:p>
-          <a:p>
-            <a:pPr marL="152400" indent="-152400">
-              <a:spcAft>
-                <a:spcPts val="700"/>
-              </a:spcAft>
-              <a:buSzPct val="100000"/>
-              <a:buChar char="•"/>
-            </a:pPr>
-            <a:r>
-              <a:rPr lang="en-US" sz="1150" dirty="0">
-                <a:solidFill>
-                  <a:srgbClr val="13283A"/>
+              <a:t>Mermaid-Driven Development: overview → architecture → flows → decisions. A runnable example repo shows the way.</a:t>
+            </a:r>
+            <a:endParaRPr lang="en-US" sz="1100" dirty="0"/>
+          </a:p>
+        </p:txBody>
+      </p:sp>
+      <p:sp>
+        <p:nvSpPr>
+          <p:cNvPr id="23" name="Text 17"/>
+          <p:cNvSpPr/>
+          <p:nvPr/>
+        </p:nvSpPr>
+        <p:spPr>
+          <a:xfrm>
+            <a:off x="457200" y="4681728"/>
+            <a:ext cx="8229600" cy="365760"/>
+          </a:xfrm>
+          <a:prstGeom prst="rect">
+            <a:avLst/>
+          </a:prstGeom>
+          <a:noFill/>
+          <a:ln/>
+        </p:spPr>
+        <p:txBody>
+          <a:bodyPr wrap="square" lIns="0" tIns="0" rIns="0" bIns="0" rtlCol="0" anchor="ctr"/>
+          <a:lstStyle/>
+          <a:p>
+            <a:pPr algn="ctr" indent="0" marL="0">
+              <a:buNone/>
+            </a:pPr>
+            <a:r>
+              <a:rPr lang="en-US" sz="1250" i="1" dirty="0">
+                <a:solidFill>
+                  <a:srgbClr val="5B7083"/>
                 </a:solidFill>
                 <a:latin typeface="Calibri" pitchFamily="34" charset="0"/>
                 <a:ea typeface="Calibri" pitchFamily="34" charset="-122"/>
                 <a:cs typeface="Calibri" pitchFamily="34" charset="-120"/>
               </a:rPr>
-              <a:t>Code pane with line-range highlights</a:t>
-            </a:r>
-            <a:endParaRPr lang="en-US" sz="1150" dirty="0"/>
-          </a:p>
-          <a:p>
-            <a:pPr marL="152400" indent="-152400">
-              <a:spcAft>
-                <a:spcPts val="700"/>
-              </a:spcAft>
-              <a:buSzPct val="100000"/>
-              <a:buChar char="•"/>
-            </a:pPr>
-            <a:r>
-              <a:rPr lang="en-US" sz="1150" dirty="0">
-                <a:solidFill>
-                  <a:srgbClr val="13283A"/>
-                </a:solidFill>
-                <a:latin typeface="Calibri" pitchFamily="34" charset="0"/>
-                <a:ea typeface="Calibri" pitchFamily="34" charset="-122"/>
-                <a:cs typeface="Calibri" pitchFamily="34" charset="-120"/>
-              </a:rPr>
-              <a:t>Git controls &amp; npm script runner</a:t>
-            </a:r>
-            <a:endParaRPr lang="en-US" sz="1150" dirty="0"/>
-          </a:p>
-          <a:p>
-            <a:pPr marL="152400" indent="-152400">
-              <a:spcAft>
-                <a:spcPts val="700"/>
-              </a:spcAft>
-              <a:buSzPct val="100000"/>
-              <a:buChar char="•"/>
-            </a:pPr>
-            <a:r>
-              <a:rPr lang="en-US" sz="1150" dirty="0">
-                <a:solidFill>
-                  <a:srgbClr val="13283A"/>
-                </a:solidFill>
-                <a:latin typeface="Calibri" pitchFamily="34" charset="0"/>
-                <a:ea typeface="Calibri" pitchFamily="34" charset="-122"/>
-                <a:cs typeface="Calibri" pitchFamily="34" charset="-120"/>
-              </a:rPr>
-              <a:t>Agent panel for diagram/code alignment</a:t>
-            </a:r>
-            <a:endParaRPr lang="en-US" sz="1150" dirty="0"/>
-          </a:p>
-        </p:txBody>
-      </p:sp>
-      <p:sp>
-        <p:nvSpPr>
-          <p:cNvPr id="8" name="Shape 6"/>
-          <p:cNvSpPr/>
-          <p:nvPr/>
-        </p:nvSpPr>
-        <p:spPr>
-          <a:xfrm>
-            <a:off x="3261360" y="1234440"/>
-            <a:ext cx="2621280" cy="3246120"/>
-          </a:xfrm>
-          <a:prstGeom prst="roundRect">
-            <a:avLst>
-              <a:gd name="adj" fmla="val 2791"/>
-            </a:avLst>
-          </a:prstGeom>
-          <a:solidFill>
-            <a:srgbClr val="EDF4F9"/>
-          </a:solidFill>
-          <a:ln/>
-        </p:spPr>
-      </p:sp>
-      <p:sp>
-        <p:nvSpPr>
-          <p:cNvPr id="9" name="Shape 7"/>
-          <p:cNvSpPr/>
-          <p:nvPr/>
-        </p:nvSpPr>
-        <p:spPr>
-          <a:xfrm>
-            <a:off x="3489960" y="1463040"/>
-            <a:ext cx="868680" cy="310896"/>
-          </a:xfrm>
-          <a:prstGeom prst="roundRect">
-            <a:avLst>
-              <a:gd name="adj" fmla="val 50000"/>
-            </a:avLst>
-          </a:prstGeom>
-          <a:solidFill>
-            <a:srgbClr val="1C7293"/>
-          </a:solidFill>
-          <a:ln/>
-        </p:spPr>
-      </p:sp>
-      <p:sp>
-        <p:nvSpPr>
-          <p:cNvPr id="10" name="Text 8"/>
-          <p:cNvSpPr/>
-          <p:nvPr/>
-        </p:nvSpPr>
-        <p:spPr>
-          <a:xfrm>
-            <a:off x="3489960" y="1463040"/>
-            <a:ext cx="868680" cy="310896"/>
-          </a:xfrm>
-          <a:prstGeom prst="rect">
-            <a:avLst/>
-          </a:prstGeom>
-          <a:noFill/>
-          <a:ln/>
-        </p:spPr>
-        <p:txBody>
-          <a:bodyPr wrap="square" lIns="0" tIns="0" rIns="0" bIns="0" rtlCol="0" anchor="ctr"/>
-          <a:lstStyle/>
-          <a:p>
-            <a:pPr algn="ctr" indent="0" marL="0">
-              <a:buNone/>
-            </a:pPr>
-            <a:r>
-              <a:rPr lang="en-US" sz="1050" b="1" dirty="0">
-                <a:solidFill>
-                  <a:srgbClr val="FFFFFF"/>
-                </a:solidFill>
-                <a:latin typeface="Consolas" pitchFamily="34" charset="0"/>
-                <a:ea typeface="Consolas" pitchFamily="34" charset="-122"/>
-                <a:cs typeface="Consolas" pitchFamily="34" charset="-120"/>
-              </a:rPr>
-              <a:t>NEXT</a:t>
-            </a:r>
-            <a:endParaRPr lang="en-US" sz="1050" dirty="0"/>
-          </a:p>
-        </p:txBody>
-      </p:sp>
-      <p:sp>
-        <p:nvSpPr>
-          <p:cNvPr id="11" name="Text 9"/>
-          <p:cNvSpPr/>
-          <p:nvPr/>
-        </p:nvSpPr>
-        <p:spPr>
-          <a:xfrm>
-            <a:off x="4468368" y="1463040"/>
-            <a:ext cx="1249680" cy="310896"/>
-          </a:xfrm>
-          <a:prstGeom prst="rect">
-            <a:avLst/>
-          </a:prstGeom>
-          <a:noFill/>
-          <a:ln/>
-        </p:spPr>
-        <p:txBody>
-          <a:bodyPr wrap="square" lIns="0" tIns="0" rIns="0" bIns="0" rtlCol="0" anchor="ctr"/>
-          <a:lstStyle/>
-          <a:p>
-            <a:pPr indent="0" marL="0">
-              <a:buNone/>
-            </a:pPr>
-            <a:r>
-              <a:rPr lang="en-US" sz="1350" b="1" dirty="0">
-                <a:solidFill>
-                  <a:srgbClr val="13283A"/>
-                </a:solidFill>
-                <a:latin typeface="Calibri" pitchFamily="34" charset="0"/>
-                <a:ea typeface="Calibri" pitchFamily="34" charset="-122"/>
-                <a:cs typeface="Calibri" pitchFamily="34" charset="-120"/>
-              </a:rPr>
-              <a:t>In flight</a:t>
-            </a:r>
-            <a:endParaRPr lang="en-US" sz="1350" dirty="0"/>
-          </a:p>
-        </p:txBody>
-      </p:sp>
-      <p:sp>
-        <p:nvSpPr>
-          <p:cNvPr id="12" name="Text 10"/>
-          <p:cNvSpPr/>
-          <p:nvPr/>
-        </p:nvSpPr>
-        <p:spPr>
-          <a:xfrm>
-            <a:off x="3489960" y="1947672"/>
-            <a:ext cx="2164080" cy="2331720"/>
-          </a:xfrm>
-          <a:prstGeom prst="rect">
-            <a:avLst/>
-          </a:prstGeom>
-          <a:noFill/>
-          <a:ln/>
-        </p:spPr>
-        <p:txBody>
-          <a:bodyPr wrap="square" lIns="0" tIns="0" rIns="0" bIns="0" rtlCol="0" anchor="t"/>
-          <a:lstStyle/>
-          <a:p>
-            <a:pPr marL="152400" indent="-152400">
-              <a:spcAft>
-                <a:spcPts val="700"/>
-              </a:spcAft>
-              <a:buSzPct val="100000"/>
-              <a:buChar char="•"/>
-            </a:pPr>
-            <a:r>
-              <a:rPr lang="en-US" sz="1150" dirty="0">
-                <a:solidFill>
-                  <a:srgbClr val="13283A"/>
-                </a:solidFill>
-                <a:latin typeface="Calibri" pitchFamily="34" charset="0"/>
-                <a:ea typeface="Calibri" pitchFamily="34" charset="-122"/>
-                <a:cs typeface="Calibri" pitchFamily="34" charset="-120"/>
-              </a:rPr>
-              <a:t>Coverage gates wired into CI</a:t>
-            </a:r>
-            <a:endParaRPr lang="en-US" sz="1150" dirty="0"/>
-          </a:p>
-          <a:p>
-            <a:pPr marL="152400" indent="-152400">
-              <a:spcAft>
-                <a:spcPts val="700"/>
-              </a:spcAft>
-              <a:buSzPct val="100000"/>
-              <a:buChar char="•"/>
-            </a:pPr>
-            <a:r>
-              <a:rPr lang="en-US" sz="1150" dirty="0">
-                <a:solidFill>
-                  <a:srgbClr val="13283A"/>
-                </a:solidFill>
-                <a:latin typeface="Calibri" pitchFamily="34" charset="0"/>
-                <a:ea typeface="Calibri" pitchFamily="34" charset="-122"/>
-                <a:cs typeface="Calibri" pitchFamily="34" charset="-120"/>
-              </a:rPr>
-              <a:t>Search across the diagram tree</a:t>
-            </a:r>
-            <a:endParaRPr lang="en-US" sz="1150" dirty="0"/>
-          </a:p>
-          <a:p>
-            <a:pPr marL="152400" indent="-152400">
-              <a:spcAft>
-                <a:spcPts val="700"/>
-              </a:spcAft>
-              <a:buSzPct val="100000"/>
-              <a:buChar char="•"/>
-            </a:pPr>
-            <a:r>
-              <a:rPr lang="en-US" sz="1150" dirty="0">
-                <a:solidFill>
-                  <a:srgbClr val="13283A"/>
-                </a:solidFill>
-                <a:latin typeface="Calibri" pitchFamily="34" charset="0"/>
-                <a:ea typeface="Calibri" pitchFamily="34" charset="-122"/>
-                <a:cs typeface="Calibri" pitchFamily="34" charset="-120"/>
-              </a:rPr>
-              <a:t>Agent-generated diagrams for existing repos (bootstrap any codebase)</a:t>
-            </a:r>
-            <a:endParaRPr lang="en-US" sz="1150" dirty="0"/>
-          </a:p>
-        </p:txBody>
-      </p:sp>
-      <p:sp>
-        <p:nvSpPr>
-          <p:cNvPr id="13" name="Shape 11"/>
-          <p:cNvSpPr/>
-          <p:nvPr/>
-        </p:nvSpPr>
-        <p:spPr>
-          <a:xfrm>
-            <a:off x="6065520" y="1234440"/>
-            <a:ext cx="2621280" cy="3246120"/>
-          </a:xfrm>
-          <a:prstGeom prst="roundRect">
-            <a:avLst>
-              <a:gd name="adj" fmla="val 2791"/>
-            </a:avLst>
-          </a:prstGeom>
-          <a:solidFill>
-            <a:srgbClr val="EDF4F9"/>
-          </a:solidFill>
-          <a:ln/>
-        </p:spPr>
-      </p:sp>
-      <p:sp>
-        <p:nvSpPr>
-          <p:cNvPr id="14" name="Shape 12"/>
-          <p:cNvSpPr/>
-          <p:nvPr/>
-        </p:nvSpPr>
-        <p:spPr>
-          <a:xfrm>
-            <a:off x="6294120" y="1463040"/>
-            <a:ext cx="868680" cy="310896"/>
-          </a:xfrm>
-          <a:prstGeom prst="roundRect">
-            <a:avLst>
-              <a:gd name="adj" fmla="val 50000"/>
-            </a:avLst>
-          </a:prstGeom>
-          <a:solidFill>
-            <a:srgbClr val="21295C"/>
-          </a:solidFill>
-          <a:ln/>
-        </p:spPr>
-      </p:sp>
-      <p:sp>
-        <p:nvSpPr>
-          <p:cNvPr id="15" name="Text 13"/>
-          <p:cNvSpPr/>
-          <p:nvPr/>
-        </p:nvSpPr>
-        <p:spPr>
-          <a:xfrm>
-            <a:off x="6294120" y="1463040"/>
-            <a:ext cx="868680" cy="310896"/>
-          </a:xfrm>
-          <a:prstGeom prst="rect">
-            <a:avLst/>
-          </a:prstGeom>
-          <a:noFill/>
-          <a:ln/>
-        </p:spPr>
-        <p:txBody>
-          <a:bodyPr wrap="square" lIns="0" tIns="0" rIns="0" bIns="0" rtlCol="0" anchor="ctr"/>
-          <a:lstStyle/>
-          <a:p>
-            <a:pPr algn="ctr" indent="0" marL="0">
-              <a:buNone/>
-            </a:pPr>
-            <a:r>
-              <a:rPr lang="en-US" sz="1050" b="1" dirty="0">
-                <a:solidFill>
-                  <a:srgbClr val="FFFFFF"/>
-                </a:solidFill>
-                <a:latin typeface="Consolas" pitchFamily="34" charset="0"/>
-                <a:ea typeface="Consolas" pitchFamily="34" charset="-122"/>
-                <a:cs typeface="Consolas" pitchFamily="34" charset="-120"/>
-              </a:rPr>
-              <a:t>LATER</a:t>
-            </a:r>
-            <a:endParaRPr lang="en-US" sz="1050" dirty="0"/>
-          </a:p>
-        </p:txBody>
-      </p:sp>
-      <p:sp>
-        <p:nvSpPr>
-          <p:cNvPr id="16" name="Text 14"/>
-          <p:cNvSpPr/>
-          <p:nvPr/>
-        </p:nvSpPr>
-        <p:spPr>
-          <a:xfrm>
-            <a:off x="7272528" y="1463040"/>
-            <a:ext cx="1249680" cy="310896"/>
-          </a:xfrm>
-          <a:prstGeom prst="rect">
-            <a:avLst/>
-          </a:prstGeom>
-          <a:noFill/>
-          <a:ln/>
-        </p:spPr>
-        <p:txBody>
-          <a:bodyPr wrap="square" lIns="0" tIns="0" rIns="0" bIns="0" rtlCol="0" anchor="ctr"/>
-          <a:lstStyle/>
-          <a:p>
-            <a:pPr indent="0" marL="0">
-              <a:buNone/>
-            </a:pPr>
-            <a:r>
-              <a:rPr lang="en-US" sz="1350" b="1" dirty="0">
-                <a:solidFill>
-                  <a:srgbClr val="13283A"/>
-                </a:solidFill>
-                <a:latin typeface="Calibri" pitchFamily="34" charset="0"/>
-                <a:ea typeface="Calibri" pitchFamily="34" charset="-122"/>
-                <a:cs typeface="Calibri" pitchFamily="34" charset="-120"/>
-              </a:rPr>
-              <a:t>The bet</a:t>
-            </a:r>
-            <a:endParaRPr lang="en-US" sz="1350" dirty="0"/>
-          </a:p>
-        </p:txBody>
-      </p:sp>
-      <p:sp>
-        <p:nvSpPr>
-          <p:cNvPr id="17" name="Text 15"/>
-          <p:cNvSpPr/>
-          <p:nvPr/>
-        </p:nvSpPr>
-        <p:spPr>
-          <a:xfrm>
-            <a:off x="6294120" y="1947672"/>
-            <a:ext cx="2164080" cy="2331720"/>
-          </a:xfrm>
-          <a:prstGeom prst="rect">
-            <a:avLst/>
-          </a:prstGeom>
-          <a:noFill/>
-          <a:ln/>
-        </p:spPr>
-        <p:txBody>
-          <a:bodyPr wrap="square" lIns="0" tIns="0" rIns="0" bIns="0" rtlCol="0" anchor="t"/>
-          <a:lstStyle/>
-          <a:p>
-            <a:pPr marL="152400" indent="-152400">
-              <a:spcAft>
-                <a:spcPts val="700"/>
-              </a:spcAft>
-              <a:buSzPct val="100000"/>
-              <a:buChar char="•"/>
-            </a:pPr>
-            <a:r>
-              <a:rPr lang="en-US" sz="1150" dirty="0">
-                <a:solidFill>
-                  <a:srgbClr val="13283A"/>
-                </a:solidFill>
-                <a:latin typeface="Calibri" pitchFamily="34" charset="0"/>
-                <a:ea typeface="Calibri" pitchFamily="34" charset="-122"/>
-                <a:cs typeface="Calibri" pitchFamily="34" charset="-120"/>
-              </a:rPr>
-              <a:t>Executable flows — the diagram becomes the program, the agent wires the nodes</a:t>
-            </a:r>
-            <a:endParaRPr lang="en-US" sz="1150" dirty="0"/>
-          </a:p>
-          <a:p>
-            <a:pPr marL="152400" indent="-152400">
-              <a:spcAft>
-                <a:spcPts val="700"/>
-              </a:spcAft>
-              <a:buSzPct val="100000"/>
-              <a:buChar char="•"/>
-            </a:pPr>
-            <a:r>
-              <a:rPr lang="en-US" sz="1150" dirty="0">
-                <a:solidFill>
-                  <a:srgbClr val="13283A"/>
-                </a:solidFill>
-                <a:latin typeface="Calibri" pitchFamily="34" charset="0"/>
-                <a:ea typeface="Calibri" pitchFamily="34" charset="-122"/>
-                <a:cs typeface="Calibri" pitchFamily="34" charset="-120"/>
-              </a:rPr>
-              <a:t>Team views, multi-repo navigation</a:t>
-            </a:r>
-            <a:endParaRPr lang="en-US" sz="1150" dirty="0"/>
-          </a:p>
-          <a:p>
-            <a:pPr marL="152400" indent="-152400">
-              <a:spcAft>
-                <a:spcPts val="700"/>
-              </a:spcAft>
-              <a:buSzPct val="100000"/>
-              <a:buChar char="•"/>
-            </a:pPr>
-            <a:r>
-              <a:rPr lang="en-US" sz="1150" dirty="0">
-                <a:solidFill>
-                  <a:srgbClr val="13283A"/>
-                </a:solidFill>
-                <a:latin typeface="Calibri" pitchFamily="34" charset="0"/>
-                <a:ea typeface="Calibri" pitchFamily="34" charset="-122"/>
-                <a:cs typeface="Calibri" pitchFamily="34" charset="-120"/>
-              </a:rPr>
-              <a:t>Paid tier around the agentic runner</a:t>
-            </a:r>
-            <a:endParaRPr lang="en-US" sz="1150" dirty="0"/>
+              <a:t>Built and dogfooded by one engineer — codeswim's own architecture is navigated in codeswim.</a:t>
+            </a:r>
+            <a:endParaRPr lang="en-US" sz="1250" dirty="0"/>
           </a:p>
         </p:txBody>
       </p:sp>
